--- a/docs/webinar-resources/Module1-BMC-American-System-Hamiltonian-Business-Model-Canvas.pptx
+++ b/docs/webinar-resources/Module1-BMC-American-System-Hamiltonian-Business-Model-Canvas.pptx
@@ -1744,13 +1744,6 @@
 <file path=ppt/slides/slide1.xml><?xml version="1.0" encoding="utf-8"?>
 <p:sld xmlns:a="http://schemas.openxmlformats.org/drawingml/2006/main" xmlns:r="http://schemas.openxmlformats.org/officeDocument/2006/relationships" xmlns:p="http://schemas.openxmlformats.org/presentationml/2006/main">
   <p:cSld name="Slide 1">
-    <p:bg>
-      <p:bgPr>
-        <a:solidFill>
-          <a:srgbClr val="111111"/>
-        </a:solidFill>
-      </p:bgPr>
-    </p:bg>
     <p:spTree>
       <p:nvGrpSpPr>
         <p:cNvPr id="1" name=""/>
@@ -1767,13 +1760,38 @@
       </p:grpSpPr>
       <p:sp>
         <p:nvSpPr>
-          <p:cNvPr id="2" name="Text 0"/>
-          <p:cNvSpPr/>
-          <p:nvPr/>
-        </p:nvSpPr>
-        <p:spPr>
-          <a:xfrm>
-            <a:off x="548640" y="1280160"/>
+          <p:cNvPr id="2" name="Shape 0"/>
+          <p:cNvSpPr/>
+          <p:nvPr/>
+        </p:nvSpPr>
+        <p:spPr>
+          <a:xfrm>
+            <a:off x="0" y="0"/>
+            <a:ext cx="9144000" cy="5143500"/>
+          </a:xfrm>
+          <a:prstGeom prst="rect">
+            <a:avLst/>
+          </a:prstGeom>
+          <a:solidFill>
+            <a:srgbClr val="111111"/>
+          </a:solidFill>
+          <a:ln w="12700">
+            <a:solidFill>
+              <a:srgbClr val="111111"/>
+            </a:solidFill>
+            <a:prstDash val="solid"/>
+          </a:ln>
+        </p:spPr>
+      </p:sp>
+      <p:sp>
+        <p:nvSpPr>
+          <p:cNvPr id="3" name="Text 1"/>
+          <p:cNvSpPr/>
+          <p:nvPr/>
+        </p:nvSpPr>
+        <p:spPr>
+          <a:xfrm>
+            <a:off x="548640" y="1234440"/>
             <a:ext cx="8046720" cy="320040"/>
           </a:xfrm>
           <a:prstGeom prst="rect">
@@ -1790,9 +1808,9 @@
               <a:buNone/>
             </a:pPr>
             <a:r>
-              <a:rPr lang="en-US" sz="1400" spc="300" kern="0" dirty="0">
-                <a:solidFill>
-                  <a:srgbClr val="AAAAAA"/>
+              <a:rPr lang="en-US" sz="1400" b="1" spc="200" kern="0" dirty="0">
+                <a:solidFill>
+                  <a:srgbClr val="C9A227"/>
                 </a:solidFill>
                 <a:latin typeface="Arial" pitchFamily="34" charset="0"/>
                 <a:ea typeface="Arial" pitchFamily="34" charset="-122"/>
@@ -1806,32 +1824,32 @@
       </p:sp>
       <p:sp>
         <p:nvSpPr>
-          <p:cNvPr id="3" name="Text 1"/>
-          <p:cNvSpPr/>
-          <p:nvPr/>
-        </p:nvSpPr>
-        <p:spPr>
-          <a:xfrm>
-            <a:off x="548640" y="1737360"/>
-            <a:ext cx="8046720" cy="1371600"/>
-          </a:xfrm>
-          <a:prstGeom prst="rect">
-            <a:avLst/>
-          </a:prstGeom>
-          <a:noFill/>
-          <a:ln/>
-        </p:spPr>
-        <p:txBody>
-          <a:bodyPr wrap="square" lIns="0" tIns="0" rIns="0" bIns="0" rtlCol="0" anchor="ctr"/>
-          <a:lstStyle/>
-          <a:p>
-            <a:pPr indent="0" marL="0">
-              <a:buNone/>
-            </a:pPr>
-            <a:r>
-              <a:rPr lang="en-US" sz="3200" b="1" dirty="0">
-                <a:solidFill>
-                  <a:srgbClr val="F5F5F5"/>
+          <p:cNvPr id="4" name="Text 2"/>
+          <p:cNvSpPr/>
+          <p:nvPr/>
+        </p:nvSpPr>
+        <p:spPr>
+          <a:xfrm>
+            <a:off x="548640" y="1691640"/>
+            <a:ext cx="8046720" cy="1097280"/>
+          </a:xfrm>
+          <a:prstGeom prst="rect">
+            <a:avLst/>
+          </a:prstGeom>
+          <a:noFill/>
+          <a:ln/>
+        </p:spPr>
+        <p:txBody>
+          <a:bodyPr wrap="square" lIns="0" tIns="0" rIns="0" bIns="0" rtlCol="0" anchor="ctr"/>
+          <a:lstStyle/>
+          <a:p>
+            <a:pPr indent="0" marL="0">
+              <a:buNone/>
+            </a:pPr>
+            <a:r>
+              <a:rPr lang="en-US" sz="2800" b="1" dirty="0">
+                <a:solidFill>
+                  <a:srgbClr val="FFFFFF"/>
                 </a:solidFill>
                 <a:latin typeface="Arial" pitchFamily="34" charset="0"/>
                 <a:ea typeface="Arial" pitchFamily="34" charset="-122"/>
@@ -1839,16 +1857,16 @@
               </a:rPr>
               <a:t>Updating Your Business Model Canvas</a:t>
             </a:r>
-            <a:endParaRPr lang="en-US" sz="3200" dirty="0"/>
-          </a:p>
-          <a:p>
-            <a:pPr indent="0" marL="0">
-              <a:buNone/>
-            </a:pPr>
-            <a:r>
-              <a:rPr lang="en-US" sz="3200" b="1" dirty="0">
-                <a:solidFill>
-                  <a:srgbClr val="F5F5F5"/>
+            <a:endParaRPr lang="en-US" sz="2800" dirty="0"/>
+          </a:p>
+          <a:p>
+            <a:pPr indent="0" marL="0">
+              <a:buNone/>
+            </a:pPr>
+            <a:r>
+              <a:rPr lang="en-US" sz="2800" b="1" dirty="0">
+                <a:solidFill>
+                  <a:srgbClr val="FFFFFF"/>
                 </a:solidFill>
                 <a:latin typeface="Arial" pitchFamily="34" charset="0"/>
                 <a:ea typeface="Arial" pitchFamily="34" charset="-122"/>
@@ -1856,38 +1874,63 @@
               </a:rPr>
               <a:t>for the Hamiltonian System</a:t>
             </a:r>
-            <a:endParaRPr lang="en-US" sz="3200" dirty="0"/>
-          </a:p>
-        </p:txBody>
-      </p:sp>
-      <p:sp>
-        <p:nvSpPr>
-          <p:cNvPr id="4" name="Text 2"/>
-          <p:cNvSpPr/>
-          <p:nvPr/>
-        </p:nvSpPr>
-        <p:spPr>
-          <a:xfrm>
-            <a:off x="548640" y="3200400"/>
-            <a:ext cx="8046720" cy="365760"/>
-          </a:xfrm>
-          <a:prstGeom prst="rect">
-            <a:avLst/>
-          </a:prstGeom>
-          <a:noFill/>
-          <a:ln/>
-        </p:spPr>
-        <p:txBody>
-          <a:bodyPr wrap="square" lIns="0" tIns="0" rIns="0" bIns="0" rtlCol="0" anchor="ctr"/>
-          <a:lstStyle/>
-          <a:p>
-            <a:pPr indent="0" marL="0">
-              <a:buNone/>
-            </a:pPr>
-            <a:r>
-              <a:rPr lang="en-US" sz="1800" dirty="0">
-                <a:solidFill>
-                  <a:srgbClr val="CCCCCC"/>
+            <a:endParaRPr lang="en-US" sz="2800" dirty="0"/>
+          </a:p>
+        </p:txBody>
+      </p:sp>
+      <p:sp>
+        <p:nvSpPr>
+          <p:cNvPr id="5" name="Shape 3"/>
+          <p:cNvSpPr/>
+          <p:nvPr/>
+        </p:nvSpPr>
+        <p:spPr>
+          <a:xfrm>
+            <a:off x="548640" y="2926080"/>
+            <a:ext cx="1645920" cy="54864"/>
+          </a:xfrm>
+          <a:prstGeom prst="rect">
+            <a:avLst/>
+          </a:prstGeom>
+          <a:solidFill>
+            <a:srgbClr val="C9A227"/>
+          </a:solidFill>
+          <a:ln w="12700">
+            <a:solidFill>
+              <a:srgbClr val="C9A227"/>
+            </a:solidFill>
+            <a:prstDash val="solid"/>
+          </a:ln>
+        </p:spPr>
+      </p:sp>
+      <p:sp>
+        <p:nvSpPr>
+          <p:cNvPr id="6" name="Text 4"/>
+          <p:cNvSpPr/>
+          <p:nvPr/>
+        </p:nvSpPr>
+        <p:spPr>
+          <a:xfrm>
+            <a:off x="548640" y="3154680"/>
+            <a:ext cx="8046720" cy="320040"/>
+          </a:xfrm>
+          <a:prstGeom prst="rect">
+            <a:avLst/>
+          </a:prstGeom>
+          <a:noFill/>
+          <a:ln/>
+        </p:spPr>
+        <p:txBody>
+          <a:bodyPr wrap="square" lIns="0" tIns="0" rIns="0" bIns="0" rtlCol="0" anchor="ctr"/>
+          <a:lstStyle/>
+          <a:p>
+            <a:pPr indent="0" marL="0">
+              <a:buNone/>
+            </a:pPr>
+            <a:r>
+              <a:rPr lang="en-US" sz="1600" dirty="0">
+                <a:solidFill>
+                  <a:srgbClr val="C8C8C8"/>
                 </a:solidFill>
                 <a:latin typeface="Arial" pitchFamily="34" charset="0"/>
                 <a:ea typeface="Arial" pitchFamily="34" charset="-122"/>
@@ -1895,19 +1938,19 @@
               </a:rPr>
               <a:t>Building Sovereign American Capability</a:t>
             </a:r>
-            <a:endParaRPr lang="en-US" sz="1800" dirty="0"/>
-          </a:p>
-        </p:txBody>
-      </p:sp>
-      <p:sp>
-        <p:nvSpPr>
-          <p:cNvPr id="5" name="Text 3"/>
-          <p:cNvSpPr/>
-          <p:nvPr/>
-        </p:nvSpPr>
-        <p:spPr>
-          <a:xfrm>
-            <a:off x="548640" y="4206240"/>
+            <a:endParaRPr lang="en-US" sz="1600" dirty="0"/>
+          </a:p>
+        </p:txBody>
+      </p:sp>
+      <p:sp>
+        <p:nvSpPr>
+          <p:cNvPr id="7" name="Text 5"/>
+          <p:cNvSpPr/>
+          <p:nvPr/>
+        </p:nvSpPr>
+        <p:spPr>
+          <a:xfrm>
+            <a:off x="548640" y="4160520"/>
             <a:ext cx="8046720" cy="274320"/>
           </a:xfrm>
           <a:prstGeom prst="rect">
@@ -1924,9 +1967,9 @@
               <a:buNone/>
             </a:pPr>
             <a:r>
-              <a:rPr lang="en-US" sz="1400" dirty="0">
-                <a:solidFill>
-                  <a:srgbClr val="999999"/>
+              <a:rPr lang="en-US" sz="1300" dirty="0">
+                <a:solidFill>
+                  <a:srgbClr val="A0A0A0"/>
                 </a:solidFill>
                 <a:latin typeface="Arial" pitchFamily="34" charset="0"/>
                 <a:ea typeface="Arial" pitchFamily="34" charset="-122"/>
@@ -1934,7 +1977,7 @@
               </a:rPr>
               <a:t>Joshua Konkle  ·  Chief of Staff Strategist</a:t>
             </a:r>
-            <a:endParaRPr lang="en-US" sz="1400" dirty="0"/>
+            <a:endParaRPr lang="en-US" sz="1300" dirty="0"/>
           </a:p>
         </p:txBody>
       </p:sp>
@@ -1949,13 +1992,6 @@
 <file path=ppt/slides/slide10.xml><?xml version="1.0" encoding="utf-8"?>
 <p:sld xmlns:a="http://schemas.openxmlformats.org/drawingml/2006/main" xmlns:r="http://schemas.openxmlformats.org/officeDocument/2006/relationships" xmlns:p="http://schemas.openxmlformats.org/presentationml/2006/main">
   <p:cSld name="Slide 10">
-    <p:bg>
-      <p:bgPr>
-        <a:solidFill>
-          <a:srgbClr val="FFFFFF"/>
-        </a:solidFill>
-      </p:bgPr>
-    </p:bg>
     <p:spTree>
       <p:nvGrpSpPr>
         <p:cNvPr id="1" name=""/>
@@ -1972,63 +2008,24 @@
       </p:grpSpPr>
       <p:sp>
         <p:nvSpPr>
-          <p:cNvPr id="2" name="Text 0"/>
-          <p:cNvSpPr/>
-          <p:nvPr/>
-        </p:nvSpPr>
-        <p:spPr>
-          <a:xfrm>
-            <a:off x="457200" y="320040"/>
-            <a:ext cx="8229600" cy="457200"/>
-          </a:xfrm>
-          <a:prstGeom prst="rect">
-            <a:avLst/>
-          </a:prstGeom>
-          <a:noFill/>
-          <a:ln/>
-        </p:spPr>
-        <p:txBody>
-          <a:bodyPr wrap="square" lIns="0" tIns="0" rIns="0" bIns="0" rtlCol="0" anchor="ctr"/>
-          <a:lstStyle/>
-          <a:p>
-            <a:pPr indent="0" marL="0">
-              <a:buNone/>
-            </a:pPr>
-            <a:r>
-              <a:rPr lang="en-US" sz="2600" b="1" dirty="0">
-                <a:solidFill>
-                  <a:srgbClr val="1A1A1A"/>
-                </a:solidFill>
-                <a:latin typeface="Arial" pitchFamily="34" charset="0"/>
-                <a:ea typeface="Arial" pitchFamily="34" charset="-122"/>
-                <a:cs typeface="Arial" pitchFamily="34" charset="-120"/>
-              </a:rPr>
-              <a:t>The Five-Module Series</a:t>
-            </a:r>
-            <a:endParaRPr lang="en-US" sz="2600" dirty="0"/>
-          </a:p>
-        </p:txBody>
-      </p:sp>
-      <p:sp>
-        <p:nvSpPr>
-          <p:cNvPr id="3" name="Shape 1"/>
-          <p:cNvSpPr/>
-          <p:nvPr/>
-        </p:nvSpPr>
-        <p:spPr>
-          <a:xfrm>
-            <a:off x="365760" y="1371600"/>
-            <a:ext cx="1600200" cy="2194560"/>
+          <p:cNvPr id="2" name="Shape 0"/>
+          <p:cNvSpPr/>
+          <p:nvPr/>
+        </p:nvSpPr>
+        <p:spPr>
+          <a:xfrm>
+            <a:off x="0" y="0"/>
+            <a:ext cx="9144000" cy="5143500"/>
           </a:xfrm>
           <a:prstGeom prst="rect">
             <a:avLst/>
           </a:prstGeom>
           <a:solidFill>
-            <a:srgbClr val="111111"/>
+            <a:srgbClr val="FFFFFF"/>
           </a:solidFill>
           <a:ln w="12700">
             <a:solidFill>
-              <a:srgbClr val="CCCCCC"/>
+              <a:srgbClr val="FFFFFF"/>
             </a:solidFill>
             <a:prstDash val="solid"/>
           </a:ln>
@@ -2036,141 +2033,65 @@
       </p:sp>
       <p:sp>
         <p:nvSpPr>
-          <p:cNvPr id="4" name="Text 2"/>
-          <p:cNvSpPr/>
-          <p:nvPr/>
-        </p:nvSpPr>
-        <p:spPr>
-          <a:xfrm>
-            <a:off x="365760" y="1554480"/>
-            <a:ext cx="1600200" cy="457200"/>
-          </a:xfrm>
-          <a:prstGeom prst="rect">
-            <a:avLst/>
-          </a:prstGeom>
-          <a:noFill/>
-          <a:ln/>
-        </p:spPr>
-        <p:txBody>
-          <a:bodyPr wrap="square" lIns="0" tIns="0" rIns="0" bIns="0" rtlCol="0" anchor="ctr"/>
-          <a:lstStyle/>
-          <a:p>
-            <a:pPr algn="ctr" indent="0" marL="0">
-              <a:buNone/>
-            </a:pPr>
-            <a:r>
-              <a:rPr lang="en-US" sz="2800" b="1" dirty="0">
-                <a:solidFill>
-                  <a:srgbClr val="F5F5F5"/>
-                </a:solidFill>
-                <a:latin typeface="Arial" pitchFamily="34" charset="0"/>
-                <a:ea typeface="Arial" pitchFamily="34" charset="-122"/>
-                <a:cs typeface="Arial" pitchFamily="34" charset="-120"/>
-              </a:rPr>
-              <a:t>1</a:t>
-            </a:r>
-            <a:endParaRPr lang="en-US" sz="2800" dirty="0"/>
-          </a:p>
-        </p:txBody>
-      </p:sp>
-      <p:sp>
-        <p:nvSpPr>
-          <p:cNvPr id="5" name="Text 3"/>
-          <p:cNvSpPr/>
-          <p:nvPr/>
-        </p:nvSpPr>
-        <p:spPr>
-          <a:xfrm>
-            <a:off x="457200" y="2194560"/>
-            <a:ext cx="1417320" cy="822960"/>
-          </a:xfrm>
-          <a:prstGeom prst="rect">
-            <a:avLst/>
-          </a:prstGeom>
-          <a:noFill/>
-          <a:ln/>
-        </p:spPr>
-        <p:txBody>
-          <a:bodyPr wrap="square" lIns="0" tIns="0" rIns="0" bIns="0" rtlCol="0" anchor="ctr"/>
-          <a:lstStyle/>
-          <a:p>
-            <a:pPr algn="ctr" indent="0" marL="0">
-              <a:buNone/>
-            </a:pPr>
-            <a:r>
-              <a:rPr lang="en-US" sz="1200" b="1" dirty="0">
-                <a:solidFill>
-                  <a:srgbClr val="F5F5F5"/>
-                </a:solidFill>
-                <a:latin typeface="Arial" pitchFamily="34" charset="0"/>
-                <a:ea typeface="Arial" pitchFamily="34" charset="-122"/>
-                <a:cs typeface="Arial" pitchFamily="34" charset="-120"/>
-              </a:rPr>
-              <a:t>Business Model Canvas</a:t>
-            </a:r>
-            <a:endParaRPr lang="en-US" sz="1200" dirty="0"/>
-          </a:p>
-        </p:txBody>
-      </p:sp>
-      <p:sp>
-        <p:nvSpPr>
-          <p:cNvPr id="6" name="Text 4"/>
-          <p:cNvSpPr/>
-          <p:nvPr/>
-        </p:nvSpPr>
-        <p:spPr>
-          <a:xfrm>
-            <a:off x="457200" y="3108960"/>
-            <a:ext cx="1417320" cy="274320"/>
-          </a:xfrm>
-          <a:prstGeom prst="rect">
-            <a:avLst/>
-          </a:prstGeom>
-          <a:noFill/>
-          <a:ln/>
-        </p:spPr>
-        <p:txBody>
-          <a:bodyPr wrap="square" lIns="0" tIns="0" rIns="0" bIns="0" rtlCol="0" anchor="ctr"/>
-          <a:lstStyle/>
-          <a:p>
-            <a:pPr algn="ctr" indent="0" marL="0">
-              <a:buNone/>
-            </a:pPr>
-            <a:r>
-              <a:rPr lang="en-US" sz="1100" dirty="0">
-                <a:solidFill>
-                  <a:srgbClr val="AAAAAA"/>
-                </a:solidFill>
-                <a:latin typeface="Arial" pitchFamily="34" charset="0"/>
-                <a:ea typeface="Arial" pitchFamily="34" charset="-122"/>
-                <a:cs typeface="Arial" pitchFamily="34" charset="-120"/>
-              </a:rPr>
-              <a:t>This Module</a:t>
-            </a:r>
-            <a:endParaRPr lang="en-US" sz="1100" dirty="0"/>
-          </a:p>
-        </p:txBody>
-      </p:sp>
-      <p:sp>
-        <p:nvSpPr>
-          <p:cNvPr id="7" name="Shape 5"/>
-          <p:cNvSpPr/>
-          <p:nvPr/>
-        </p:nvSpPr>
-        <p:spPr>
-          <a:xfrm>
-            <a:off x="2103120" y="1371600"/>
-            <a:ext cx="1600200" cy="2194560"/>
-          </a:xfrm>
-          <a:prstGeom prst="rect">
-            <a:avLst/>
+          <p:cNvPr id="3" name="Text 1"/>
+          <p:cNvSpPr/>
+          <p:nvPr/>
+        </p:nvSpPr>
+        <p:spPr>
+          <a:xfrm>
+            <a:off x="457200" y="274320"/>
+            <a:ext cx="8229600" cy="411480"/>
+          </a:xfrm>
+          <a:prstGeom prst="rect">
+            <a:avLst/>
+          </a:prstGeom>
+          <a:noFill/>
+          <a:ln/>
+        </p:spPr>
+        <p:txBody>
+          <a:bodyPr wrap="square" lIns="0" tIns="0" rIns="0" bIns="0" rtlCol="0" anchor="ctr"/>
+          <a:lstStyle/>
+          <a:p>
+            <a:pPr indent="0" marL="0">
+              <a:buNone/>
+            </a:pPr>
+            <a:r>
+              <a:rPr lang="en-US" sz="2400" b="1" dirty="0">
+                <a:solidFill>
+                  <a:srgbClr val="1B2A4A"/>
+                </a:solidFill>
+                <a:latin typeface="Arial" pitchFamily="34" charset="0"/>
+                <a:ea typeface="Arial" pitchFamily="34" charset="-122"/>
+                <a:cs typeface="Arial" pitchFamily="34" charset="-120"/>
+              </a:rPr>
+              <a:t>The Five-Module Series</a:t>
+            </a:r>
+            <a:endParaRPr lang="en-US" sz="2400" dirty="0"/>
+          </a:p>
+        </p:txBody>
+      </p:sp>
+      <p:sp>
+        <p:nvSpPr>
+          <p:cNvPr id="4" name="Shape 2"/>
+          <p:cNvSpPr/>
+          <p:nvPr/>
+        </p:nvSpPr>
+        <p:spPr>
+          <a:xfrm>
+            <a:off x="365760" y="1280160"/>
+            <a:ext cx="1600200" cy="2286000"/>
+          </a:xfrm>
+          <a:prstGeom prst="roundRect">
+            <a:avLst>
+              <a:gd name="adj" fmla="val 4571"/>
+            </a:avLst>
           </a:prstGeom>
           <a:solidFill>
-            <a:srgbClr val="F7F7F7"/>
+            <a:srgbClr val="1B2A4A"/>
           </a:solidFill>
           <a:ln w="12700">
             <a:solidFill>
-              <a:srgbClr val="CCCCCC"/>
+              <a:srgbClr val="1B2A4A"/>
             </a:solidFill>
             <a:prstDash val="solid"/>
           </a:ln>
@@ -2178,141 +2099,24 @@
       </p:sp>
       <p:sp>
         <p:nvSpPr>
-          <p:cNvPr id="8" name="Text 6"/>
-          <p:cNvSpPr/>
-          <p:nvPr/>
-        </p:nvSpPr>
-        <p:spPr>
-          <a:xfrm>
-            <a:off x="2103120" y="1554480"/>
-            <a:ext cx="1600200" cy="457200"/>
-          </a:xfrm>
-          <a:prstGeom prst="rect">
-            <a:avLst/>
-          </a:prstGeom>
-          <a:noFill/>
-          <a:ln/>
-        </p:spPr>
-        <p:txBody>
-          <a:bodyPr wrap="square" lIns="0" tIns="0" rIns="0" bIns="0" rtlCol="0" anchor="ctr"/>
-          <a:lstStyle/>
-          <a:p>
-            <a:pPr algn="ctr" indent="0" marL="0">
-              <a:buNone/>
-            </a:pPr>
-            <a:r>
-              <a:rPr lang="en-US" sz="2800" b="1" dirty="0">
-                <a:solidFill>
-                  <a:srgbClr val="555555"/>
-                </a:solidFill>
-                <a:latin typeface="Arial" pitchFamily="34" charset="0"/>
-                <a:ea typeface="Arial" pitchFamily="34" charset="-122"/>
-                <a:cs typeface="Arial" pitchFamily="34" charset="-120"/>
-              </a:rPr>
-              <a:t>2</a:t>
-            </a:r>
-            <a:endParaRPr lang="en-US" sz="2800" dirty="0"/>
-          </a:p>
-        </p:txBody>
-      </p:sp>
-      <p:sp>
-        <p:nvSpPr>
-          <p:cNvPr id="9" name="Text 7"/>
-          <p:cNvSpPr/>
-          <p:nvPr/>
-        </p:nvSpPr>
-        <p:spPr>
-          <a:xfrm>
-            <a:off x="2194560" y="2194560"/>
-            <a:ext cx="1417320" cy="822960"/>
-          </a:xfrm>
-          <a:prstGeom prst="rect">
-            <a:avLst/>
-          </a:prstGeom>
-          <a:noFill/>
-          <a:ln/>
-        </p:spPr>
-        <p:txBody>
-          <a:bodyPr wrap="square" lIns="0" tIns="0" rIns="0" bIns="0" rtlCol="0" anchor="ctr"/>
-          <a:lstStyle/>
-          <a:p>
-            <a:pPr algn="ctr" indent="0" marL="0">
-              <a:buNone/>
-            </a:pPr>
-            <a:r>
-              <a:rPr lang="en-US" sz="1200" b="1" dirty="0">
-                <a:solidFill>
-                  <a:srgbClr val="1A1A1A"/>
-                </a:solidFill>
-                <a:latin typeface="Arial" pitchFamily="34" charset="0"/>
-                <a:ea typeface="Arial" pitchFamily="34" charset="-122"/>
-                <a:cs typeface="Arial" pitchFamily="34" charset="-120"/>
-              </a:rPr>
-              <a:t>OKRs as a System</a:t>
-            </a:r>
-            <a:endParaRPr lang="en-US" sz="1200" dirty="0"/>
-          </a:p>
-        </p:txBody>
-      </p:sp>
-      <p:sp>
-        <p:nvSpPr>
-          <p:cNvPr id="10" name="Text 8"/>
-          <p:cNvSpPr/>
-          <p:nvPr/>
-        </p:nvSpPr>
-        <p:spPr>
-          <a:xfrm>
-            <a:off x="2194560" y="3108960"/>
-            <a:ext cx="1417320" cy="274320"/>
-          </a:xfrm>
-          <a:prstGeom prst="rect">
-            <a:avLst/>
-          </a:prstGeom>
-          <a:noFill/>
-          <a:ln/>
-        </p:spPr>
-        <p:txBody>
-          <a:bodyPr wrap="square" lIns="0" tIns="0" rIns="0" bIns="0" rtlCol="0" anchor="ctr"/>
-          <a:lstStyle/>
-          <a:p>
-            <a:pPr algn="ctr" indent="0" marL="0">
-              <a:buNone/>
-            </a:pPr>
-            <a:r>
-              <a:rPr lang="en-US" sz="1100" dirty="0">
-                <a:solidFill>
-                  <a:srgbClr val="555555"/>
-                </a:solidFill>
-                <a:latin typeface="Arial" pitchFamily="34" charset="0"/>
-                <a:ea typeface="Arial" pitchFamily="34" charset="-122"/>
-                <a:cs typeface="Arial" pitchFamily="34" charset="-120"/>
-              </a:rPr>
-              <a:t>Next</a:t>
-            </a:r>
-            <a:endParaRPr lang="en-US" sz="1100" dirty="0"/>
-          </a:p>
-        </p:txBody>
-      </p:sp>
-      <p:sp>
-        <p:nvSpPr>
-          <p:cNvPr id="11" name="Shape 9"/>
-          <p:cNvSpPr/>
-          <p:nvPr/>
-        </p:nvSpPr>
-        <p:spPr>
-          <a:xfrm>
-            <a:off x="3840480" y="1371600"/>
-            <a:ext cx="1600200" cy="2194560"/>
+          <p:cNvPr id="5" name="Shape 3"/>
+          <p:cNvSpPr/>
+          <p:nvPr/>
+        </p:nvSpPr>
+        <p:spPr>
+          <a:xfrm>
+            <a:off x="365760" y="1280160"/>
+            <a:ext cx="1600200" cy="73152"/>
           </a:xfrm>
           <a:prstGeom prst="rect">
             <a:avLst/>
           </a:prstGeom>
           <a:solidFill>
-            <a:srgbClr val="F7F7F7"/>
+            <a:srgbClr val="C9A227"/>
           </a:solidFill>
           <a:ln w="12700">
             <a:solidFill>
-              <a:srgbClr val="CCCCCC"/>
+              <a:srgbClr val="C9A227"/>
             </a:solidFill>
             <a:prstDash val="solid"/>
           </a:ln>
@@ -2320,14 +2124,14 @@
       </p:sp>
       <p:sp>
         <p:nvSpPr>
-          <p:cNvPr id="12" name="Text 10"/>
-          <p:cNvSpPr/>
-          <p:nvPr/>
-        </p:nvSpPr>
-        <p:spPr>
-          <a:xfrm>
-            <a:off x="3840480" y="1554480"/>
-            <a:ext cx="1600200" cy="457200"/>
+          <p:cNvPr id="6" name="Text 4"/>
+          <p:cNvSpPr/>
+          <p:nvPr/>
+        </p:nvSpPr>
+        <p:spPr>
+          <a:xfrm>
+            <a:off x="365760" y="1554480"/>
+            <a:ext cx="1600200" cy="411480"/>
           </a:xfrm>
           <a:prstGeom prst="rect">
             <a:avLst/>
@@ -2343,30 +2147,30 @@
               <a:buNone/>
             </a:pPr>
             <a:r>
-              <a:rPr lang="en-US" sz="2800" b="1" dirty="0">
-                <a:solidFill>
-                  <a:srgbClr val="555555"/>
-                </a:solidFill>
-                <a:latin typeface="Arial" pitchFamily="34" charset="0"/>
-                <a:ea typeface="Arial" pitchFamily="34" charset="-122"/>
-                <a:cs typeface="Arial" pitchFamily="34" charset="-120"/>
-              </a:rPr>
-              <a:t>3</a:t>
-            </a:r>
-            <a:endParaRPr lang="en-US" sz="2800" dirty="0"/>
-          </a:p>
-        </p:txBody>
-      </p:sp>
-      <p:sp>
-        <p:nvSpPr>
-          <p:cNvPr id="13" name="Text 11"/>
-          <p:cNvSpPr/>
-          <p:nvPr/>
-        </p:nvSpPr>
-        <p:spPr>
-          <a:xfrm>
-            <a:off x="3931920" y="2194560"/>
-            <a:ext cx="1417320" cy="822960"/>
+              <a:rPr lang="en-US" sz="2200" b="1" dirty="0">
+                <a:solidFill>
+                  <a:srgbClr val="C9A227"/>
+                </a:solidFill>
+                <a:latin typeface="Arial" pitchFamily="34" charset="0"/>
+                <a:ea typeface="Arial" pitchFamily="34" charset="-122"/>
+                <a:cs typeface="Arial" pitchFamily="34" charset="-120"/>
+              </a:rPr>
+              <a:t>1</a:t>
+            </a:r>
+            <a:endParaRPr lang="en-US" sz="2200" dirty="0"/>
+          </a:p>
+        </p:txBody>
+      </p:sp>
+      <p:sp>
+        <p:nvSpPr>
+          <p:cNvPr id="7" name="Text 5"/>
+          <p:cNvSpPr/>
+          <p:nvPr/>
+        </p:nvSpPr>
+        <p:spPr>
+          <a:xfrm>
+            <a:off x="438912" y="2103120"/>
+            <a:ext cx="1463040" cy="822960"/>
           </a:xfrm>
           <a:prstGeom prst="rect">
             <a:avLst/>
@@ -2382,15 +2186,15 @@
               <a:buNone/>
             </a:pPr>
             <a:r>
-              <a:rPr lang="en-US" sz="1200" b="1" dirty="0">
-                <a:solidFill>
-                  <a:srgbClr val="1A1A1A"/>
-                </a:solidFill>
-                <a:latin typeface="Arial" pitchFamily="34" charset="0"/>
-                <a:ea typeface="Arial" pitchFamily="34" charset="-122"/>
-                <a:cs typeface="Arial" pitchFamily="34" charset="-120"/>
-              </a:rPr>
-              <a:t>Operating Model + AI</a:t>
+              <a:rPr lang="en-US" sz="1200" dirty="0">
+                <a:solidFill>
+                  <a:srgbClr val="FFFFFF"/>
+                </a:solidFill>
+                <a:latin typeface="Arial" pitchFamily="34" charset="0"/>
+                <a:ea typeface="Arial" pitchFamily="34" charset="-122"/>
+                <a:cs typeface="Arial" pitchFamily="34" charset="-120"/>
+              </a:rPr>
+              <a:t>Business Model Canvas</a:t>
             </a:r>
             <a:endParaRPr lang="en-US" sz="1200" dirty="0"/>
           </a:p>
@@ -2398,24 +2202,65 @@
       </p:sp>
       <p:sp>
         <p:nvSpPr>
-          <p:cNvPr id="14" name="Shape 12"/>
-          <p:cNvSpPr/>
-          <p:nvPr/>
-        </p:nvSpPr>
-        <p:spPr>
-          <a:xfrm>
-            <a:off x="5577840" y="1371600"/>
-            <a:ext cx="1600200" cy="2194560"/>
-          </a:xfrm>
-          <a:prstGeom prst="rect">
-            <a:avLst/>
+          <p:cNvPr id="8" name="Text 6"/>
+          <p:cNvSpPr/>
+          <p:nvPr/>
+        </p:nvSpPr>
+        <p:spPr>
+          <a:xfrm>
+            <a:off x="438912" y="3108960"/>
+            <a:ext cx="1463040" cy="274320"/>
+          </a:xfrm>
+          <a:prstGeom prst="rect">
+            <a:avLst/>
+          </a:prstGeom>
+          <a:noFill/>
+          <a:ln/>
+        </p:spPr>
+        <p:txBody>
+          <a:bodyPr wrap="square" lIns="0" tIns="0" rIns="0" bIns="0" rtlCol="0" anchor="ctr"/>
+          <a:lstStyle/>
+          <a:p>
+            <a:pPr algn="ctr" indent="0" marL="0">
+              <a:buNone/>
+            </a:pPr>
+            <a:r>
+              <a:rPr lang="en-US" sz="1100" b="1" dirty="0">
+                <a:solidFill>
+                  <a:srgbClr val="C9A227"/>
+                </a:solidFill>
+                <a:latin typeface="Arial" pitchFamily="34" charset="0"/>
+                <a:ea typeface="Arial" pitchFamily="34" charset="-122"/>
+                <a:cs typeface="Arial" pitchFamily="34" charset="-120"/>
+              </a:rPr>
+              <a:t>This Module</a:t>
+            </a:r>
+            <a:endParaRPr lang="en-US" sz="1100" dirty="0"/>
+          </a:p>
+        </p:txBody>
+      </p:sp>
+      <p:sp>
+        <p:nvSpPr>
+          <p:cNvPr id="9" name="Shape 7"/>
+          <p:cNvSpPr/>
+          <p:nvPr/>
+        </p:nvSpPr>
+        <p:spPr>
+          <a:xfrm>
+            <a:off x="2103120" y="1280160"/>
+            <a:ext cx="1600200" cy="2286000"/>
+          </a:xfrm>
+          <a:prstGeom prst="roundRect">
+            <a:avLst>
+              <a:gd name="adj" fmla="val 4571"/>
+            </a:avLst>
           </a:prstGeom>
           <a:solidFill>
-            <a:srgbClr val="F7F7F7"/>
+            <a:srgbClr val="F7F5F0"/>
           </a:solidFill>
           <a:ln w="12700">
             <a:solidFill>
-              <a:srgbClr val="CCCCCC"/>
+              <a:srgbClr val="F7F5F0"/>
             </a:solidFill>
             <a:prstDash val="solid"/>
           </a:ln>
@@ -2423,14 +2268,14 @@
       </p:sp>
       <p:sp>
         <p:nvSpPr>
-          <p:cNvPr id="15" name="Text 13"/>
-          <p:cNvSpPr/>
-          <p:nvPr/>
-        </p:nvSpPr>
-        <p:spPr>
-          <a:xfrm>
-            <a:off x="5577840" y="1554480"/>
-            <a:ext cx="1600200" cy="457200"/>
+          <p:cNvPr id="10" name="Text 8"/>
+          <p:cNvSpPr/>
+          <p:nvPr/>
+        </p:nvSpPr>
+        <p:spPr>
+          <a:xfrm>
+            <a:off x="2103120" y="1554480"/>
+            <a:ext cx="1600200" cy="411480"/>
           </a:xfrm>
           <a:prstGeom prst="rect">
             <a:avLst/>
@@ -2446,30 +2291,30 @@
               <a:buNone/>
             </a:pPr>
             <a:r>
-              <a:rPr lang="en-US" sz="2800" b="1" dirty="0">
-                <a:solidFill>
-                  <a:srgbClr val="555555"/>
-                </a:solidFill>
-                <a:latin typeface="Arial" pitchFamily="34" charset="0"/>
-                <a:ea typeface="Arial" pitchFamily="34" charset="-122"/>
-                <a:cs typeface="Arial" pitchFamily="34" charset="-120"/>
-              </a:rPr>
-              <a:t>4</a:t>
-            </a:r>
-            <a:endParaRPr lang="en-US" sz="2800" dirty="0"/>
-          </a:p>
-        </p:txBody>
-      </p:sp>
-      <p:sp>
-        <p:nvSpPr>
-          <p:cNvPr id="16" name="Text 14"/>
-          <p:cNvSpPr/>
-          <p:nvPr/>
-        </p:nvSpPr>
-        <p:spPr>
-          <a:xfrm>
-            <a:off x="5669280" y="2194560"/>
-            <a:ext cx="1417320" cy="822960"/>
+              <a:rPr lang="en-US" sz="2200" b="1" dirty="0">
+                <a:solidFill>
+                  <a:srgbClr val="1B2A4A"/>
+                </a:solidFill>
+                <a:latin typeface="Arial" pitchFamily="34" charset="0"/>
+                <a:ea typeface="Arial" pitchFamily="34" charset="-122"/>
+                <a:cs typeface="Arial" pitchFamily="34" charset="-120"/>
+              </a:rPr>
+              <a:t>2</a:t>
+            </a:r>
+            <a:endParaRPr lang="en-US" sz="2200" dirty="0"/>
+          </a:p>
+        </p:txBody>
+      </p:sp>
+      <p:sp>
+        <p:nvSpPr>
+          <p:cNvPr id="11" name="Text 9"/>
+          <p:cNvSpPr/>
+          <p:nvPr/>
+        </p:nvSpPr>
+        <p:spPr>
+          <a:xfrm>
+            <a:off x="2176272" y="2103120"/>
+            <a:ext cx="1463040" cy="822960"/>
           </a:xfrm>
           <a:prstGeom prst="rect">
             <a:avLst/>
@@ -2485,15 +2330,15 @@
               <a:buNone/>
             </a:pPr>
             <a:r>
-              <a:rPr lang="en-US" sz="1200" b="1" dirty="0">
-                <a:solidFill>
-                  <a:srgbClr val="1A1A1A"/>
-                </a:solidFill>
-                <a:latin typeface="Arial" pitchFamily="34" charset="0"/>
-                <a:ea typeface="Arial" pitchFamily="34" charset="-122"/>
-                <a:cs typeface="Arial" pitchFamily="34" charset="-120"/>
-              </a:rPr>
-              <a:t>Value Streams / Lean</a:t>
+              <a:rPr lang="en-US" sz="1200" dirty="0">
+                <a:solidFill>
+                  <a:srgbClr val="2A2A2A"/>
+                </a:solidFill>
+                <a:latin typeface="Arial" pitchFamily="34" charset="0"/>
+                <a:ea typeface="Arial" pitchFamily="34" charset="-122"/>
+                <a:cs typeface="Arial" pitchFamily="34" charset="-120"/>
+              </a:rPr>
+              <a:t>OKRs as a System</a:t>
             </a:r>
             <a:endParaRPr lang="en-US" sz="1200" dirty="0"/>
           </a:p>
@@ -2501,24 +2346,65 @@
       </p:sp>
       <p:sp>
         <p:nvSpPr>
-          <p:cNvPr id="17" name="Shape 15"/>
-          <p:cNvSpPr/>
-          <p:nvPr/>
-        </p:nvSpPr>
-        <p:spPr>
-          <a:xfrm>
-            <a:off x="7315200" y="1371600"/>
-            <a:ext cx="1600200" cy="2194560"/>
-          </a:xfrm>
-          <a:prstGeom prst="rect">
-            <a:avLst/>
+          <p:cNvPr id="12" name="Text 10"/>
+          <p:cNvSpPr/>
+          <p:nvPr/>
+        </p:nvSpPr>
+        <p:spPr>
+          <a:xfrm>
+            <a:off x="2176272" y="3108960"/>
+            <a:ext cx="1463040" cy="274320"/>
+          </a:xfrm>
+          <a:prstGeom prst="rect">
+            <a:avLst/>
+          </a:prstGeom>
+          <a:noFill/>
+          <a:ln/>
+        </p:spPr>
+        <p:txBody>
+          <a:bodyPr wrap="square" lIns="0" tIns="0" rIns="0" bIns="0" rtlCol="0" anchor="ctr"/>
+          <a:lstStyle/>
+          <a:p>
+            <a:pPr algn="ctr" indent="0" marL="0">
+              <a:buNone/>
+            </a:pPr>
+            <a:r>
+              <a:rPr lang="en-US" sz="1100" b="1" dirty="0">
+                <a:solidFill>
+                  <a:srgbClr val="5A5A5A"/>
+                </a:solidFill>
+                <a:latin typeface="Arial" pitchFamily="34" charset="0"/>
+                <a:ea typeface="Arial" pitchFamily="34" charset="-122"/>
+                <a:cs typeface="Arial" pitchFamily="34" charset="-120"/>
+              </a:rPr>
+              <a:t>Next</a:t>
+            </a:r>
+            <a:endParaRPr lang="en-US" sz="1100" dirty="0"/>
+          </a:p>
+        </p:txBody>
+      </p:sp>
+      <p:sp>
+        <p:nvSpPr>
+          <p:cNvPr id="13" name="Shape 11"/>
+          <p:cNvSpPr/>
+          <p:nvPr/>
+        </p:nvSpPr>
+        <p:spPr>
+          <a:xfrm>
+            <a:off x="3840480" y="1280160"/>
+            <a:ext cx="1600200" cy="2286000"/>
+          </a:xfrm>
+          <a:prstGeom prst="roundRect">
+            <a:avLst>
+              <a:gd name="adj" fmla="val 4571"/>
+            </a:avLst>
           </a:prstGeom>
           <a:solidFill>
-            <a:srgbClr val="F7F7F7"/>
+            <a:srgbClr val="F7F5F0"/>
           </a:solidFill>
           <a:ln w="12700">
             <a:solidFill>
-              <a:srgbClr val="CCCCCC"/>
+              <a:srgbClr val="F7F5F0"/>
             </a:solidFill>
             <a:prstDash val="solid"/>
           </a:ln>
@@ -2526,14 +2412,224 @@
       </p:sp>
       <p:sp>
         <p:nvSpPr>
+          <p:cNvPr id="14" name="Text 12"/>
+          <p:cNvSpPr/>
+          <p:nvPr/>
+        </p:nvSpPr>
+        <p:spPr>
+          <a:xfrm>
+            <a:off x="3840480" y="1554480"/>
+            <a:ext cx="1600200" cy="411480"/>
+          </a:xfrm>
+          <a:prstGeom prst="rect">
+            <a:avLst/>
+          </a:prstGeom>
+          <a:noFill/>
+          <a:ln/>
+        </p:spPr>
+        <p:txBody>
+          <a:bodyPr wrap="square" lIns="0" tIns="0" rIns="0" bIns="0" rtlCol="0" anchor="ctr"/>
+          <a:lstStyle/>
+          <a:p>
+            <a:pPr algn="ctr" indent="0" marL="0">
+              <a:buNone/>
+            </a:pPr>
+            <a:r>
+              <a:rPr lang="en-US" sz="2200" b="1" dirty="0">
+                <a:solidFill>
+                  <a:srgbClr val="1B2A4A"/>
+                </a:solidFill>
+                <a:latin typeface="Arial" pitchFamily="34" charset="0"/>
+                <a:ea typeface="Arial" pitchFamily="34" charset="-122"/>
+                <a:cs typeface="Arial" pitchFamily="34" charset="-120"/>
+              </a:rPr>
+              <a:t>3</a:t>
+            </a:r>
+            <a:endParaRPr lang="en-US" sz="2200" dirty="0"/>
+          </a:p>
+        </p:txBody>
+      </p:sp>
+      <p:sp>
+        <p:nvSpPr>
+          <p:cNvPr id="15" name="Text 13"/>
+          <p:cNvSpPr/>
+          <p:nvPr/>
+        </p:nvSpPr>
+        <p:spPr>
+          <a:xfrm>
+            <a:off x="3913632" y="2103120"/>
+            <a:ext cx="1463040" cy="822960"/>
+          </a:xfrm>
+          <a:prstGeom prst="rect">
+            <a:avLst/>
+          </a:prstGeom>
+          <a:noFill/>
+          <a:ln/>
+        </p:spPr>
+        <p:txBody>
+          <a:bodyPr wrap="square" lIns="0" tIns="0" rIns="0" bIns="0" rtlCol="0" anchor="ctr"/>
+          <a:lstStyle/>
+          <a:p>
+            <a:pPr algn="ctr" indent="0" marL="0">
+              <a:buNone/>
+            </a:pPr>
+            <a:r>
+              <a:rPr lang="en-US" sz="1200" dirty="0">
+                <a:solidFill>
+                  <a:srgbClr val="2A2A2A"/>
+                </a:solidFill>
+                <a:latin typeface="Arial" pitchFamily="34" charset="0"/>
+                <a:ea typeface="Arial" pitchFamily="34" charset="-122"/>
+                <a:cs typeface="Arial" pitchFamily="34" charset="-120"/>
+              </a:rPr>
+              <a:t>Operating Model + AI</a:t>
+            </a:r>
+            <a:endParaRPr lang="en-US" sz="1200" dirty="0"/>
+          </a:p>
+        </p:txBody>
+      </p:sp>
+      <p:sp>
+        <p:nvSpPr>
+          <p:cNvPr id="16" name="Shape 14"/>
+          <p:cNvSpPr/>
+          <p:nvPr/>
+        </p:nvSpPr>
+        <p:spPr>
+          <a:xfrm>
+            <a:off x="5577840" y="1280160"/>
+            <a:ext cx="1600200" cy="2286000"/>
+          </a:xfrm>
+          <a:prstGeom prst="roundRect">
+            <a:avLst>
+              <a:gd name="adj" fmla="val 4571"/>
+            </a:avLst>
+          </a:prstGeom>
+          <a:solidFill>
+            <a:srgbClr val="F7F5F0"/>
+          </a:solidFill>
+          <a:ln w="12700">
+            <a:solidFill>
+              <a:srgbClr val="F7F5F0"/>
+            </a:solidFill>
+            <a:prstDash val="solid"/>
+          </a:ln>
+        </p:spPr>
+      </p:sp>
+      <p:sp>
+        <p:nvSpPr>
+          <p:cNvPr id="17" name="Text 15"/>
+          <p:cNvSpPr/>
+          <p:nvPr/>
+        </p:nvSpPr>
+        <p:spPr>
+          <a:xfrm>
+            <a:off x="5577840" y="1554480"/>
+            <a:ext cx="1600200" cy="411480"/>
+          </a:xfrm>
+          <a:prstGeom prst="rect">
+            <a:avLst/>
+          </a:prstGeom>
+          <a:noFill/>
+          <a:ln/>
+        </p:spPr>
+        <p:txBody>
+          <a:bodyPr wrap="square" lIns="0" tIns="0" rIns="0" bIns="0" rtlCol="0" anchor="ctr"/>
+          <a:lstStyle/>
+          <a:p>
+            <a:pPr algn="ctr" indent="0" marL="0">
+              <a:buNone/>
+            </a:pPr>
+            <a:r>
+              <a:rPr lang="en-US" sz="2200" b="1" dirty="0">
+                <a:solidFill>
+                  <a:srgbClr val="1B2A4A"/>
+                </a:solidFill>
+                <a:latin typeface="Arial" pitchFamily="34" charset="0"/>
+                <a:ea typeface="Arial" pitchFamily="34" charset="-122"/>
+                <a:cs typeface="Arial" pitchFamily="34" charset="-120"/>
+              </a:rPr>
+              <a:t>4</a:t>
+            </a:r>
+            <a:endParaRPr lang="en-US" sz="2200" dirty="0"/>
+          </a:p>
+        </p:txBody>
+      </p:sp>
+      <p:sp>
+        <p:nvSpPr>
           <p:cNvPr id="18" name="Text 16"/>
           <p:cNvSpPr/>
           <p:nvPr/>
         </p:nvSpPr>
         <p:spPr>
           <a:xfrm>
+            <a:off x="5650992" y="2103120"/>
+            <a:ext cx="1463040" cy="822960"/>
+          </a:xfrm>
+          <a:prstGeom prst="rect">
+            <a:avLst/>
+          </a:prstGeom>
+          <a:noFill/>
+          <a:ln/>
+        </p:spPr>
+        <p:txBody>
+          <a:bodyPr wrap="square" lIns="0" tIns="0" rIns="0" bIns="0" rtlCol="0" anchor="ctr"/>
+          <a:lstStyle/>
+          <a:p>
+            <a:pPr algn="ctr" indent="0" marL="0">
+              <a:buNone/>
+            </a:pPr>
+            <a:r>
+              <a:rPr lang="en-US" sz="1200" dirty="0">
+                <a:solidFill>
+                  <a:srgbClr val="2A2A2A"/>
+                </a:solidFill>
+                <a:latin typeface="Arial" pitchFamily="34" charset="0"/>
+                <a:ea typeface="Arial" pitchFamily="34" charset="-122"/>
+                <a:cs typeface="Arial" pitchFamily="34" charset="-120"/>
+              </a:rPr>
+              <a:t>Value Streams / Lean</a:t>
+            </a:r>
+            <a:endParaRPr lang="en-US" sz="1200" dirty="0"/>
+          </a:p>
+        </p:txBody>
+      </p:sp>
+      <p:sp>
+        <p:nvSpPr>
+          <p:cNvPr id="19" name="Shape 17"/>
+          <p:cNvSpPr/>
+          <p:nvPr/>
+        </p:nvSpPr>
+        <p:spPr>
+          <a:xfrm>
+            <a:off x="7315200" y="1280160"/>
+            <a:ext cx="1600200" cy="2286000"/>
+          </a:xfrm>
+          <a:prstGeom prst="roundRect">
+            <a:avLst>
+              <a:gd name="adj" fmla="val 4571"/>
+            </a:avLst>
+          </a:prstGeom>
+          <a:solidFill>
+            <a:srgbClr val="F7F5F0"/>
+          </a:solidFill>
+          <a:ln w="12700">
+            <a:solidFill>
+              <a:srgbClr val="F7F5F0"/>
+            </a:solidFill>
+            <a:prstDash val="solid"/>
+          </a:ln>
+        </p:spPr>
+      </p:sp>
+      <p:sp>
+        <p:nvSpPr>
+          <p:cNvPr id="20" name="Text 18"/>
+          <p:cNvSpPr/>
+          <p:nvPr/>
+        </p:nvSpPr>
+        <p:spPr>
+          <a:xfrm>
             <a:off x="7315200" y="1554480"/>
-            <a:ext cx="1600200" cy="457200"/>
+            <a:ext cx="1600200" cy="411480"/>
           </a:xfrm>
           <a:prstGeom prst="rect">
             <a:avLst/>
@@ -2549,9 +2645,9 @@
               <a:buNone/>
             </a:pPr>
             <a:r>
-              <a:rPr lang="en-US" sz="2800" b="1" dirty="0">
-                <a:solidFill>
-                  <a:srgbClr val="555555"/>
+              <a:rPr lang="en-US" sz="2200" b="1" dirty="0">
+                <a:solidFill>
+                  <a:srgbClr val="1B2A4A"/>
                 </a:solidFill>
                 <a:latin typeface="Arial" pitchFamily="34" charset="0"/>
                 <a:ea typeface="Arial" pitchFamily="34" charset="-122"/>
@@ -2559,20 +2655,20 @@
               </a:rPr>
               <a:t>5</a:t>
             </a:r>
-            <a:endParaRPr lang="en-US" sz="2800" dirty="0"/>
-          </a:p>
-        </p:txBody>
-      </p:sp>
-      <p:sp>
-        <p:nvSpPr>
-          <p:cNvPr id="19" name="Text 17"/>
-          <p:cNvSpPr/>
-          <p:nvPr/>
-        </p:nvSpPr>
-        <p:spPr>
-          <a:xfrm>
-            <a:off x="7406640" y="2194560"/>
-            <a:ext cx="1417320" cy="822960"/>
+            <a:endParaRPr lang="en-US" sz="2200" dirty="0"/>
+          </a:p>
+        </p:txBody>
+      </p:sp>
+      <p:sp>
+        <p:nvSpPr>
+          <p:cNvPr id="21" name="Text 19"/>
+          <p:cNvSpPr/>
+          <p:nvPr/>
+        </p:nvSpPr>
+        <p:spPr>
+          <a:xfrm>
+            <a:off x="7388352" y="2103120"/>
+            <a:ext cx="1463040" cy="822960"/>
           </a:xfrm>
           <a:prstGeom prst="rect">
             <a:avLst/>
@@ -2588,9 +2684,9 @@
               <a:buNone/>
             </a:pPr>
             <a:r>
-              <a:rPr lang="en-US" sz="1200" b="1" dirty="0">
-                <a:solidFill>
-                  <a:srgbClr val="1A1A1A"/>
+              <a:rPr lang="en-US" sz="1200" dirty="0">
+                <a:solidFill>
+                  <a:srgbClr val="2A2A2A"/>
                 </a:solidFill>
                 <a:latin typeface="Arial" pitchFamily="34" charset="0"/>
                 <a:ea typeface="Arial" pitchFamily="34" charset="-122"/>
@@ -2604,32 +2700,32 @@
       </p:sp>
       <p:sp>
         <p:nvSpPr>
-          <p:cNvPr id="20" name="Text 18"/>
+          <p:cNvPr id="22" name="Text 20"/>
           <p:cNvSpPr/>
           <p:nvPr/>
         </p:nvSpPr>
         <p:spPr>
           <a:xfrm>
             <a:off x="457200" y="4800600"/>
-            <a:ext cx="5943600" cy="228600"/>
-          </a:xfrm>
-          <a:prstGeom prst="rect">
-            <a:avLst/>
-          </a:prstGeom>
-          <a:noFill/>
-          <a:ln/>
-        </p:spPr>
-        <p:txBody>
-          <a:bodyPr wrap="square" lIns="0" tIns="0" rIns="0" bIns="0" rtlCol="0" anchor="ctr"/>
-          <a:lstStyle/>
-          <a:p>
-            <a:pPr indent="0" marL="0">
-              <a:buNone/>
-            </a:pPr>
-            <a:r>
-              <a:rPr lang="en-US" sz="1000" dirty="0">
-                <a:solidFill>
-                  <a:srgbClr val="555555"/>
+            <a:ext cx="5943600" cy="256032"/>
+          </a:xfrm>
+          <a:prstGeom prst="rect">
+            <a:avLst/>
+          </a:prstGeom>
+          <a:noFill/>
+          <a:ln/>
+        </p:spPr>
+        <p:txBody>
+          <a:bodyPr wrap="square" lIns="0" tIns="0" rIns="0" bIns="0" rtlCol="0" anchor="ctr"/>
+          <a:lstStyle/>
+          <a:p>
+            <a:pPr indent="0" marL="0">
+              <a:buNone/>
+            </a:pPr>
+            <a:r>
+              <a:rPr lang="en-US" sz="1100" dirty="0">
+                <a:solidFill>
+                  <a:srgbClr val="6A6A6A"/>
                 </a:solidFill>
                 <a:latin typeface="Arial" pitchFamily="34" charset="0"/>
                 <a:ea typeface="Arial" pitchFamily="34" charset="-122"/>
@@ -2637,20 +2733,20 @@
               </a:rPr>
               <a:t>Joshua Konkle  |  Chief of Staff Strategist</a:t>
             </a:r>
-            <a:endParaRPr lang="en-US" sz="1000" dirty="0"/>
-          </a:p>
-        </p:txBody>
-      </p:sp>
-      <p:sp>
-        <p:nvSpPr>
-          <p:cNvPr id="21" name="Text 19"/>
-          <p:cNvSpPr/>
-          <p:nvPr/>
-        </p:nvSpPr>
-        <p:spPr>
-          <a:xfrm>
-            <a:off x="7772400" y="4800600"/>
-            <a:ext cx="914400" cy="228600"/>
+            <a:endParaRPr lang="en-US" sz="1100" dirty="0"/>
+          </a:p>
+        </p:txBody>
+      </p:sp>
+      <p:sp>
+        <p:nvSpPr>
+          <p:cNvPr id="23" name="Text 21"/>
+          <p:cNvSpPr/>
+          <p:nvPr/>
+        </p:nvSpPr>
+        <p:spPr>
+          <a:xfrm>
+            <a:off x="7498080" y="4800600"/>
+            <a:ext cx="1188720" cy="256032"/>
           </a:xfrm>
           <a:prstGeom prst="rect">
             <a:avLst/>
@@ -2666,9 +2762,9 @@
               <a:buNone/>
             </a:pPr>
             <a:r>
-              <a:rPr lang="en-US" sz="1000" dirty="0">
-                <a:solidFill>
-                  <a:srgbClr val="555555"/>
+              <a:rPr lang="en-US" sz="1100" dirty="0">
+                <a:solidFill>
+                  <a:srgbClr val="6A6A6A"/>
                 </a:solidFill>
                 <a:latin typeface="Arial" pitchFamily="34" charset="0"/>
                 <a:ea typeface="Arial" pitchFamily="34" charset="-122"/>
@@ -2676,7 +2772,7 @@
               </a:rPr>
               <a:t>10 / 11</a:t>
             </a:r>
-            <a:endParaRPr lang="en-US" sz="1000" dirty="0"/>
+            <a:endParaRPr lang="en-US" sz="1100" dirty="0"/>
           </a:p>
         </p:txBody>
       </p:sp>
@@ -2691,13 +2787,6 @@
 <file path=ppt/slides/slide11.xml><?xml version="1.0" encoding="utf-8"?>
 <p:sld xmlns:a="http://schemas.openxmlformats.org/drawingml/2006/main" xmlns:r="http://schemas.openxmlformats.org/officeDocument/2006/relationships" xmlns:p="http://schemas.openxmlformats.org/presentationml/2006/main">
   <p:cSld name="Slide 11">
-    <p:bg>
-      <p:bgPr>
-        <a:solidFill>
-          <a:srgbClr val="111111"/>
-        </a:solidFill>
-      </p:bgPr>
-    </p:bg>
     <p:spTree>
       <p:nvGrpSpPr>
         <p:cNvPr id="1" name=""/>
@@ -2714,32 +2803,57 @@
       </p:grpSpPr>
       <p:sp>
         <p:nvSpPr>
-          <p:cNvPr id="2" name="Text 0"/>
-          <p:cNvSpPr/>
-          <p:nvPr/>
-        </p:nvSpPr>
-        <p:spPr>
-          <a:xfrm>
-            <a:off x="548640" y="1188720"/>
-            <a:ext cx="8046720" cy="457200"/>
-          </a:xfrm>
-          <a:prstGeom prst="rect">
-            <a:avLst/>
-          </a:prstGeom>
-          <a:noFill/>
-          <a:ln/>
-        </p:spPr>
-        <p:txBody>
-          <a:bodyPr wrap="square" lIns="0" tIns="0" rIns="0" bIns="0" rtlCol="0" anchor="ctr"/>
-          <a:lstStyle/>
-          <a:p>
-            <a:pPr indent="0" marL="0">
-              <a:buNone/>
-            </a:pPr>
-            <a:r>
-              <a:rPr lang="en-US" sz="2800" b="1" dirty="0">
-                <a:solidFill>
-                  <a:srgbClr val="F5F5F5"/>
+          <p:cNvPr id="2" name="Shape 0"/>
+          <p:cNvSpPr/>
+          <p:nvPr/>
+        </p:nvSpPr>
+        <p:spPr>
+          <a:xfrm>
+            <a:off x="0" y="0"/>
+            <a:ext cx="9144000" cy="5143500"/>
+          </a:xfrm>
+          <a:prstGeom prst="rect">
+            <a:avLst/>
+          </a:prstGeom>
+          <a:solidFill>
+            <a:srgbClr val="111111"/>
+          </a:solidFill>
+          <a:ln w="12700">
+            <a:solidFill>
+              <a:srgbClr val="111111"/>
+            </a:solidFill>
+            <a:prstDash val="solid"/>
+          </a:ln>
+        </p:spPr>
+      </p:sp>
+      <p:sp>
+        <p:nvSpPr>
+          <p:cNvPr id="3" name="Text 1"/>
+          <p:cNvSpPr/>
+          <p:nvPr/>
+        </p:nvSpPr>
+        <p:spPr>
+          <a:xfrm>
+            <a:off x="548640" y="1005840"/>
+            <a:ext cx="8046720" cy="365760"/>
+          </a:xfrm>
+          <a:prstGeom prst="rect">
+            <a:avLst/>
+          </a:prstGeom>
+          <a:noFill/>
+          <a:ln/>
+        </p:spPr>
+        <p:txBody>
+          <a:bodyPr wrap="square" lIns="0" tIns="0" rIns="0" bIns="0" rtlCol="0" anchor="ctr"/>
+          <a:lstStyle/>
+          <a:p>
+            <a:pPr indent="0" marL="0">
+              <a:buNone/>
+            </a:pPr>
+            <a:r>
+              <a:rPr lang="en-US" sz="2600" b="1" dirty="0">
+                <a:solidFill>
+                  <a:srgbClr val="FFFFFF"/>
                 </a:solidFill>
                 <a:latin typeface="Arial" pitchFamily="34" charset="0"/>
                 <a:ea typeface="Arial" pitchFamily="34" charset="-122"/>
@@ -2747,19 +2861,44 @@
               </a:rPr>
               <a:t>Next Steps</a:t>
             </a:r>
-            <a:endParaRPr lang="en-US" sz="2800" dirty="0"/>
-          </a:p>
-        </p:txBody>
-      </p:sp>
-      <p:sp>
-        <p:nvSpPr>
-          <p:cNvPr id="3" name="Text 1"/>
-          <p:cNvSpPr/>
-          <p:nvPr/>
-        </p:nvSpPr>
-        <p:spPr>
-          <a:xfrm>
-            <a:off x="548640" y="1828800"/>
+            <a:endParaRPr lang="en-US" sz="2600" dirty="0"/>
+          </a:p>
+        </p:txBody>
+      </p:sp>
+      <p:sp>
+        <p:nvSpPr>
+          <p:cNvPr id="4" name="Shape 2"/>
+          <p:cNvSpPr/>
+          <p:nvPr/>
+        </p:nvSpPr>
+        <p:spPr>
+          <a:xfrm>
+            <a:off x="548640" y="1463040"/>
+            <a:ext cx="1371600" cy="54864"/>
+          </a:xfrm>
+          <a:prstGeom prst="rect">
+            <a:avLst/>
+          </a:prstGeom>
+          <a:solidFill>
+            <a:srgbClr val="C9A227"/>
+          </a:solidFill>
+          <a:ln w="12700">
+            <a:solidFill>
+              <a:srgbClr val="C9A227"/>
+            </a:solidFill>
+            <a:prstDash val="solid"/>
+          </a:ln>
+        </p:spPr>
+      </p:sp>
+      <p:sp>
+        <p:nvSpPr>
+          <p:cNvPr id="5" name="Text 3"/>
+          <p:cNvSpPr/>
+          <p:nvPr/>
+        </p:nvSpPr>
+        <p:spPr>
+          <a:xfrm>
+            <a:off x="548640" y="1737360"/>
             <a:ext cx="8046720" cy="1005840"/>
           </a:xfrm>
           <a:prstGeom prst="rect">
@@ -2776,9 +2915,9 @@
               <a:buNone/>
             </a:pPr>
             <a:r>
-              <a:rPr lang="en-US" sz="1600" dirty="0">
-                <a:solidFill>
-                  <a:srgbClr val="CCCCCC"/>
+              <a:rPr lang="en-US" sz="1500" dirty="0">
+                <a:solidFill>
+                  <a:srgbClr val="C8C8C8"/>
                 </a:solidFill>
                 <a:latin typeface="Arial" pitchFamily="34" charset="0"/>
                 <a:ea typeface="Arial" pitchFamily="34" charset="-122"/>
@@ -2786,89 +2925,111 @@
               </a:rPr>
               <a:t>If you would like support turning these ideas into a concrete 90-day plan,</a:t>
             </a:r>
+            <a:endParaRPr lang="en-US" sz="1500" dirty="0"/>
+          </a:p>
+          <a:p>
+            <a:pPr indent="0" marL="0">
+              <a:buNone/>
+            </a:pPr>
+            <a:r>
+              <a:rPr lang="en-US" sz="1500" dirty="0">
+                <a:solidFill>
+                  <a:srgbClr val="C8C8C8"/>
+                </a:solidFill>
+                <a:latin typeface="Arial" pitchFamily="34" charset="0"/>
+                <a:ea typeface="Arial" pitchFamily="34" charset="-122"/>
+                <a:cs typeface="Arial" pitchFamily="34" charset="-120"/>
+              </a:rPr>
+              <a:t>a deeper workshop, or ongoing Chief of Staff-style implementation help,</a:t>
+            </a:r>
+            <a:endParaRPr lang="en-US" sz="1500" dirty="0"/>
+          </a:p>
+          <a:p>
+            <a:pPr indent="0" marL="0">
+              <a:buNone/>
+            </a:pPr>
+            <a:r>
+              <a:rPr lang="en-US" sz="1500" dirty="0">
+                <a:solidFill>
+                  <a:srgbClr val="C8C8C8"/>
+                </a:solidFill>
+                <a:latin typeface="Arial" pitchFamily="34" charset="0"/>
+                <a:ea typeface="Arial" pitchFamily="34" charset="-122"/>
+                <a:cs typeface="Arial" pitchFamily="34" charset="-120"/>
+              </a:rPr>
+              <a:t>reach out directly.</a:t>
+            </a:r>
+            <a:endParaRPr lang="en-US" sz="1500" dirty="0"/>
+          </a:p>
+        </p:txBody>
+      </p:sp>
+      <p:sp>
+        <p:nvSpPr>
+          <p:cNvPr id="6" name="Text 4"/>
+          <p:cNvSpPr/>
+          <p:nvPr/>
+        </p:nvSpPr>
+        <p:spPr>
+          <a:xfrm>
+            <a:off x="548640" y="3017520"/>
+            <a:ext cx="8046720" cy="320040"/>
+          </a:xfrm>
+          <a:prstGeom prst="rect">
+            <a:avLst/>
+          </a:prstGeom>
+          <a:noFill/>
+          <a:ln/>
+        </p:spPr>
+        <p:txBody>
+          <a:bodyPr wrap="square" lIns="0" tIns="0" rIns="0" bIns="0" rtlCol="0" anchor="ctr"/>
+          <a:lstStyle/>
+          <a:p>
+            <a:pPr indent="0" marL="0">
+              <a:buNone/>
+            </a:pPr>
+            <a:r>
+              <a:rPr lang="en-US" sz="1600" b="1" dirty="0">
+                <a:solidFill>
+                  <a:srgbClr val="FFFFFF"/>
+                </a:solidFill>
+                <a:latin typeface="Arial" pitchFamily="34" charset="0"/>
+                <a:ea typeface="Arial" pitchFamily="34" charset="-122"/>
+                <a:cs typeface="Arial" pitchFamily="34" charset="-120"/>
+              </a:rPr>
+              <a:t>Joshua Konkle</a:t>
+            </a:r>
             <a:endParaRPr lang="en-US" sz="1600" dirty="0"/>
           </a:p>
-          <a:p>
-            <a:pPr indent="0" marL="0">
-              <a:buNone/>
-            </a:pPr>
-            <a:r>
-              <a:rPr lang="en-US" sz="1600" dirty="0">
-                <a:solidFill>
-                  <a:srgbClr val="CCCCCC"/>
-                </a:solidFill>
-                <a:latin typeface="Arial" pitchFamily="34" charset="0"/>
-                <a:ea typeface="Arial" pitchFamily="34" charset="-122"/>
-                <a:cs typeface="Arial" pitchFamily="34" charset="-120"/>
-              </a:rPr>
-              <a:t>a deeper workshop, or ongoing Chief of Staff-style implementation help,</a:t>
-            </a:r>
-            <a:endParaRPr lang="en-US" sz="1600" dirty="0"/>
-          </a:p>
-          <a:p>
-            <a:pPr indent="0" marL="0">
-              <a:buNone/>
-            </a:pPr>
-            <a:r>
-              <a:rPr lang="en-US" sz="1600" dirty="0">
-                <a:solidFill>
-                  <a:srgbClr val="CCCCCC"/>
-                </a:solidFill>
-                <a:latin typeface="Arial" pitchFamily="34" charset="0"/>
-                <a:ea typeface="Arial" pitchFamily="34" charset="-122"/>
-                <a:cs typeface="Arial" pitchFamily="34" charset="-120"/>
-              </a:rPr>
-              <a:t>reach out directly.</a:t>
-            </a:r>
-            <a:endParaRPr lang="en-US" sz="1600" dirty="0"/>
-          </a:p>
-        </p:txBody>
-      </p:sp>
-      <p:sp>
-        <p:nvSpPr>
-          <p:cNvPr id="4" name="Text 2"/>
-          <p:cNvSpPr/>
-          <p:nvPr/>
-        </p:nvSpPr>
-        <p:spPr>
-          <a:xfrm>
-            <a:off x="548640" y="3200400"/>
-            <a:ext cx="8046720" cy="731520"/>
-          </a:xfrm>
-          <a:prstGeom prst="rect">
-            <a:avLst/>
-          </a:prstGeom>
-          <a:noFill/>
-          <a:ln/>
-        </p:spPr>
-        <p:txBody>
-          <a:bodyPr wrap="square" lIns="0" tIns="0" rIns="0" bIns="0" rtlCol="0" anchor="ctr"/>
-          <a:lstStyle/>
-          <a:p>
-            <a:pPr indent="0" marL="0">
-              <a:buNone/>
-            </a:pPr>
-            <a:r>
-              <a:rPr lang="en-US" sz="1500" dirty="0">
-                <a:solidFill>
-                  <a:srgbClr val="F5F5F5"/>
-                </a:solidFill>
-                <a:latin typeface="Arial" pitchFamily="34" charset="0"/>
-                <a:ea typeface="Arial" pitchFamily="34" charset="-122"/>
-                <a:cs typeface="Arial" pitchFamily="34" charset="-120"/>
-              </a:rPr>
-              <a:t>Joshua Konkle</a:t>
-            </a:r>
-            <a:endParaRPr lang="en-US" sz="1500" dirty="0"/>
-          </a:p>
-          <a:p>
-            <a:pPr indent="0" marL="0">
-              <a:buNone/>
-            </a:pPr>
-            <a:r>
-              <a:rPr lang="en-US" sz="1500" dirty="0">
-                <a:solidFill>
-                  <a:srgbClr val="F5F5F5"/>
+        </p:txBody>
+      </p:sp>
+      <p:sp>
+        <p:nvSpPr>
+          <p:cNvPr id="7" name="Text 5"/>
+          <p:cNvSpPr/>
+          <p:nvPr/>
+        </p:nvSpPr>
+        <p:spPr>
+          <a:xfrm>
+            <a:off x="548640" y="3383280"/>
+            <a:ext cx="8046720" cy="274320"/>
+          </a:xfrm>
+          <a:prstGeom prst="rect">
+            <a:avLst/>
+          </a:prstGeom>
+          <a:noFill/>
+          <a:ln/>
+        </p:spPr>
+        <p:txBody>
+          <a:bodyPr wrap="square" lIns="0" tIns="0" rIns="0" bIns="0" rtlCol="0" anchor="ctr"/>
+          <a:lstStyle/>
+          <a:p>
+            <a:pPr indent="0" marL="0">
+              <a:buNone/>
+            </a:pPr>
+            <a:r>
+              <a:rPr lang="en-US" sz="1300" dirty="0">
+                <a:solidFill>
+                  <a:srgbClr val="C9A227"/>
                 </a:solidFill>
                 <a:latin typeface="Arial" pitchFamily="34" charset="0"/>
                 <a:ea typeface="Arial" pitchFamily="34" charset="-122"/>
@@ -2876,7 +3037,46 @@
               </a:rPr>
               <a:t>@7SwanSwimming  ·  512-423-5448  ·  joshua@digitalknowledge.net</a:t>
             </a:r>
-            <a:endParaRPr lang="en-US" sz="1500" dirty="0"/>
+            <a:endParaRPr lang="en-US" sz="1300" dirty="0"/>
+          </a:p>
+        </p:txBody>
+      </p:sp>
+      <p:sp>
+        <p:nvSpPr>
+          <p:cNvPr id="8" name="Text 6"/>
+          <p:cNvSpPr/>
+          <p:nvPr/>
+        </p:nvSpPr>
+        <p:spPr>
+          <a:xfrm>
+            <a:off x="548640" y="4663440"/>
+            <a:ext cx="8046720" cy="228600"/>
+          </a:xfrm>
+          <a:prstGeom prst="rect">
+            <a:avLst/>
+          </a:prstGeom>
+          <a:noFill/>
+          <a:ln/>
+        </p:spPr>
+        <p:txBody>
+          <a:bodyPr wrap="square" lIns="0" tIns="0" rIns="0" bIns="0" rtlCol="0" anchor="ctr"/>
+          <a:lstStyle/>
+          <a:p>
+            <a:pPr indent="0" marL="0">
+              <a:buNone/>
+            </a:pPr>
+            <a:r>
+              <a:rPr lang="en-US" sz="1100" dirty="0">
+                <a:solidFill>
+                  <a:srgbClr val="707070"/>
+                </a:solidFill>
+                <a:latin typeface="Arial" pitchFamily="34" charset="0"/>
+                <a:ea typeface="Arial" pitchFamily="34" charset="-122"/>
+                <a:cs typeface="Arial" pitchFamily="34" charset="-120"/>
+              </a:rPr>
+              <a:t>Copyright © 2026 Digital Knowledge / Patriots Locked In and In Control.</a:t>
+            </a:r>
+            <a:endParaRPr lang="en-US" sz="1100" dirty="0"/>
           </a:p>
         </p:txBody>
       </p:sp>
@@ -2891,13 +3091,6 @@
 <file path=ppt/slides/slide2.xml><?xml version="1.0" encoding="utf-8"?>
 <p:sld xmlns:a="http://schemas.openxmlformats.org/drawingml/2006/main" xmlns:r="http://schemas.openxmlformats.org/officeDocument/2006/relationships" xmlns:p="http://schemas.openxmlformats.org/presentationml/2006/main">
   <p:cSld name="Slide 2">
-    <p:bg>
-      <p:bgPr>
-        <a:solidFill>
-          <a:srgbClr val="FFFFFF"/>
-        </a:solidFill>
-      </p:bgPr>
-    </p:bg>
     <p:spTree>
       <p:nvGrpSpPr>
         <p:cNvPr id="1" name=""/>
@@ -2914,32 +3107,57 @@
       </p:grpSpPr>
       <p:sp>
         <p:nvSpPr>
-          <p:cNvPr id="2" name="Text 0"/>
+          <p:cNvPr id="2" name="Shape 0"/>
+          <p:cNvSpPr/>
+          <p:nvPr/>
+        </p:nvSpPr>
+        <p:spPr>
+          <a:xfrm>
+            <a:off x="0" y="0"/>
+            <a:ext cx="9144000" cy="5143500"/>
+          </a:xfrm>
+          <a:prstGeom prst="rect">
+            <a:avLst/>
+          </a:prstGeom>
+          <a:solidFill>
+            <a:srgbClr val="FFFFFF"/>
+          </a:solidFill>
+          <a:ln w="12700">
+            <a:solidFill>
+              <a:srgbClr val="FFFFFF"/>
+            </a:solidFill>
+            <a:prstDash val="solid"/>
+          </a:ln>
+        </p:spPr>
+      </p:sp>
+      <p:sp>
+        <p:nvSpPr>
+          <p:cNvPr id="3" name="Text 1"/>
           <p:cNvSpPr/>
           <p:nvPr/>
         </p:nvSpPr>
         <p:spPr>
           <a:xfrm>
             <a:off x="457200" y="320040"/>
-            <a:ext cx="8229600" cy="457200"/>
-          </a:xfrm>
-          <a:prstGeom prst="rect">
-            <a:avLst/>
-          </a:prstGeom>
-          <a:noFill/>
-          <a:ln/>
-        </p:spPr>
-        <p:txBody>
-          <a:bodyPr wrap="square" lIns="0" tIns="0" rIns="0" bIns="0" rtlCol="0" anchor="ctr"/>
-          <a:lstStyle/>
-          <a:p>
-            <a:pPr indent="0" marL="0">
-              <a:buNone/>
-            </a:pPr>
-            <a:r>
-              <a:rPr lang="en-US" sz="2800" b="1" dirty="0">
-                <a:solidFill>
-                  <a:srgbClr val="1A1A1A"/>
+            <a:ext cx="8229600" cy="411480"/>
+          </a:xfrm>
+          <a:prstGeom prst="rect">
+            <a:avLst/>
+          </a:prstGeom>
+          <a:noFill/>
+          <a:ln/>
+        </p:spPr>
+        <p:txBody>
+          <a:bodyPr wrap="square" lIns="0" tIns="0" rIns="0" bIns="0" rtlCol="0" anchor="ctr"/>
+          <a:lstStyle/>
+          <a:p>
+            <a:pPr indent="0" marL="0">
+              <a:buNone/>
+            </a:pPr>
+            <a:r>
+              <a:rPr lang="en-US" sz="2400" b="1" dirty="0">
+                <a:solidFill>
+                  <a:srgbClr val="1B2A4A"/>
                 </a:solidFill>
                 <a:latin typeface="Arial" pitchFamily="34" charset="0"/>
                 <a:ea typeface="Arial" pitchFamily="34" charset="-122"/>
@@ -2947,58 +3165,90 @@
               </a:rPr>
               <a:t>What You Will Leave With</a:t>
             </a:r>
-            <a:endParaRPr lang="en-US" sz="2800" dirty="0"/>
-          </a:p>
-        </p:txBody>
-      </p:sp>
-      <p:sp>
-        <p:nvSpPr>
-          <p:cNvPr id="3" name="Shape 1"/>
-          <p:cNvSpPr/>
-          <p:nvPr/>
-        </p:nvSpPr>
-        <p:spPr>
-          <a:xfrm>
-            <a:off x="457200" y="1051560"/>
-            <a:ext cx="73152" cy="548640"/>
-          </a:xfrm>
-          <a:prstGeom prst="rect">
-            <a:avLst/>
+            <a:endParaRPr lang="en-US" sz="2400" dirty="0"/>
+          </a:p>
+        </p:txBody>
+      </p:sp>
+      <p:sp>
+        <p:nvSpPr>
+          <p:cNvPr id="4" name="Shape 2"/>
+          <p:cNvSpPr/>
+          <p:nvPr/>
+        </p:nvSpPr>
+        <p:spPr>
+          <a:xfrm>
+            <a:off x="457200" y="960120"/>
+            <a:ext cx="8229600" cy="685800"/>
+          </a:xfrm>
+          <a:prstGeom prst="roundRect">
+            <a:avLst>
+              <a:gd name="adj" fmla="val 8000"/>
+            </a:avLst>
           </a:prstGeom>
           <a:solidFill>
-            <a:srgbClr val="1A1A1A"/>
+            <a:srgbClr val="F7F5F0"/>
           </a:solidFill>
-          <a:ln/>
-        </p:spPr>
-      </p:sp>
-      <p:sp>
-        <p:nvSpPr>
-          <p:cNvPr id="4" name="Text 2"/>
-          <p:cNvSpPr/>
-          <p:nvPr/>
-        </p:nvSpPr>
-        <p:spPr>
-          <a:xfrm>
-            <a:off x="777240" y="1051560"/>
-            <a:ext cx="7772400" cy="548640"/>
-          </a:xfrm>
-          <a:prstGeom prst="rect">
-            <a:avLst/>
-          </a:prstGeom>
-          <a:noFill/>
-          <a:ln/>
-        </p:spPr>
-        <p:txBody>
-          <a:bodyPr wrap="square" lIns="0" tIns="0" rIns="0" bIns="0" rtlCol="0" anchor="ctr"/>
-          <a:lstStyle/>
-          <a:p>
-            <a:pPr indent="0" marL="0">
-              <a:buNone/>
-            </a:pPr>
-            <a:r>
-              <a:rPr lang="en-US" sz="1600" dirty="0">
-                <a:solidFill>
-                  <a:srgbClr val="1A1A1A"/>
+          <a:ln w="12700">
+            <a:solidFill>
+              <a:srgbClr val="F7F5F0"/>
+            </a:solidFill>
+            <a:prstDash val="solid"/>
+          </a:ln>
+        </p:spPr>
+      </p:sp>
+      <p:sp>
+        <p:nvSpPr>
+          <p:cNvPr id="5" name="Shape 3"/>
+          <p:cNvSpPr/>
+          <p:nvPr/>
+        </p:nvSpPr>
+        <p:spPr>
+          <a:xfrm>
+            <a:off x="457200" y="960120"/>
+            <a:ext cx="73152" cy="685800"/>
+          </a:xfrm>
+          <a:prstGeom prst="rect">
+            <a:avLst/>
+          </a:prstGeom>
+          <a:solidFill>
+            <a:srgbClr val="C9A227"/>
+          </a:solidFill>
+          <a:ln w="12700">
+            <a:solidFill>
+              <a:srgbClr val="C9A227"/>
+            </a:solidFill>
+            <a:prstDash val="solid"/>
+          </a:ln>
+        </p:spPr>
+      </p:sp>
+      <p:sp>
+        <p:nvSpPr>
+          <p:cNvPr id="6" name="Text 4"/>
+          <p:cNvSpPr/>
+          <p:nvPr/>
+        </p:nvSpPr>
+        <p:spPr>
+          <a:xfrm>
+            <a:off x="731520" y="1124712"/>
+            <a:ext cx="7772400" cy="365760"/>
+          </a:xfrm>
+          <a:prstGeom prst="rect">
+            <a:avLst/>
+          </a:prstGeom>
+          <a:noFill/>
+          <a:ln/>
+        </p:spPr>
+        <p:txBody>
+          <a:bodyPr wrap="square" lIns="0" tIns="0" rIns="0" bIns="0" rtlCol="0" anchor="ctr"/>
+          <a:lstStyle/>
+          <a:p>
+            <a:pPr indent="0" marL="0">
+              <a:buNone/>
+            </a:pPr>
+            <a:r>
+              <a:rPr lang="en-US" sz="1500" dirty="0">
+                <a:solidFill>
+                  <a:srgbClr val="2A2A2A"/>
                 </a:solidFill>
                 <a:latin typeface="Arial" pitchFamily="34" charset="0"/>
                 <a:ea typeface="Arial" pitchFamily="34" charset="-122"/>
@@ -3006,58 +3256,90 @@
               </a:rPr>
               <a:t>A clear frame for evaluating workforce and production-location decisions</a:t>
             </a:r>
-            <a:endParaRPr lang="en-US" sz="1600" dirty="0"/>
-          </a:p>
-        </p:txBody>
-      </p:sp>
-      <p:sp>
-        <p:nvSpPr>
-          <p:cNvPr id="5" name="Shape 3"/>
-          <p:cNvSpPr/>
-          <p:nvPr/>
-        </p:nvSpPr>
-        <p:spPr>
-          <a:xfrm>
-            <a:off x="457200" y="1828800"/>
-            <a:ext cx="73152" cy="548640"/>
-          </a:xfrm>
-          <a:prstGeom prst="rect">
-            <a:avLst/>
+            <a:endParaRPr lang="en-US" sz="1500" dirty="0"/>
+          </a:p>
+        </p:txBody>
+      </p:sp>
+      <p:sp>
+        <p:nvSpPr>
+          <p:cNvPr id="7" name="Shape 5"/>
+          <p:cNvSpPr/>
+          <p:nvPr/>
+        </p:nvSpPr>
+        <p:spPr>
+          <a:xfrm>
+            <a:off x="457200" y="1783080"/>
+            <a:ext cx="8229600" cy="685800"/>
+          </a:xfrm>
+          <a:prstGeom prst="roundRect">
+            <a:avLst>
+              <a:gd name="adj" fmla="val 8000"/>
+            </a:avLst>
           </a:prstGeom>
           <a:solidFill>
-            <a:srgbClr val="1A1A1A"/>
+            <a:srgbClr val="F7F5F0"/>
           </a:solidFill>
-          <a:ln/>
-        </p:spPr>
-      </p:sp>
-      <p:sp>
-        <p:nvSpPr>
-          <p:cNvPr id="6" name="Text 4"/>
-          <p:cNvSpPr/>
-          <p:nvPr/>
-        </p:nvSpPr>
-        <p:spPr>
-          <a:xfrm>
-            <a:off x="777240" y="1828800"/>
-            <a:ext cx="7772400" cy="548640"/>
-          </a:xfrm>
-          <a:prstGeom prst="rect">
-            <a:avLst/>
-          </a:prstGeom>
-          <a:noFill/>
-          <a:ln/>
-        </p:spPr>
-        <p:txBody>
-          <a:bodyPr wrap="square" lIns="0" tIns="0" rIns="0" bIns="0" rtlCol="0" anchor="ctr"/>
-          <a:lstStyle/>
-          <a:p>
-            <a:pPr indent="0" marL="0">
-              <a:buNone/>
-            </a:pPr>
-            <a:r>
-              <a:rPr lang="en-US" sz="1600" dirty="0">
-                <a:solidFill>
-                  <a:srgbClr val="1A1A1A"/>
+          <a:ln w="12700">
+            <a:solidFill>
+              <a:srgbClr val="F7F5F0"/>
+            </a:solidFill>
+            <a:prstDash val="solid"/>
+          </a:ln>
+        </p:spPr>
+      </p:sp>
+      <p:sp>
+        <p:nvSpPr>
+          <p:cNvPr id="8" name="Shape 6"/>
+          <p:cNvSpPr/>
+          <p:nvPr/>
+        </p:nvSpPr>
+        <p:spPr>
+          <a:xfrm>
+            <a:off x="457200" y="1783080"/>
+            <a:ext cx="73152" cy="685800"/>
+          </a:xfrm>
+          <a:prstGeom prst="rect">
+            <a:avLst/>
+          </a:prstGeom>
+          <a:solidFill>
+            <a:srgbClr val="C9A227"/>
+          </a:solidFill>
+          <a:ln w="12700">
+            <a:solidFill>
+              <a:srgbClr val="C9A227"/>
+            </a:solidFill>
+            <a:prstDash val="solid"/>
+          </a:ln>
+        </p:spPr>
+      </p:sp>
+      <p:sp>
+        <p:nvSpPr>
+          <p:cNvPr id="9" name="Text 7"/>
+          <p:cNvSpPr/>
+          <p:nvPr/>
+        </p:nvSpPr>
+        <p:spPr>
+          <a:xfrm>
+            <a:off x="731520" y="1947672"/>
+            <a:ext cx="7772400" cy="365760"/>
+          </a:xfrm>
+          <a:prstGeom prst="rect">
+            <a:avLst/>
+          </a:prstGeom>
+          <a:noFill/>
+          <a:ln/>
+        </p:spPr>
+        <p:txBody>
+          <a:bodyPr wrap="square" lIns="0" tIns="0" rIns="0" bIns="0" rtlCol="0" anchor="ctr"/>
+          <a:lstStyle/>
+          <a:p>
+            <a:pPr indent="0" marL="0">
+              <a:buNone/>
+            </a:pPr>
+            <a:r>
+              <a:rPr lang="en-US" sz="1500" dirty="0">
+                <a:solidFill>
+                  <a:srgbClr val="2A2A2A"/>
                 </a:solidFill>
                 <a:latin typeface="Arial" pitchFamily="34" charset="0"/>
                 <a:ea typeface="Arial" pitchFamily="34" charset="-122"/>
@@ -3065,58 +3347,90 @@
               </a:rPr>
               <a:t>Practical diagnostic questions you can use immediately</a:t>
             </a:r>
-            <a:endParaRPr lang="en-US" sz="1600" dirty="0"/>
-          </a:p>
-        </p:txBody>
-      </p:sp>
-      <p:sp>
-        <p:nvSpPr>
-          <p:cNvPr id="7" name="Shape 5"/>
+            <a:endParaRPr lang="en-US" sz="1500" dirty="0"/>
+          </a:p>
+        </p:txBody>
+      </p:sp>
+      <p:sp>
+        <p:nvSpPr>
+          <p:cNvPr id="10" name="Shape 8"/>
           <p:cNvSpPr/>
           <p:nvPr/>
         </p:nvSpPr>
         <p:spPr>
           <a:xfrm>
             <a:off x="457200" y="2606040"/>
-            <a:ext cx="73152" cy="548640"/>
-          </a:xfrm>
-          <a:prstGeom prst="rect">
-            <a:avLst/>
+            <a:ext cx="8229600" cy="685800"/>
+          </a:xfrm>
+          <a:prstGeom prst="roundRect">
+            <a:avLst>
+              <a:gd name="adj" fmla="val 8000"/>
+            </a:avLst>
           </a:prstGeom>
           <a:solidFill>
-            <a:srgbClr val="1A1A1A"/>
+            <a:srgbClr val="F7F5F0"/>
           </a:solidFill>
-          <a:ln/>
-        </p:spPr>
-      </p:sp>
-      <p:sp>
-        <p:nvSpPr>
-          <p:cNvPr id="8" name="Text 6"/>
-          <p:cNvSpPr/>
-          <p:nvPr/>
-        </p:nvSpPr>
-        <p:spPr>
-          <a:xfrm>
-            <a:off x="777240" y="2606040"/>
-            <a:ext cx="7772400" cy="548640"/>
-          </a:xfrm>
-          <a:prstGeom prst="rect">
-            <a:avLst/>
-          </a:prstGeom>
-          <a:noFill/>
-          <a:ln/>
-        </p:spPr>
-        <p:txBody>
-          <a:bodyPr wrap="square" lIns="0" tIns="0" rIns="0" bIns="0" rtlCol="0" anchor="ctr"/>
-          <a:lstStyle/>
-          <a:p>
-            <a:pPr indent="0" marL="0">
-              <a:buNone/>
-            </a:pPr>
-            <a:r>
-              <a:rPr lang="en-US" sz="1600" dirty="0">
-                <a:solidFill>
-                  <a:srgbClr val="1A1A1A"/>
+          <a:ln w="12700">
+            <a:solidFill>
+              <a:srgbClr val="F7F5F0"/>
+            </a:solidFill>
+            <a:prstDash val="solid"/>
+          </a:ln>
+        </p:spPr>
+      </p:sp>
+      <p:sp>
+        <p:nvSpPr>
+          <p:cNvPr id="11" name="Shape 9"/>
+          <p:cNvSpPr/>
+          <p:nvPr/>
+        </p:nvSpPr>
+        <p:spPr>
+          <a:xfrm>
+            <a:off x="457200" y="2606040"/>
+            <a:ext cx="73152" cy="685800"/>
+          </a:xfrm>
+          <a:prstGeom prst="rect">
+            <a:avLst/>
+          </a:prstGeom>
+          <a:solidFill>
+            <a:srgbClr val="C9A227"/>
+          </a:solidFill>
+          <a:ln w="12700">
+            <a:solidFill>
+              <a:srgbClr val="C9A227"/>
+            </a:solidFill>
+            <a:prstDash val="solid"/>
+          </a:ln>
+        </p:spPr>
+      </p:sp>
+      <p:sp>
+        <p:nvSpPr>
+          <p:cNvPr id="12" name="Text 10"/>
+          <p:cNvSpPr/>
+          <p:nvPr/>
+        </p:nvSpPr>
+        <p:spPr>
+          <a:xfrm>
+            <a:off x="731520" y="2770632"/>
+            <a:ext cx="7772400" cy="365760"/>
+          </a:xfrm>
+          <a:prstGeom prst="rect">
+            <a:avLst/>
+          </a:prstGeom>
+          <a:noFill/>
+          <a:ln/>
+        </p:spPr>
+        <p:txBody>
+          <a:bodyPr wrap="square" lIns="0" tIns="0" rIns="0" bIns="0" rtlCol="0" anchor="ctr"/>
+          <a:lstStyle/>
+          <a:p>
+            <a:pPr indent="0" marL="0">
+              <a:buNone/>
+            </a:pPr>
+            <a:r>
+              <a:rPr lang="en-US" sz="1500" dirty="0">
+                <a:solidFill>
+                  <a:srgbClr val="2A2A2A"/>
                 </a:solidFill>
                 <a:latin typeface="Arial" pitchFamily="34" charset="0"/>
                 <a:ea typeface="Arial" pitchFamily="34" charset="-122"/>
@@ -3124,58 +3438,90 @@
               </a:rPr>
               <a:t>A method for updating your Business Model Canvas with productive sovereignty principles</a:t>
             </a:r>
-            <a:endParaRPr lang="en-US" sz="1600" dirty="0"/>
-          </a:p>
-        </p:txBody>
-      </p:sp>
-      <p:sp>
-        <p:nvSpPr>
-          <p:cNvPr id="9" name="Shape 7"/>
-          <p:cNvSpPr/>
-          <p:nvPr/>
-        </p:nvSpPr>
-        <p:spPr>
-          <a:xfrm>
-            <a:off x="457200" y="3383280"/>
-            <a:ext cx="73152" cy="548640"/>
-          </a:xfrm>
-          <a:prstGeom prst="rect">
-            <a:avLst/>
+            <a:endParaRPr lang="en-US" sz="1500" dirty="0"/>
+          </a:p>
+        </p:txBody>
+      </p:sp>
+      <p:sp>
+        <p:nvSpPr>
+          <p:cNvPr id="13" name="Shape 11"/>
+          <p:cNvSpPr/>
+          <p:nvPr/>
+        </p:nvSpPr>
+        <p:spPr>
+          <a:xfrm>
+            <a:off x="457200" y="3429000"/>
+            <a:ext cx="8229600" cy="685800"/>
+          </a:xfrm>
+          <a:prstGeom prst="roundRect">
+            <a:avLst>
+              <a:gd name="adj" fmla="val 8000"/>
+            </a:avLst>
           </a:prstGeom>
           <a:solidFill>
-            <a:srgbClr val="1A1A1A"/>
+            <a:srgbClr val="F7F5F0"/>
           </a:solidFill>
-          <a:ln/>
-        </p:spPr>
-      </p:sp>
-      <p:sp>
-        <p:nvSpPr>
-          <p:cNvPr id="10" name="Text 8"/>
-          <p:cNvSpPr/>
-          <p:nvPr/>
-        </p:nvSpPr>
-        <p:spPr>
-          <a:xfrm>
-            <a:off x="777240" y="3383280"/>
-            <a:ext cx="7772400" cy="548640"/>
-          </a:xfrm>
-          <a:prstGeom prst="rect">
-            <a:avLst/>
-          </a:prstGeom>
-          <a:noFill/>
-          <a:ln/>
-        </p:spPr>
-        <p:txBody>
-          <a:bodyPr wrap="square" lIns="0" tIns="0" rIns="0" bIns="0" rtlCol="0" anchor="ctr"/>
-          <a:lstStyle/>
-          <a:p>
-            <a:pPr indent="0" marL="0">
-              <a:buNone/>
-            </a:pPr>
-            <a:r>
-              <a:rPr lang="en-US" sz="1600" dirty="0">
-                <a:solidFill>
-                  <a:srgbClr val="1A1A1A"/>
+          <a:ln w="12700">
+            <a:solidFill>
+              <a:srgbClr val="F7F5F0"/>
+            </a:solidFill>
+            <a:prstDash val="solid"/>
+          </a:ln>
+        </p:spPr>
+      </p:sp>
+      <p:sp>
+        <p:nvSpPr>
+          <p:cNvPr id="14" name="Shape 12"/>
+          <p:cNvSpPr/>
+          <p:nvPr/>
+        </p:nvSpPr>
+        <p:spPr>
+          <a:xfrm>
+            <a:off x="457200" y="3429000"/>
+            <a:ext cx="73152" cy="685800"/>
+          </a:xfrm>
+          <a:prstGeom prst="rect">
+            <a:avLst/>
+          </a:prstGeom>
+          <a:solidFill>
+            <a:srgbClr val="C9A227"/>
+          </a:solidFill>
+          <a:ln w="12700">
+            <a:solidFill>
+              <a:srgbClr val="C9A227"/>
+            </a:solidFill>
+            <a:prstDash val="solid"/>
+          </a:ln>
+        </p:spPr>
+      </p:sp>
+      <p:sp>
+        <p:nvSpPr>
+          <p:cNvPr id="15" name="Text 13"/>
+          <p:cNvSpPr/>
+          <p:nvPr/>
+        </p:nvSpPr>
+        <p:spPr>
+          <a:xfrm>
+            <a:off x="731520" y="3593592"/>
+            <a:ext cx="7772400" cy="365760"/>
+          </a:xfrm>
+          <a:prstGeom prst="rect">
+            <a:avLst/>
+          </a:prstGeom>
+          <a:noFill/>
+          <a:ln/>
+        </p:spPr>
+        <p:txBody>
+          <a:bodyPr wrap="square" lIns="0" tIns="0" rIns="0" bIns="0" rtlCol="0" anchor="ctr"/>
+          <a:lstStyle/>
+          <a:p>
+            <a:pPr indent="0" marL="0">
+              <a:buNone/>
+            </a:pPr>
+            <a:r>
+              <a:rPr lang="en-US" sz="1500" dirty="0">
+                <a:solidFill>
+                  <a:srgbClr val="2A2A2A"/>
                 </a:solidFill>
                 <a:latin typeface="Arial" pitchFamily="34" charset="0"/>
                 <a:ea typeface="Arial" pitchFamily="34" charset="-122"/>
@@ -3183,38 +3529,38 @@
               </a:rPr>
               <a:t>A short list of high-leverage next steps</a:t>
             </a:r>
-            <a:endParaRPr lang="en-US" sz="1600" dirty="0"/>
-          </a:p>
-        </p:txBody>
-      </p:sp>
-      <p:sp>
-        <p:nvSpPr>
-          <p:cNvPr id="11" name="Text 9"/>
+            <a:endParaRPr lang="en-US" sz="1500" dirty="0"/>
+          </a:p>
+        </p:txBody>
+      </p:sp>
+      <p:sp>
+        <p:nvSpPr>
+          <p:cNvPr id="16" name="Text 14"/>
           <p:cNvSpPr/>
           <p:nvPr/>
         </p:nvSpPr>
         <p:spPr>
           <a:xfrm>
             <a:off x="457200" y="4800600"/>
-            <a:ext cx="5943600" cy="228600"/>
-          </a:xfrm>
-          <a:prstGeom prst="rect">
-            <a:avLst/>
-          </a:prstGeom>
-          <a:noFill/>
-          <a:ln/>
-        </p:spPr>
-        <p:txBody>
-          <a:bodyPr wrap="square" lIns="0" tIns="0" rIns="0" bIns="0" rtlCol="0" anchor="ctr"/>
-          <a:lstStyle/>
-          <a:p>
-            <a:pPr indent="0" marL="0">
-              <a:buNone/>
-            </a:pPr>
-            <a:r>
-              <a:rPr lang="en-US" sz="1000" dirty="0">
-                <a:solidFill>
-                  <a:srgbClr val="555555"/>
+            <a:ext cx="5943600" cy="256032"/>
+          </a:xfrm>
+          <a:prstGeom prst="rect">
+            <a:avLst/>
+          </a:prstGeom>
+          <a:noFill/>
+          <a:ln/>
+        </p:spPr>
+        <p:txBody>
+          <a:bodyPr wrap="square" lIns="0" tIns="0" rIns="0" bIns="0" rtlCol="0" anchor="ctr"/>
+          <a:lstStyle/>
+          <a:p>
+            <a:pPr indent="0" marL="0">
+              <a:buNone/>
+            </a:pPr>
+            <a:r>
+              <a:rPr lang="en-US" sz="1100" dirty="0">
+                <a:solidFill>
+                  <a:srgbClr val="6A6A6A"/>
                 </a:solidFill>
                 <a:latin typeface="Arial" pitchFamily="34" charset="0"/>
                 <a:ea typeface="Arial" pitchFamily="34" charset="-122"/>
@@ -3222,20 +3568,20 @@
               </a:rPr>
               <a:t>Joshua Konkle  |  Chief of Staff Strategist</a:t>
             </a:r>
-            <a:endParaRPr lang="en-US" sz="1000" dirty="0"/>
-          </a:p>
-        </p:txBody>
-      </p:sp>
-      <p:sp>
-        <p:nvSpPr>
-          <p:cNvPr id="12" name="Text 10"/>
-          <p:cNvSpPr/>
-          <p:nvPr/>
-        </p:nvSpPr>
-        <p:spPr>
-          <a:xfrm>
-            <a:off x="7772400" y="4800600"/>
-            <a:ext cx="914400" cy="228600"/>
+            <a:endParaRPr lang="en-US" sz="1100" dirty="0"/>
+          </a:p>
+        </p:txBody>
+      </p:sp>
+      <p:sp>
+        <p:nvSpPr>
+          <p:cNvPr id="17" name="Text 15"/>
+          <p:cNvSpPr/>
+          <p:nvPr/>
+        </p:nvSpPr>
+        <p:spPr>
+          <a:xfrm>
+            <a:off x="7498080" y="4800600"/>
+            <a:ext cx="1188720" cy="256032"/>
           </a:xfrm>
           <a:prstGeom prst="rect">
             <a:avLst/>
@@ -3251,9 +3597,9 @@
               <a:buNone/>
             </a:pPr>
             <a:r>
-              <a:rPr lang="en-US" sz="1000" dirty="0">
-                <a:solidFill>
-                  <a:srgbClr val="555555"/>
+              <a:rPr lang="en-US" sz="1100" dirty="0">
+                <a:solidFill>
+                  <a:srgbClr val="6A6A6A"/>
                 </a:solidFill>
                 <a:latin typeface="Arial" pitchFamily="34" charset="0"/>
                 <a:ea typeface="Arial" pitchFamily="34" charset="-122"/>
@@ -3261,7 +3607,7 @@
               </a:rPr>
               <a:t>2 / 11</a:t>
             </a:r>
-            <a:endParaRPr lang="en-US" sz="1000" dirty="0"/>
+            <a:endParaRPr lang="en-US" sz="1100" dirty="0"/>
           </a:p>
         </p:txBody>
       </p:sp>
@@ -3276,13 +3622,6 @@
 <file path=ppt/slides/slide3.xml><?xml version="1.0" encoding="utf-8"?>
 <p:sld xmlns:a="http://schemas.openxmlformats.org/drawingml/2006/main" xmlns:r="http://schemas.openxmlformats.org/officeDocument/2006/relationships" xmlns:p="http://schemas.openxmlformats.org/presentationml/2006/main">
   <p:cSld name="Slide 3">
-    <p:bg>
-      <p:bgPr>
-        <a:solidFill>
-          <a:srgbClr val="FFFFFF"/>
-        </a:solidFill>
-      </p:bgPr>
-    </p:bg>
     <p:spTree>
       <p:nvGrpSpPr>
         <p:cNvPr id="1" name=""/>
@@ -3299,63 +3638,24 @@
       </p:grpSpPr>
       <p:sp>
         <p:nvSpPr>
-          <p:cNvPr id="2" name="Text 0"/>
-          <p:cNvSpPr/>
-          <p:nvPr/>
-        </p:nvSpPr>
-        <p:spPr>
-          <a:xfrm>
-            <a:off x="457200" y="320040"/>
-            <a:ext cx="8229600" cy="457200"/>
-          </a:xfrm>
-          <a:prstGeom prst="rect">
-            <a:avLst/>
-          </a:prstGeom>
-          <a:noFill/>
-          <a:ln/>
-        </p:spPr>
-        <p:txBody>
-          <a:bodyPr wrap="square" lIns="0" tIns="0" rIns="0" bIns="0" rtlCol="0" anchor="ctr"/>
-          <a:lstStyle/>
-          <a:p>
-            <a:pPr indent="0" marL="0">
-              <a:buNone/>
-            </a:pPr>
-            <a:r>
-              <a:rPr lang="en-US" sz="2800" b="1" dirty="0">
-                <a:solidFill>
-                  <a:srgbClr val="1A1A1A"/>
-                </a:solidFill>
-                <a:latin typeface="Arial" pitchFamily="34" charset="0"/>
-                <a:ea typeface="Arial" pitchFamily="34" charset="-122"/>
-                <a:cs typeface="Arial" pitchFamily="34" charset="-120"/>
-              </a:rPr>
-              <a:t>Current Pressures</a:t>
-            </a:r>
-            <a:endParaRPr lang="en-US" sz="2800" dirty="0"/>
-          </a:p>
-        </p:txBody>
-      </p:sp>
-      <p:sp>
-        <p:nvSpPr>
-          <p:cNvPr id="3" name="Shape 1"/>
-          <p:cNvSpPr/>
-          <p:nvPr/>
-        </p:nvSpPr>
-        <p:spPr>
-          <a:xfrm>
-            <a:off x="457200" y="1097280"/>
-            <a:ext cx="4023360" cy="1325880"/>
+          <p:cNvPr id="2" name="Shape 0"/>
+          <p:cNvSpPr/>
+          <p:nvPr/>
+        </p:nvSpPr>
+        <p:spPr>
+          <a:xfrm>
+            <a:off x="0" y="0"/>
+            <a:ext cx="9144000" cy="5143500"/>
           </a:xfrm>
           <a:prstGeom prst="rect">
             <a:avLst/>
           </a:prstGeom>
           <a:solidFill>
-            <a:srgbClr val="F7F7F7"/>
+            <a:srgbClr val="FFFFFF"/>
           </a:solidFill>
           <a:ln w="12700">
             <a:solidFill>
-              <a:srgbClr val="CCCCCC"/>
+              <a:srgbClr val="FFFFFF"/>
             </a:solidFill>
             <a:prstDash val="solid"/>
           </a:ln>
@@ -3363,102 +3663,65 @@
       </p:sp>
       <p:sp>
         <p:nvSpPr>
-          <p:cNvPr id="4" name="Text 2"/>
-          <p:cNvSpPr/>
-          <p:nvPr/>
-        </p:nvSpPr>
-        <p:spPr>
-          <a:xfrm>
-            <a:off x="685800" y="1325880"/>
-            <a:ext cx="3566160" cy="320040"/>
-          </a:xfrm>
-          <a:prstGeom prst="rect">
-            <a:avLst/>
-          </a:prstGeom>
-          <a:noFill/>
-          <a:ln/>
-        </p:spPr>
-        <p:txBody>
-          <a:bodyPr wrap="square" lIns="0" tIns="0" rIns="0" bIns="0" rtlCol="0" anchor="ctr"/>
-          <a:lstStyle/>
-          <a:p>
-            <a:pPr indent="0" marL="0">
-              <a:buNone/>
-            </a:pPr>
-            <a:r>
-              <a:rPr lang="en-US" sz="1600" b="1" dirty="0">
-                <a:solidFill>
-                  <a:srgbClr val="1A1A1A"/>
-                </a:solidFill>
-                <a:latin typeface="Arial" pitchFamily="34" charset="0"/>
-                <a:ea typeface="Arial" pitchFamily="34" charset="-122"/>
-                <a:cs typeface="Arial" pitchFamily="34" charset="-120"/>
-              </a:rPr>
-              <a:t>Talent Capability</a:t>
-            </a:r>
-            <a:endParaRPr lang="en-US" sz="1600" dirty="0"/>
-          </a:p>
-        </p:txBody>
-      </p:sp>
-      <p:sp>
-        <p:nvSpPr>
-          <p:cNvPr id="5" name="Text 3"/>
-          <p:cNvSpPr/>
-          <p:nvPr/>
-        </p:nvSpPr>
-        <p:spPr>
-          <a:xfrm>
-            <a:off x="685800" y="1691640"/>
-            <a:ext cx="3566160" cy="548640"/>
-          </a:xfrm>
-          <a:prstGeom prst="rect">
-            <a:avLst/>
-          </a:prstGeom>
-          <a:noFill/>
-          <a:ln/>
-        </p:spPr>
-        <p:txBody>
-          <a:bodyPr wrap="square" lIns="0" tIns="0" rIns="0" bIns="0" rtlCol="0" anchor="ctr"/>
-          <a:lstStyle/>
-          <a:p>
-            <a:pPr indent="0" marL="0">
-              <a:buNone/>
-            </a:pPr>
-            <a:r>
-              <a:rPr lang="en-US" sz="1300" dirty="0">
-                <a:solidFill>
-                  <a:srgbClr val="555555"/>
-                </a:solidFill>
-                <a:latin typeface="Arial" pitchFamily="34" charset="0"/>
-                <a:ea typeface="Arial" pitchFamily="34" charset="-122"/>
-                <a:cs typeface="Arial" pitchFamily="34" charset="-120"/>
-              </a:rPr>
-              <a:t>Difficulty developing and retaining high-skill American talent in critical roles</a:t>
-            </a:r>
-            <a:endParaRPr lang="en-US" sz="1300" dirty="0"/>
-          </a:p>
-        </p:txBody>
-      </p:sp>
-      <p:sp>
-        <p:nvSpPr>
-          <p:cNvPr id="6" name="Shape 4"/>
-          <p:cNvSpPr/>
-          <p:nvPr/>
-        </p:nvSpPr>
-        <p:spPr>
-          <a:xfrm>
-            <a:off x="4754880" y="1097280"/>
-            <a:ext cx="4023360" cy="1325880"/>
-          </a:xfrm>
-          <a:prstGeom prst="rect">
-            <a:avLst/>
+          <p:cNvPr id="3" name="Text 1"/>
+          <p:cNvSpPr/>
+          <p:nvPr/>
+        </p:nvSpPr>
+        <p:spPr>
+          <a:xfrm>
+            <a:off x="457200" y="274320"/>
+            <a:ext cx="8229600" cy="411480"/>
+          </a:xfrm>
+          <a:prstGeom prst="rect">
+            <a:avLst/>
+          </a:prstGeom>
+          <a:noFill/>
+          <a:ln/>
+        </p:spPr>
+        <p:txBody>
+          <a:bodyPr wrap="square" lIns="0" tIns="0" rIns="0" bIns="0" rtlCol="0" anchor="ctr"/>
+          <a:lstStyle/>
+          <a:p>
+            <a:pPr indent="0" marL="0">
+              <a:buNone/>
+            </a:pPr>
+            <a:r>
+              <a:rPr lang="en-US" sz="2400" b="1" dirty="0">
+                <a:solidFill>
+                  <a:srgbClr val="1B2A4A"/>
+                </a:solidFill>
+                <a:latin typeface="Arial" pitchFamily="34" charset="0"/>
+                <a:ea typeface="Arial" pitchFamily="34" charset="-122"/>
+                <a:cs typeface="Arial" pitchFamily="34" charset="-120"/>
+              </a:rPr>
+              <a:t>Current Pressures</a:t>
+            </a:r>
+            <a:endParaRPr lang="en-US" sz="2400" dirty="0"/>
+          </a:p>
+        </p:txBody>
+      </p:sp>
+      <p:sp>
+        <p:nvSpPr>
+          <p:cNvPr id="4" name="Shape 2"/>
+          <p:cNvSpPr/>
+          <p:nvPr/>
+        </p:nvSpPr>
+        <p:spPr>
+          <a:xfrm>
+            <a:off x="457200" y="960120"/>
+            <a:ext cx="3977640" cy="1417320"/>
+          </a:xfrm>
+          <a:prstGeom prst="roundRect">
+            <a:avLst>
+              <a:gd name="adj" fmla="val 5161"/>
+            </a:avLst>
           </a:prstGeom>
           <a:solidFill>
-            <a:srgbClr val="F7F7F7"/>
+            <a:srgbClr val="1B2A4A"/>
           </a:solidFill>
           <a:ln w="12700">
             <a:solidFill>
-              <a:srgbClr val="CCCCCC"/>
+              <a:srgbClr val="1B2A4A"/>
             </a:solidFill>
             <a:prstDash val="solid"/>
           </a:ln>
@@ -3466,53 +3729,53 @@
       </p:sp>
       <p:sp>
         <p:nvSpPr>
-          <p:cNvPr id="7" name="Text 5"/>
-          <p:cNvSpPr/>
-          <p:nvPr/>
-        </p:nvSpPr>
-        <p:spPr>
-          <a:xfrm>
-            <a:off x="4983480" y="1325880"/>
-            <a:ext cx="3566160" cy="320040"/>
-          </a:xfrm>
-          <a:prstGeom prst="rect">
-            <a:avLst/>
-          </a:prstGeom>
-          <a:noFill/>
-          <a:ln/>
-        </p:spPr>
-        <p:txBody>
-          <a:bodyPr wrap="square" lIns="0" tIns="0" rIns="0" bIns="0" rtlCol="0" anchor="ctr"/>
-          <a:lstStyle/>
-          <a:p>
-            <a:pPr indent="0" marL="0">
-              <a:buNone/>
-            </a:pPr>
-            <a:r>
-              <a:rPr lang="en-US" sz="1600" b="1" dirty="0">
-                <a:solidFill>
-                  <a:srgbClr val="1A1A1A"/>
-                </a:solidFill>
-                <a:latin typeface="Arial" pitchFamily="34" charset="0"/>
-                <a:ea typeface="Arial" pitchFamily="34" charset="-122"/>
-                <a:cs typeface="Arial" pitchFamily="34" charset="-120"/>
-              </a:rPr>
-              <a:t>Domestic Production</a:t>
-            </a:r>
-            <a:endParaRPr lang="en-US" sz="1600" dirty="0"/>
-          </a:p>
-        </p:txBody>
-      </p:sp>
-      <p:sp>
-        <p:nvSpPr>
-          <p:cNvPr id="8" name="Text 6"/>
-          <p:cNvSpPr/>
-          <p:nvPr/>
-        </p:nvSpPr>
-        <p:spPr>
-          <a:xfrm>
-            <a:off x="4983480" y="1691640"/>
-            <a:ext cx="3566160" cy="548640"/>
+          <p:cNvPr id="5" name="Text 3"/>
+          <p:cNvSpPr/>
+          <p:nvPr/>
+        </p:nvSpPr>
+        <p:spPr>
+          <a:xfrm>
+            <a:off x="685800" y="1216152"/>
+            <a:ext cx="3520440" cy="320040"/>
+          </a:xfrm>
+          <a:prstGeom prst="rect">
+            <a:avLst/>
+          </a:prstGeom>
+          <a:noFill/>
+          <a:ln/>
+        </p:spPr>
+        <p:txBody>
+          <a:bodyPr wrap="square" lIns="0" tIns="0" rIns="0" bIns="0" rtlCol="0" anchor="ctr"/>
+          <a:lstStyle/>
+          <a:p>
+            <a:pPr indent="0" marL="0">
+              <a:buNone/>
+            </a:pPr>
+            <a:r>
+              <a:rPr lang="en-US" sz="1500" b="1" dirty="0">
+                <a:solidFill>
+                  <a:srgbClr val="C9A227"/>
+                </a:solidFill>
+                <a:latin typeface="Arial" pitchFamily="34" charset="0"/>
+                <a:ea typeface="Arial" pitchFamily="34" charset="-122"/>
+                <a:cs typeface="Arial" pitchFamily="34" charset="-120"/>
+              </a:rPr>
+              <a:t>Talent Capability</a:t>
+            </a:r>
+            <a:endParaRPr lang="en-US" sz="1500" dirty="0"/>
+          </a:p>
+        </p:txBody>
+      </p:sp>
+      <p:sp>
+        <p:nvSpPr>
+          <p:cNvPr id="6" name="Text 4"/>
+          <p:cNvSpPr/>
+          <p:nvPr/>
+        </p:nvSpPr>
+        <p:spPr>
+          <a:xfrm>
+            <a:off x="685800" y="1600200"/>
+            <a:ext cx="3520440" cy="594360"/>
           </a:xfrm>
           <a:prstGeom prst="rect">
             <a:avLst/>
@@ -3530,13 +3793,13 @@
             <a:r>
               <a:rPr lang="en-US" sz="1300" dirty="0">
                 <a:solidFill>
-                  <a:srgbClr val="555555"/>
-                </a:solidFill>
-                <a:latin typeface="Arial" pitchFamily="34" charset="0"/>
-                <a:ea typeface="Arial" pitchFamily="34" charset="-122"/>
-                <a:cs typeface="Arial" pitchFamily="34" charset="-120"/>
-              </a:rPr>
-              <a:t>Pressure to restore or expand domestic productive capacity</a:t>
+                  <a:srgbClr val="FFFFFF"/>
+                </a:solidFill>
+                <a:latin typeface="Arial" pitchFamily="34" charset="0"/>
+                <a:ea typeface="Arial" pitchFamily="34" charset="-122"/>
+                <a:cs typeface="Arial" pitchFamily="34" charset="-120"/>
+              </a:rPr>
+              <a:t>Difficulty developing and retaining high-skill American talent in critical roles</a:t>
             </a:r>
             <a:endParaRPr lang="en-US" sz="1300" dirty="0"/>
           </a:p>
@@ -3544,24 +3807,26 @@
       </p:sp>
       <p:sp>
         <p:nvSpPr>
-          <p:cNvPr id="9" name="Shape 7"/>
-          <p:cNvSpPr/>
-          <p:nvPr/>
-        </p:nvSpPr>
-        <p:spPr>
-          <a:xfrm>
-            <a:off x="457200" y="2651760"/>
-            <a:ext cx="4023360" cy="1325880"/>
-          </a:xfrm>
-          <a:prstGeom prst="rect">
-            <a:avLst/>
+          <p:cNvPr id="7" name="Shape 5"/>
+          <p:cNvSpPr/>
+          <p:nvPr/>
+        </p:nvSpPr>
+        <p:spPr>
+          <a:xfrm>
+            <a:off x="4663440" y="960120"/>
+            <a:ext cx="3977640" cy="1417320"/>
+          </a:xfrm>
+          <a:prstGeom prst="roundRect">
+            <a:avLst>
+              <a:gd name="adj" fmla="val 5161"/>
+            </a:avLst>
           </a:prstGeom>
           <a:solidFill>
-            <a:srgbClr val="F7F7F7"/>
+            <a:srgbClr val="1B2A4A"/>
           </a:solidFill>
           <a:ln w="12700">
             <a:solidFill>
-              <a:srgbClr val="CCCCCC"/>
+              <a:srgbClr val="1B2A4A"/>
             </a:solidFill>
             <a:prstDash val="solid"/>
           </a:ln>
@@ -3569,53 +3834,53 @@
       </p:sp>
       <p:sp>
         <p:nvSpPr>
-          <p:cNvPr id="10" name="Text 8"/>
-          <p:cNvSpPr/>
-          <p:nvPr/>
-        </p:nvSpPr>
-        <p:spPr>
-          <a:xfrm>
-            <a:off x="685800" y="2880360"/>
-            <a:ext cx="3566160" cy="320040"/>
-          </a:xfrm>
-          <a:prstGeom prst="rect">
-            <a:avLst/>
-          </a:prstGeom>
-          <a:noFill/>
-          <a:ln/>
-        </p:spPr>
-        <p:txBody>
-          <a:bodyPr wrap="square" lIns="0" tIns="0" rIns="0" bIns="0" rtlCol="0" anchor="ctr"/>
-          <a:lstStyle/>
-          <a:p>
-            <a:pPr indent="0" marL="0">
-              <a:buNone/>
-            </a:pPr>
-            <a:r>
-              <a:rPr lang="en-US" sz="1600" b="1" dirty="0">
-                <a:solidFill>
-                  <a:srgbClr val="1A1A1A"/>
-                </a:solidFill>
-                <a:latin typeface="Arial" pitchFamily="34" charset="0"/>
-                <a:ea typeface="Arial" pitchFamily="34" charset="-122"/>
-                <a:cs typeface="Arial" pitchFamily="34" charset="-120"/>
-              </a:rPr>
-              <a:t>Trade Environment</a:t>
-            </a:r>
-            <a:endParaRPr lang="en-US" sz="1600" dirty="0"/>
-          </a:p>
-        </p:txBody>
-      </p:sp>
-      <p:sp>
-        <p:nvSpPr>
-          <p:cNvPr id="11" name="Text 9"/>
-          <p:cNvSpPr/>
-          <p:nvPr/>
-        </p:nvSpPr>
-        <p:spPr>
-          <a:xfrm>
-            <a:off x="685800" y="3246120"/>
-            <a:ext cx="3566160" cy="548640"/>
+          <p:cNvPr id="8" name="Text 6"/>
+          <p:cNvSpPr/>
+          <p:nvPr/>
+        </p:nvSpPr>
+        <p:spPr>
+          <a:xfrm>
+            <a:off x="4892040" y="1216152"/>
+            <a:ext cx="3520440" cy="320040"/>
+          </a:xfrm>
+          <a:prstGeom prst="rect">
+            <a:avLst/>
+          </a:prstGeom>
+          <a:noFill/>
+          <a:ln/>
+        </p:spPr>
+        <p:txBody>
+          <a:bodyPr wrap="square" lIns="0" tIns="0" rIns="0" bIns="0" rtlCol="0" anchor="ctr"/>
+          <a:lstStyle/>
+          <a:p>
+            <a:pPr indent="0" marL="0">
+              <a:buNone/>
+            </a:pPr>
+            <a:r>
+              <a:rPr lang="en-US" sz="1500" b="1" dirty="0">
+                <a:solidFill>
+                  <a:srgbClr val="C9A227"/>
+                </a:solidFill>
+                <a:latin typeface="Arial" pitchFamily="34" charset="0"/>
+                <a:ea typeface="Arial" pitchFamily="34" charset="-122"/>
+                <a:cs typeface="Arial" pitchFamily="34" charset="-120"/>
+              </a:rPr>
+              <a:t>Domestic Production</a:t>
+            </a:r>
+            <a:endParaRPr lang="en-US" sz="1500" dirty="0"/>
+          </a:p>
+        </p:txBody>
+      </p:sp>
+      <p:sp>
+        <p:nvSpPr>
+          <p:cNvPr id="9" name="Text 7"/>
+          <p:cNvSpPr/>
+          <p:nvPr/>
+        </p:nvSpPr>
+        <p:spPr>
+          <a:xfrm>
+            <a:off x="4892040" y="1600200"/>
+            <a:ext cx="3520440" cy="594360"/>
           </a:xfrm>
           <a:prstGeom prst="rect">
             <a:avLst/>
@@ -3633,13 +3898,13 @@
             <a:r>
               <a:rPr lang="en-US" sz="1300" dirty="0">
                 <a:solidFill>
-                  <a:srgbClr val="555555"/>
-                </a:solidFill>
-                <a:latin typeface="Arial" pitchFamily="34" charset="0"/>
-                <a:ea typeface="Arial" pitchFamily="34" charset="-122"/>
-                <a:cs typeface="Arial" pitchFamily="34" charset="-120"/>
-              </a:rPr>
-              <a:t>Trade and tariff uncertainty reshaping cost and risk calculations</a:t>
+                  <a:srgbClr val="FFFFFF"/>
+                </a:solidFill>
+                <a:latin typeface="Arial" pitchFamily="34" charset="0"/>
+                <a:ea typeface="Arial" pitchFamily="34" charset="-122"/>
+                <a:cs typeface="Arial" pitchFamily="34" charset="-120"/>
+              </a:rPr>
+              <a:t>Pressure to restore or expand domestic productive capacity</a:t>
             </a:r>
             <a:endParaRPr lang="en-US" sz="1300" dirty="0"/>
           </a:p>
@@ -3647,24 +3912,26 @@
       </p:sp>
       <p:sp>
         <p:nvSpPr>
-          <p:cNvPr id="12" name="Shape 10"/>
-          <p:cNvSpPr/>
-          <p:nvPr/>
-        </p:nvSpPr>
-        <p:spPr>
-          <a:xfrm>
-            <a:off x="4754880" y="2651760"/>
-            <a:ext cx="4023360" cy="1325880"/>
-          </a:xfrm>
-          <a:prstGeom prst="rect">
-            <a:avLst/>
+          <p:cNvPr id="10" name="Shape 8"/>
+          <p:cNvSpPr/>
+          <p:nvPr/>
+        </p:nvSpPr>
+        <p:spPr>
+          <a:xfrm>
+            <a:off x="457200" y="2606040"/>
+            <a:ext cx="3977640" cy="1417320"/>
+          </a:xfrm>
+          <a:prstGeom prst="roundRect">
+            <a:avLst>
+              <a:gd name="adj" fmla="val 5161"/>
+            </a:avLst>
           </a:prstGeom>
           <a:solidFill>
-            <a:srgbClr val="F7F7F7"/>
+            <a:srgbClr val="1B2A4A"/>
           </a:solidFill>
           <a:ln w="12700">
             <a:solidFill>
-              <a:srgbClr val="CCCCCC"/>
+              <a:srgbClr val="1B2A4A"/>
             </a:solidFill>
             <a:prstDash val="solid"/>
           </a:ln>
@@ -3672,32 +3939,137 @@
       </p:sp>
       <p:sp>
         <p:nvSpPr>
-          <p:cNvPr id="13" name="Text 11"/>
-          <p:cNvSpPr/>
-          <p:nvPr/>
-        </p:nvSpPr>
-        <p:spPr>
-          <a:xfrm>
-            <a:off x="4983480" y="2880360"/>
-            <a:ext cx="3566160" cy="320040"/>
-          </a:xfrm>
-          <a:prstGeom prst="rect">
-            <a:avLst/>
-          </a:prstGeom>
-          <a:noFill/>
-          <a:ln/>
-        </p:spPr>
-        <p:txBody>
-          <a:bodyPr wrap="square" lIns="0" tIns="0" rIns="0" bIns="0" rtlCol="0" anchor="ctr"/>
-          <a:lstStyle/>
-          <a:p>
-            <a:pPr indent="0" marL="0">
-              <a:buNone/>
-            </a:pPr>
-            <a:r>
-              <a:rPr lang="en-US" sz="1600" b="1" dirty="0">
-                <a:solidFill>
-                  <a:srgbClr val="1A1A1A"/>
+          <p:cNvPr id="11" name="Text 9"/>
+          <p:cNvSpPr/>
+          <p:nvPr/>
+        </p:nvSpPr>
+        <p:spPr>
+          <a:xfrm>
+            <a:off x="685800" y="2862072"/>
+            <a:ext cx="3520440" cy="320040"/>
+          </a:xfrm>
+          <a:prstGeom prst="rect">
+            <a:avLst/>
+          </a:prstGeom>
+          <a:noFill/>
+          <a:ln/>
+        </p:spPr>
+        <p:txBody>
+          <a:bodyPr wrap="square" lIns="0" tIns="0" rIns="0" bIns="0" rtlCol="0" anchor="ctr"/>
+          <a:lstStyle/>
+          <a:p>
+            <a:pPr indent="0" marL="0">
+              <a:buNone/>
+            </a:pPr>
+            <a:r>
+              <a:rPr lang="en-US" sz="1500" b="1" dirty="0">
+                <a:solidFill>
+                  <a:srgbClr val="C9A227"/>
+                </a:solidFill>
+                <a:latin typeface="Arial" pitchFamily="34" charset="0"/>
+                <a:ea typeface="Arial" pitchFamily="34" charset="-122"/>
+                <a:cs typeface="Arial" pitchFamily="34" charset="-120"/>
+              </a:rPr>
+              <a:t>Trade Environment</a:t>
+            </a:r>
+            <a:endParaRPr lang="en-US" sz="1500" dirty="0"/>
+          </a:p>
+        </p:txBody>
+      </p:sp>
+      <p:sp>
+        <p:nvSpPr>
+          <p:cNvPr id="12" name="Text 10"/>
+          <p:cNvSpPr/>
+          <p:nvPr/>
+        </p:nvSpPr>
+        <p:spPr>
+          <a:xfrm>
+            <a:off x="685800" y="3246120"/>
+            <a:ext cx="3520440" cy="594360"/>
+          </a:xfrm>
+          <a:prstGeom prst="rect">
+            <a:avLst/>
+          </a:prstGeom>
+          <a:noFill/>
+          <a:ln/>
+        </p:spPr>
+        <p:txBody>
+          <a:bodyPr wrap="square" lIns="0" tIns="0" rIns="0" bIns="0" rtlCol="0" anchor="ctr"/>
+          <a:lstStyle/>
+          <a:p>
+            <a:pPr indent="0" marL="0">
+              <a:buNone/>
+            </a:pPr>
+            <a:r>
+              <a:rPr lang="en-US" sz="1300" dirty="0">
+                <a:solidFill>
+                  <a:srgbClr val="FFFFFF"/>
+                </a:solidFill>
+                <a:latin typeface="Arial" pitchFamily="34" charset="0"/>
+                <a:ea typeface="Arial" pitchFamily="34" charset="-122"/>
+                <a:cs typeface="Arial" pitchFamily="34" charset="-120"/>
+              </a:rPr>
+              <a:t>Trade and tariff uncertainty reshaping cost and risk calculations</a:t>
+            </a:r>
+            <a:endParaRPr lang="en-US" sz="1300" dirty="0"/>
+          </a:p>
+        </p:txBody>
+      </p:sp>
+      <p:sp>
+        <p:nvSpPr>
+          <p:cNvPr id="13" name="Shape 11"/>
+          <p:cNvSpPr/>
+          <p:nvPr/>
+        </p:nvSpPr>
+        <p:spPr>
+          <a:xfrm>
+            <a:off x="4663440" y="2606040"/>
+            <a:ext cx="3977640" cy="1417320"/>
+          </a:xfrm>
+          <a:prstGeom prst="roundRect">
+            <a:avLst>
+              <a:gd name="adj" fmla="val 5161"/>
+            </a:avLst>
+          </a:prstGeom>
+          <a:solidFill>
+            <a:srgbClr val="1B2A4A"/>
+          </a:solidFill>
+          <a:ln w="12700">
+            <a:solidFill>
+              <a:srgbClr val="1B2A4A"/>
+            </a:solidFill>
+            <a:prstDash val="solid"/>
+          </a:ln>
+        </p:spPr>
+      </p:sp>
+      <p:sp>
+        <p:nvSpPr>
+          <p:cNvPr id="14" name="Text 12"/>
+          <p:cNvSpPr/>
+          <p:nvPr/>
+        </p:nvSpPr>
+        <p:spPr>
+          <a:xfrm>
+            <a:off x="4892040" y="2862072"/>
+            <a:ext cx="3520440" cy="320040"/>
+          </a:xfrm>
+          <a:prstGeom prst="rect">
+            <a:avLst/>
+          </a:prstGeom>
+          <a:noFill/>
+          <a:ln/>
+        </p:spPr>
+        <p:txBody>
+          <a:bodyPr wrap="square" lIns="0" tIns="0" rIns="0" bIns="0" rtlCol="0" anchor="ctr"/>
+          <a:lstStyle/>
+          <a:p>
+            <a:pPr indent="0" marL="0">
+              <a:buNone/>
+            </a:pPr>
+            <a:r>
+              <a:rPr lang="en-US" sz="1500" b="1" dirty="0">
+                <a:solidFill>
+                  <a:srgbClr val="C9A227"/>
                 </a:solidFill>
                 <a:latin typeface="Arial" pitchFamily="34" charset="0"/>
                 <a:ea typeface="Arial" pitchFamily="34" charset="-122"/>
@@ -3705,20 +4077,20 @@
               </a:rPr>
               <a:t>Productivity Path</a:t>
             </a:r>
-            <a:endParaRPr lang="en-US" sz="1600" dirty="0"/>
-          </a:p>
-        </p:txBody>
-      </p:sp>
-      <p:sp>
-        <p:nvSpPr>
-          <p:cNvPr id="14" name="Text 12"/>
-          <p:cNvSpPr/>
-          <p:nvPr/>
-        </p:nvSpPr>
-        <p:spPr>
-          <a:xfrm>
-            <a:off x="4983480" y="3246120"/>
-            <a:ext cx="3566160" cy="548640"/>
+            <a:endParaRPr lang="en-US" sz="1500" dirty="0"/>
+          </a:p>
+        </p:txBody>
+      </p:sp>
+      <p:sp>
+        <p:nvSpPr>
+          <p:cNvPr id="15" name="Text 13"/>
+          <p:cNvSpPr/>
+          <p:nvPr/>
+        </p:nvSpPr>
+        <p:spPr>
+          <a:xfrm>
+            <a:off x="4892040" y="3246120"/>
+            <a:ext cx="3520440" cy="594360"/>
           </a:xfrm>
           <a:prstGeom prst="rect">
             <a:avLst/>
@@ -3736,7 +4108,7 @@
             <a:r>
               <a:rPr lang="en-US" sz="1300" dirty="0">
                 <a:solidFill>
-                  <a:srgbClr val="555555"/>
+                  <a:srgbClr val="FFFFFF"/>
                 </a:solidFill>
                 <a:latin typeface="Arial" pitchFamily="34" charset="0"/>
                 <a:ea typeface="Arial" pitchFamily="34" charset="-122"/>
@@ -3750,32 +4122,32 @@
       </p:sp>
       <p:sp>
         <p:nvSpPr>
-          <p:cNvPr id="15" name="Text 13"/>
+          <p:cNvPr id="16" name="Text 14"/>
           <p:cNvSpPr/>
           <p:nvPr/>
         </p:nvSpPr>
         <p:spPr>
           <a:xfrm>
             <a:off x="457200" y="4800600"/>
-            <a:ext cx="5943600" cy="228600"/>
-          </a:xfrm>
-          <a:prstGeom prst="rect">
-            <a:avLst/>
-          </a:prstGeom>
-          <a:noFill/>
-          <a:ln/>
-        </p:spPr>
-        <p:txBody>
-          <a:bodyPr wrap="square" lIns="0" tIns="0" rIns="0" bIns="0" rtlCol="0" anchor="ctr"/>
-          <a:lstStyle/>
-          <a:p>
-            <a:pPr indent="0" marL="0">
-              <a:buNone/>
-            </a:pPr>
-            <a:r>
-              <a:rPr lang="en-US" sz="1000" dirty="0">
-                <a:solidFill>
-                  <a:srgbClr val="555555"/>
+            <a:ext cx="5943600" cy="256032"/>
+          </a:xfrm>
+          <a:prstGeom prst="rect">
+            <a:avLst/>
+          </a:prstGeom>
+          <a:noFill/>
+          <a:ln/>
+        </p:spPr>
+        <p:txBody>
+          <a:bodyPr wrap="square" lIns="0" tIns="0" rIns="0" bIns="0" rtlCol="0" anchor="ctr"/>
+          <a:lstStyle/>
+          <a:p>
+            <a:pPr indent="0" marL="0">
+              <a:buNone/>
+            </a:pPr>
+            <a:r>
+              <a:rPr lang="en-US" sz="1100" dirty="0">
+                <a:solidFill>
+                  <a:srgbClr val="6A6A6A"/>
                 </a:solidFill>
                 <a:latin typeface="Arial" pitchFamily="34" charset="0"/>
                 <a:ea typeface="Arial" pitchFamily="34" charset="-122"/>
@@ -3783,20 +4155,20 @@
               </a:rPr>
               <a:t>Joshua Konkle  |  Chief of Staff Strategist</a:t>
             </a:r>
-            <a:endParaRPr lang="en-US" sz="1000" dirty="0"/>
-          </a:p>
-        </p:txBody>
-      </p:sp>
-      <p:sp>
-        <p:nvSpPr>
-          <p:cNvPr id="16" name="Text 14"/>
-          <p:cNvSpPr/>
-          <p:nvPr/>
-        </p:nvSpPr>
-        <p:spPr>
-          <a:xfrm>
-            <a:off x="7772400" y="4800600"/>
-            <a:ext cx="914400" cy="228600"/>
+            <a:endParaRPr lang="en-US" sz="1100" dirty="0"/>
+          </a:p>
+        </p:txBody>
+      </p:sp>
+      <p:sp>
+        <p:nvSpPr>
+          <p:cNvPr id="17" name="Text 15"/>
+          <p:cNvSpPr/>
+          <p:nvPr/>
+        </p:nvSpPr>
+        <p:spPr>
+          <a:xfrm>
+            <a:off x="7498080" y="4800600"/>
+            <a:ext cx="1188720" cy="256032"/>
           </a:xfrm>
           <a:prstGeom prst="rect">
             <a:avLst/>
@@ -3812,9 +4184,9 @@
               <a:buNone/>
             </a:pPr>
             <a:r>
-              <a:rPr lang="en-US" sz="1000" dirty="0">
-                <a:solidFill>
-                  <a:srgbClr val="555555"/>
+              <a:rPr lang="en-US" sz="1100" dirty="0">
+                <a:solidFill>
+                  <a:srgbClr val="6A6A6A"/>
                 </a:solidFill>
                 <a:latin typeface="Arial" pitchFamily="34" charset="0"/>
                 <a:ea typeface="Arial" pitchFamily="34" charset="-122"/>
@@ -3822,7 +4194,7 @@
               </a:rPr>
               <a:t>3 / 11</a:t>
             </a:r>
-            <a:endParaRPr lang="en-US" sz="1000" dirty="0"/>
+            <a:endParaRPr lang="en-US" sz="1100" dirty="0"/>
           </a:p>
         </p:txBody>
       </p:sp>
@@ -3837,13 +4209,6 @@
 <file path=ppt/slides/slide4.xml><?xml version="1.0" encoding="utf-8"?>
 <p:sld xmlns:a="http://schemas.openxmlformats.org/drawingml/2006/main" xmlns:r="http://schemas.openxmlformats.org/officeDocument/2006/relationships" xmlns:p="http://schemas.openxmlformats.org/presentationml/2006/main">
   <p:cSld name="Slide 4">
-    <p:bg>
-      <p:bgPr>
-        <a:solidFill>
-          <a:srgbClr val="FFFFFF"/>
-        </a:solidFill>
-      </p:bgPr>
-    </p:bg>
     <p:spTree>
       <p:nvGrpSpPr>
         <p:cNvPr id="1" name=""/>
@@ -3860,32 +4225,57 @@
       </p:grpSpPr>
       <p:sp>
         <p:nvSpPr>
-          <p:cNvPr id="2" name="Text 0"/>
-          <p:cNvSpPr/>
-          <p:nvPr/>
-        </p:nvSpPr>
-        <p:spPr>
-          <a:xfrm>
-            <a:off x="457200" y="274320"/>
-            <a:ext cx="8229600" cy="411480"/>
-          </a:xfrm>
-          <a:prstGeom prst="rect">
-            <a:avLst/>
-          </a:prstGeom>
-          <a:noFill/>
-          <a:ln/>
-        </p:spPr>
-        <p:txBody>
-          <a:bodyPr wrap="square" lIns="0" tIns="0" rIns="0" bIns="0" rtlCol="0" anchor="ctr"/>
-          <a:lstStyle/>
-          <a:p>
-            <a:pPr indent="0" marL="0">
-              <a:buNone/>
-            </a:pPr>
-            <a:r>
-              <a:rPr lang="en-US" sz="2600" b="1" dirty="0">
-                <a:solidFill>
-                  <a:srgbClr val="1A1A1A"/>
+          <p:cNvPr id="2" name="Shape 0"/>
+          <p:cNvSpPr/>
+          <p:nvPr/>
+        </p:nvSpPr>
+        <p:spPr>
+          <a:xfrm>
+            <a:off x="0" y="0"/>
+            <a:ext cx="9144000" cy="5143500"/>
+          </a:xfrm>
+          <a:prstGeom prst="rect">
+            <a:avLst/>
+          </a:prstGeom>
+          <a:solidFill>
+            <a:srgbClr val="FFFFFF"/>
+          </a:solidFill>
+          <a:ln w="12700">
+            <a:solidFill>
+              <a:srgbClr val="FFFFFF"/>
+            </a:solidFill>
+            <a:prstDash val="solid"/>
+          </a:ln>
+        </p:spPr>
+      </p:sp>
+      <p:sp>
+        <p:nvSpPr>
+          <p:cNvPr id="3" name="Text 1"/>
+          <p:cNvSpPr/>
+          <p:nvPr/>
+        </p:nvSpPr>
+        <p:spPr>
+          <a:xfrm>
+            <a:off x="457200" y="228600"/>
+            <a:ext cx="8229600" cy="365760"/>
+          </a:xfrm>
+          <a:prstGeom prst="rect">
+            <a:avLst/>
+          </a:prstGeom>
+          <a:noFill/>
+          <a:ln/>
+        </p:spPr>
+        <p:txBody>
+          <a:bodyPr wrap="square" lIns="0" tIns="0" rIns="0" bIns="0" rtlCol="0" anchor="ctr"/>
+          <a:lstStyle/>
+          <a:p>
+            <a:pPr indent="0" marL="0">
+              <a:buNone/>
+            </a:pPr>
+            <a:r>
+              <a:rPr lang="en-US" sz="2200" b="1" dirty="0">
+                <a:solidFill>
+                  <a:srgbClr val="1B2A4A"/>
                 </a:solidFill>
                 <a:latin typeface="Arial" pitchFamily="34" charset="0"/>
                 <a:ea typeface="Arial" pitchFamily="34" charset="-122"/>
@@ -3893,19 +4283,19 @@
               </a:rPr>
               <a:t>The Productive Pragmatism Frame</a:t>
             </a:r>
-            <a:endParaRPr lang="en-US" sz="2600" dirty="0"/>
-          </a:p>
-        </p:txBody>
-      </p:sp>
-      <p:sp>
-        <p:nvSpPr>
-          <p:cNvPr id="3" name="Text 1"/>
-          <p:cNvSpPr/>
-          <p:nvPr/>
-        </p:nvSpPr>
-        <p:spPr>
-          <a:xfrm>
-            <a:off x="457200" y="731520"/>
+            <a:endParaRPr lang="en-US" sz="2200" dirty="0"/>
+          </a:p>
+        </p:txBody>
+      </p:sp>
+      <p:sp>
+        <p:nvSpPr>
+          <p:cNvPr id="4" name="Text 2"/>
+          <p:cNvSpPr/>
+          <p:nvPr/>
+        </p:nvSpPr>
+        <p:spPr>
+          <a:xfrm>
+            <a:off x="457200" y="594360"/>
             <a:ext cx="8229600" cy="274320"/>
           </a:xfrm>
           <a:prstGeom prst="rect">
@@ -3922,9 +4312,9 @@
               <a:buNone/>
             </a:pPr>
             <a:r>
-              <a:rPr lang="en-US" sz="1400" dirty="0">
-                <a:solidFill>
-                  <a:srgbClr val="555555"/>
+              <a:rPr lang="en-US" sz="1300" dirty="0">
+                <a:solidFill>
+                  <a:srgbClr val="5A5A5A"/>
                 </a:solidFill>
                 <a:latin typeface="Arial" pitchFamily="34" charset="0"/>
                 <a:ea typeface="Arial" pitchFamily="34" charset="-122"/>
@@ -3932,38 +4322,38 @@
               </a:rPr>
               <a:t>From financialization and labor arbitrage toward productive sovereignty</a:t>
             </a:r>
-            <a:endParaRPr lang="en-US" sz="1400" dirty="0"/>
-          </a:p>
-        </p:txBody>
-      </p:sp>
-      <p:sp>
-        <p:nvSpPr>
-          <p:cNvPr id="4" name="Text 2"/>
-          <p:cNvSpPr/>
-          <p:nvPr/>
-        </p:nvSpPr>
-        <p:spPr>
-          <a:xfrm>
-            <a:off x="457200" y="1188720"/>
-            <a:ext cx="640080" cy="640080"/>
-          </a:xfrm>
-          <a:prstGeom prst="rect">
-            <a:avLst/>
-          </a:prstGeom>
-          <a:noFill/>
-          <a:ln/>
-        </p:spPr>
-        <p:txBody>
-          <a:bodyPr wrap="square" lIns="0" tIns="0" rIns="0" bIns="0" rtlCol="0" anchor="ctr"/>
-          <a:lstStyle/>
-          <a:p>
-            <a:pPr indent="0" marL="0">
-              <a:buNone/>
-            </a:pPr>
-            <a:r>
-              <a:rPr lang="en-US" sz="2000" b="1" dirty="0">
-                <a:solidFill>
-                  <a:srgbClr val="555555"/>
+            <a:endParaRPr lang="en-US" sz="1300" dirty="0"/>
+          </a:p>
+        </p:txBody>
+      </p:sp>
+      <p:sp>
+        <p:nvSpPr>
+          <p:cNvPr id="5" name="Text 3"/>
+          <p:cNvSpPr/>
+          <p:nvPr/>
+        </p:nvSpPr>
+        <p:spPr>
+          <a:xfrm>
+            <a:off x="457200" y="1143000"/>
+            <a:ext cx="640080" cy="365760"/>
+          </a:xfrm>
+          <a:prstGeom prst="rect">
+            <a:avLst/>
+          </a:prstGeom>
+          <a:noFill/>
+          <a:ln/>
+        </p:spPr>
+        <p:txBody>
+          <a:bodyPr wrap="square" lIns="0" tIns="0" rIns="0" bIns="0" rtlCol="0" anchor="ctr"/>
+          <a:lstStyle/>
+          <a:p>
+            <a:pPr indent="0" marL="0">
+              <a:buNone/>
+            </a:pPr>
+            <a:r>
+              <a:rPr lang="en-US" sz="1800" b="1" dirty="0">
+                <a:solidFill>
+                  <a:srgbClr val="C9A227"/>
                 </a:solidFill>
                 <a:latin typeface="Arial" pitchFamily="34" charset="0"/>
                 <a:ea typeface="Arial" pitchFamily="34" charset="-122"/>
@@ -3971,19 +4361,58 @@
               </a:rPr>
               <a:t>01</a:t>
             </a:r>
-            <a:endParaRPr lang="en-US" sz="2000" dirty="0"/>
-          </a:p>
-        </p:txBody>
-      </p:sp>
-      <p:sp>
-        <p:nvSpPr>
-          <p:cNvPr id="5" name="Text 3"/>
-          <p:cNvSpPr/>
-          <p:nvPr/>
-        </p:nvSpPr>
-        <p:spPr>
-          <a:xfrm>
-            <a:off x="1280160" y="1188720"/>
+            <a:endParaRPr lang="en-US" sz="1800" dirty="0"/>
+          </a:p>
+        </p:txBody>
+      </p:sp>
+      <p:sp>
+        <p:nvSpPr>
+          <p:cNvPr id="6" name="Text 4"/>
+          <p:cNvSpPr/>
+          <p:nvPr/>
+        </p:nvSpPr>
+        <p:spPr>
+          <a:xfrm>
+            <a:off x="1234440" y="1051560"/>
+            <a:ext cx="7132320" cy="274320"/>
+          </a:xfrm>
+          <a:prstGeom prst="rect">
+            <a:avLst/>
+          </a:prstGeom>
+          <a:noFill/>
+          <a:ln/>
+        </p:spPr>
+        <p:txBody>
+          <a:bodyPr wrap="square" lIns="0" tIns="0" rIns="0" bIns="0" rtlCol="0" anchor="ctr"/>
+          <a:lstStyle/>
+          <a:p>
+            <a:pPr indent="0" marL="0">
+              <a:buNone/>
+            </a:pPr>
+            <a:r>
+              <a:rPr lang="en-US" sz="1500" b="1" dirty="0">
+                <a:solidFill>
+                  <a:srgbClr val="1B2A4A"/>
+                </a:solidFill>
+                <a:latin typeface="Arial" pitchFamily="34" charset="0"/>
+                <a:ea typeface="Arial" pitchFamily="34" charset="-122"/>
+                <a:cs typeface="Arial" pitchFamily="34" charset="-120"/>
+              </a:rPr>
+              <a:t>Sovereign Productive Base</a:t>
+            </a:r>
+            <a:endParaRPr lang="en-US" sz="1500" dirty="0"/>
+          </a:p>
+        </p:txBody>
+      </p:sp>
+      <p:sp>
+        <p:nvSpPr>
+          <p:cNvPr id="7" name="Text 5"/>
+          <p:cNvSpPr/>
+          <p:nvPr/>
+        </p:nvSpPr>
+        <p:spPr>
+          <a:xfrm>
+            <a:off x="1234440" y="1344168"/>
             <a:ext cx="7132320" cy="320040"/>
           </a:xfrm>
           <a:prstGeom prst="rect">
@@ -4000,29 +4429,107 @@
               <a:buNone/>
             </a:pPr>
             <a:r>
-              <a:rPr lang="en-US" sz="1600" b="1" dirty="0">
-                <a:solidFill>
-                  <a:srgbClr val="1A1A1A"/>
-                </a:solidFill>
-                <a:latin typeface="Arial" pitchFamily="34" charset="0"/>
-                <a:ea typeface="Arial" pitchFamily="34" charset="-122"/>
-                <a:cs typeface="Arial" pitchFamily="34" charset="-120"/>
-              </a:rPr>
-              <a:t>Sovereign Productive Base</a:t>
-            </a:r>
-            <a:endParaRPr lang="en-US" sz="1600" dirty="0"/>
-          </a:p>
-        </p:txBody>
-      </p:sp>
-      <p:sp>
-        <p:nvSpPr>
-          <p:cNvPr id="6" name="Text 4"/>
-          <p:cNvSpPr/>
-          <p:nvPr/>
-        </p:nvSpPr>
-        <p:spPr>
-          <a:xfrm>
-            <a:off x="1280160" y="1508760"/>
+              <a:rPr lang="en-US" sz="1300" dirty="0">
+                <a:solidFill>
+                  <a:srgbClr val="2A2A2A"/>
+                </a:solidFill>
+                <a:latin typeface="Arial" pitchFamily="34" charset="0"/>
+                <a:ea typeface="Arial" pitchFamily="34" charset="-122"/>
+                <a:cs typeface="Arial" pitchFamily="34" charset="-120"/>
+              </a:rPr>
+              <a:t>Build and control critical capabilities inside the United States</a:t>
+            </a:r>
+            <a:endParaRPr lang="en-US" sz="1300" dirty="0"/>
+          </a:p>
+        </p:txBody>
+      </p:sp>
+      <p:sp>
+        <p:nvSpPr>
+          <p:cNvPr id="8" name="Text 6"/>
+          <p:cNvSpPr/>
+          <p:nvPr/>
+        </p:nvSpPr>
+        <p:spPr>
+          <a:xfrm>
+            <a:off x="457200" y="1965960"/>
+            <a:ext cx="640080" cy="365760"/>
+          </a:xfrm>
+          <a:prstGeom prst="rect">
+            <a:avLst/>
+          </a:prstGeom>
+          <a:noFill/>
+          <a:ln/>
+        </p:spPr>
+        <p:txBody>
+          <a:bodyPr wrap="square" lIns="0" tIns="0" rIns="0" bIns="0" rtlCol="0" anchor="ctr"/>
+          <a:lstStyle/>
+          <a:p>
+            <a:pPr indent="0" marL="0">
+              <a:buNone/>
+            </a:pPr>
+            <a:r>
+              <a:rPr lang="en-US" sz="1800" b="1" dirty="0">
+                <a:solidFill>
+                  <a:srgbClr val="C9A227"/>
+                </a:solidFill>
+                <a:latin typeface="Arial" pitchFamily="34" charset="0"/>
+                <a:ea typeface="Arial" pitchFamily="34" charset="-122"/>
+                <a:cs typeface="Arial" pitchFamily="34" charset="-120"/>
+              </a:rPr>
+              <a:t>02</a:t>
+            </a:r>
+            <a:endParaRPr lang="en-US" sz="1800" dirty="0"/>
+          </a:p>
+        </p:txBody>
+      </p:sp>
+      <p:sp>
+        <p:nvSpPr>
+          <p:cNvPr id="9" name="Text 7"/>
+          <p:cNvSpPr/>
+          <p:nvPr/>
+        </p:nvSpPr>
+        <p:spPr>
+          <a:xfrm>
+            <a:off x="1234440" y="1874520"/>
+            <a:ext cx="7132320" cy="274320"/>
+          </a:xfrm>
+          <a:prstGeom prst="rect">
+            <a:avLst/>
+          </a:prstGeom>
+          <a:noFill/>
+          <a:ln/>
+        </p:spPr>
+        <p:txBody>
+          <a:bodyPr wrap="square" lIns="0" tIns="0" rIns="0" bIns="0" rtlCol="0" anchor="ctr"/>
+          <a:lstStyle/>
+          <a:p>
+            <a:pPr indent="0" marL="0">
+              <a:buNone/>
+            </a:pPr>
+            <a:r>
+              <a:rPr lang="en-US" sz="1500" b="1" dirty="0">
+                <a:solidFill>
+                  <a:srgbClr val="1B2A4A"/>
+                </a:solidFill>
+                <a:latin typeface="Arial" pitchFamily="34" charset="0"/>
+                <a:ea typeface="Arial" pitchFamily="34" charset="-122"/>
+                <a:cs typeface="Arial" pitchFamily="34" charset="-120"/>
+              </a:rPr>
+              <a:t>Merit &amp; Capability</a:t>
+            </a:r>
+            <a:endParaRPr lang="en-US" sz="1500" dirty="0"/>
+          </a:p>
+        </p:txBody>
+      </p:sp>
+      <p:sp>
+        <p:nvSpPr>
+          <p:cNvPr id="10" name="Text 8"/>
+          <p:cNvSpPr/>
+          <p:nvPr/>
+        </p:nvSpPr>
+        <p:spPr>
+          <a:xfrm>
+            <a:off x="1234440" y="2167128"/>
             <a:ext cx="7132320" cy="320040"/>
           </a:xfrm>
           <a:prstGeom prst="rect">
@@ -4041,13 +4548,13 @@
             <a:r>
               <a:rPr lang="en-US" sz="1300" dirty="0">
                 <a:solidFill>
-                  <a:srgbClr val="555555"/>
-                </a:solidFill>
-                <a:latin typeface="Arial" pitchFamily="34" charset="0"/>
-                <a:ea typeface="Arial" pitchFamily="34" charset="-122"/>
-                <a:cs typeface="Arial" pitchFamily="34" charset="-120"/>
-              </a:rPr>
-              <a:t>Build and control critical capabilities inside the United States</a:t>
+                  <a:srgbClr val="2A2A2A"/>
+                </a:solidFill>
+                <a:latin typeface="Arial" pitchFamily="34" charset="0"/>
+                <a:ea typeface="Arial" pitchFamily="34" charset="-122"/>
+                <a:cs typeface="Arial" pitchFamily="34" charset="-120"/>
+              </a:rPr>
+              <a:t>Develop real skill among American citizens with long-term stake</a:t>
             </a:r>
             <a:endParaRPr lang="en-US" sz="1300" dirty="0"/>
           </a:p>
@@ -4055,52 +4562,91 @@
       </p:sp>
       <p:sp>
         <p:nvSpPr>
-          <p:cNvPr id="7" name="Text 5"/>
-          <p:cNvSpPr/>
-          <p:nvPr/>
-        </p:nvSpPr>
-        <p:spPr>
-          <a:xfrm>
-            <a:off x="457200" y="2011680"/>
-            <a:ext cx="640080" cy="640080"/>
-          </a:xfrm>
-          <a:prstGeom prst="rect">
-            <a:avLst/>
-          </a:prstGeom>
-          <a:noFill/>
-          <a:ln/>
-        </p:spPr>
-        <p:txBody>
-          <a:bodyPr wrap="square" lIns="0" tIns="0" rIns="0" bIns="0" rtlCol="0" anchor="ctr"/>
-          <a:lstStyle/>
-          <a:p>
-            <a:pPr indent="0" marL="0">
-              <a:buNone/>
-            </a:pPr>
-            <a:r>
-              <a:rPr lang="en-US" sz="2000" b="1" dirty="0">
-                <a:solidFill>
-                  <a:srgbClr val="555555"/>
-                </a:solidFill>
-                <a:latin typeface="Arial" pitchFamily="34" charset="0"/>
-                <a:ea typeface="Arial" pitchFamily="34" charset="-122"/>
-                <a:cs typeface="Arial" pitchFamily="34" charset="-120"/>
-              </a:rPr>
-              <a:t>02</a:t>
-            </a:r>
-            <a:endParaRPr lang="en-US" sz="2000" dirty="0"/>
-          </a:p>
-        </p:txBody>
-      </p:sp>
-      <p:sp>
-        <p:nvSpPr>
-          <p:cNvPr id="8" name="Text 6"/>
-          <p:cNvSpPr/>
-          <p:nvPr/>
-        </p:nvSpPr>
-        <p:spPr>
-          <a:xfrm>
-            <a:off x="1280160" y="2011680"/>
+          <p:cNvPr id="11" name="Text 9"/>
+          <p:cNvSpPr/>
+          <p:nvPr/>
+        </p:nvSpPr>
+        <p:spPr>
+          <a:xfrm>
+            <a:off x="457200" y="2788920"/>
+            <a:ext cx="640080" cy="365760"/>
+          </a:xfrm>
+          <a:prstGeom prst="rect">
+            <a:avLst/>
+          </a:prstGeom>
+          <a:noFill/>
+          <a:ln/>
+        </p:spPr>
+        <p:txBody>
+          <a:bodyPr wrap="square" lIns="0" tIns="0" rIns="0" bIns="0" rtlCol="0" anchor="ctr"/>
+          <a:lstStyle/>
+          <a:p>
+            <a:pPr indent="0" marL="0">
+              <a:buNone/>
+            </a:pPr>
+            <a:r>
+              <a:rPr lang="en-US" sz="1800" b="1" dirty="0">
+                <a:solidFill>
+                  <a:srgbClr val="C9A227"/>
+                </a:solidFill>
+                <a:latin typeface="Arial" pitchFamily="34" charset="0"/>
+                <a:ea typeface="Arial" pitchFamily="34" charset="-122"/>
+                <a:cs typeface="Arial" pitchFamily="34" charset="-120"/>
+              </a:rPr>
+              <a:t>03</a:t>
+            </a:r>
+            <a:endParaRPr lang="en-US" sz="1800" dirty="0"/>
+          </a:p>
+        </p:txBody>
+      </p:sp>
+      <p:sp>
+        <p:nvSpPr>
+          <p:cNvPr id="12" name="Text 10"/>
+          <p:cNvSpPr/>
+          <p:nvPr/>
+        </p:nvSpPr>
+        <p:spPr>
+          <a:xfrm>
+            <a:off x="1234440" y="2697480"/>
+            <a:ext cx="7132320" cy="274320"/>
+          </a:xfrm>
+          <a:prstGeom prst="rect">
+            <a:avLst/>
+          </a:prstGeom>
+          <a:noFill/>
+          <a:ln/>
+        </p:spPr>
+        <p:txBody>
+          <a:bodyPr wrap="square" lIns="0" tIns="0" rIns="0" bIns="0" rtlCol="0" anchor="ctr"/>
+          <a:lstStyle/>
+          <a:p>
+            <a:pPr indent="0" marL="0">
+              <a:buNone/>
+            </a:pPr>
+            <a:r>
+              <a:rPr lang="en-US" sz="1500" b="1" dirty="0">
+                <a:solidFill>
+                  <a:srgbClr val="1B2A4A"/>
+                </a:solidFill>
+                <a:latin typeface="Arial" pitchFamily="34" charset="0"/>
+                <a:ea typeface="Arial" pitchFamily="34" charset="-122"/>
+                <a:cs typeface="Arial" pitchFamily="34" charset="-120"/>
+              </a:rPr>
+              <a:t>Directed Improvement</a:t>
+            </a:r>
+            <a:endParaRPr lang="en-US" sz="1500" dirty="0"/>
+          </a:p>
+        </p:txBody>
+      </p:sp>
+      <p:sp>
+        <p:nvSpPr>
+          <p:cNvPr id="13" name="Text 11"/>
+          <p:cNvSpPr/>
+          <p:nvPr/>
+        </p:nvSpPr>
+        <p:spPr>
+          <a:xfrm>
+            <a:off x="1234440" y="2990088"/>
             <a:ext cx="7132320" cy="320040"/>
           </a:xfrm>
           <a:prstGeom prst="rect">
@@ -4117,29 +4663,107 @@
               <a:buNone/>
             </a:pPr>
             <a:r>
-              <a:rPr lang="en-US" sz="1600" b="1" dirty="0">
-                <a:solidFill>
-                  <a:srgbClr val="1A1A1A"/>
-                </a:solidFill>
-                <a:latin typeface="Arial" pitchFamily="34" charset="0"/>
-                <a:ea typeface="Arial" pitchFamily="34" charset="-122"/>
-                <a:cs typeface="Arial" pitchFamily="34" charset="-120"/>
-              </a:rPr>
-              <a:t>Merit &amp; Capability</a:t>
-            </a:r>
-            <a:endParaRPr lang="en-US" sz="1600" dirty="0"/>
-          </a:p>
-        </p:txBody>
-      </p:sp>
-      <p:sp>
-        <p:nvSpPr>
-          <p:cNvPr id="9" name="Text 7"/>
-          <p:cNvSpPr/>
-          <p:nvPr/>
-        </p:nvSpPr>
-        <p:spPr>
-          <a:xfrm>
-            <a:off x="1280160" y="2331720"/>
+              <a:rPr lang="en-US" sz="1300" dirty="0">
+                <a:solidFill>
+                  <a:srgbClr val="2A2A2A"/>
+                </a:solidFill>
+                <a:latin typeface="Arial" pitchFamily="34" charset="0"/>
+                <a:ea typeface="Arial" pitchFamily="34" charset="-122"/>
+                <a:cs typeface="Arial" pitchFamily="34" charset="-120"/>
+              </a:rPr>
+              <a:t>Capital flows toward domestic capacity, not temporary labor extraction</a:t>
+            </a:r>
+            <a:endParaRPr lang="en-US" sz="1300" dirty="0"/>
+          </a:p>
+        </p:txBody>
+      </p:sp>
+      <p:sp>
+        <p:nvSpPr>
+          <p:cNvPr id="14" name="Text 12"/>
+          <p:cNvSpPr/>
+          <p:nvPr/>
+        </p:nvSpPr>
+        <p:spPr>
+          <a:xfrm>
+            <a:off x="457200" y="3611880"/>
+            <a:ext cx="640080" cy="365760"/>
+          </a:xfrm>
+          <a:prstGeom prst="rect">
+            <a:avLst/>
+          </a:prstGeom>
+          <a:noFill/>
+          <a:ln/>
+        </p:spPr>
+        <p:txBody>
+          <a:bodyPr wrap="square" lIns="0" tIns="0" rIns="0" bIns="0" rtlCol="0" anchor="ctr"/>
+          <a:lstStyle/>
+          <a:p>
+            <a:pPr indent="0" marL="0">
+              <a:buNone/>
+            </a:pPr>
+            <a:r>
+              <a:rPr lang="en-US" sz="1800" b="1" dirty="0">
+                <a:solidFill>
+                  <a:srgbClr val="C9A227"/>
+                </a:solidFill>
+                <a:latin typeface="Arial" pitchFamily="34" charset="0"/>
+                <a:ea typeface="Arial" pitchFamily="34" charset="-122"/>
+                <a:cs typeface="Arial" pitchFamily="34" charset="-120"/>
+              </a:rPr>
+              <a:t>04</a:t>
+            </a:r>
+            <a:endParaRPr lang="en-US" sz="1800" dirty="0"/>
+          </a:p>
+        </p:txBody>
+      </p:sp>
+      <p:sp>
+        <p:nvSpPr>
+          <p:cNvPr id="15" name="Text 13"/>
+          <p:cNvSpPr/>
+          <p:nvPr/>
+        </p:nvSpPr>
+        <p:spPr>
+          <a:xfrm>
+            <a:off x="1234440" y="3520440"/>
+            <a:ext cx="7132320" cy="274320"/>
+          </a:xfrm>
+          <a:prstGeom prst="rect">
+            <a:avLst/>
+          </a:prstGeom>
+          <a:noFill/>
+          <a:ln/>
+        </p:spPr>
+        <p:txBody>
+          <a:bodyPr wrap="square" lIns="0" tIns="0" rIns="0" bIns="0" rtlCol="0" anchor="ctr"/>
+          <a:lstStyle/>
+          <a:p>
+            <a:pPr indent="0" marL="0">
+              <a:buNone/>
+            </a:pPr>
+            <a:r>
+              <a:rPr lang="en-US" sz="1500" b="1" dirty="0">
+                <a:solidFill>
+                  <a:srgbClr val="1B2A4A"/>
+                </a:solidFill>
+                <a:latin typeface="Arial" pitchFamily="34" charset="0"/>
+                <a:ea typeface="Arial" pitchFamily="34" charset="-122"/>
+                <a:cs typeface="Arial" pitchFamily="34" charset="-120"/>
+              </a:rPr>
+              <a:t>People, Process, Place</a:t>
+            </a:r>
+            <a:endParaRPr lang="en-US" sz="1500" dirty="0"/>
+          </a:p>
+        </p:txBody>
+      </p:sp>
+      <p:sp>
+        <p:nvSpPr>
+          <p:cNvPr id="16" name="Text 14"/>
+          <p:cNvSpPr/>
+          <p:nvPr/>
+        </p:nvSpPr>
+        <p:spPr>
+          <a:xfrm>
+            <a:off x="1234440" y="3813048"/>
             <a:ext cx="7132320" cy="320040"/>
           </a:xfrm>
           <a:prstGeom prst="rect">
@@ -4158,13 +4782,13 @@
             <a:r>
               <a:rPr lang="en-US" sz="1300" dirty="0">
                 <a:solidFill>
-                  <a:srgbClr val="555555"/>
-                </a:solidFill>
-                <a:latin typeface="Arial" pitchFamily="34" charset="0"/>
-                <a:ea typeface="Arial" pitchFamily="34" charset="-122"/>
-                <a:cs typeface="Arial" pitchFamily="34" charset="-120"/>
-              </a:rPr>
-              <a:t>Develop real skill among American citizens with long-term stake</a:t>
+                  <a:srgbClr val="2A2A2A"/>
+                </a:solidFill>
+                <a:latin typeface="Arial" pitchFamily="34" charset="0"/>
+                <a:ea typeface="Arial" pitchFamily="34" charset="-122"/>
+                <a:cs typeface="Arial" pitchFamily="34" charset="-120"/>
+              </a:rPr>
+              <a:t>High-capability American workers + advanced processes + domestic locations</a:t>
             </a:r>
             <a:endParaRPr lang="en-US" sz="1300" dirty="0"/>
           </a:p>
@@ -4172,266 +4796,32 @@
       </p:sp>
       <p:sp>
         <p:nvSpPr>
-          <p:cNvPr id="10" name="Text 8"/>
-          <p:cNvSpPr/>
-          <p:nvPr/>
-        </p:nvSpPr>
-        <p:spPr>
-          <a:xfrm>
-            <a:off x="457200" y="2834640"/>
-            <a:ext cx="640080" cy="640080"/>
-          </a:xfrm>
-          <a:prstGeom prst="rect">
-            <a:avLst/>
-          </a:prstGeom>
-          <a:noFill/>
-          <a:ln/>
-        </p:spPr>
-        <p:txBody>
-          <a:bodyPr wrap="square" lIns="0" tIns="0" rIns="0" bIns="0" rtlCol="0" anchor="ctr"/>
-          <a:lstStyle/>
-          <a:p>
-            <a:pPr indent="0" marL="0">
-              <a:buNone/>
-            </a:pPr>
-            <a:r>
-              <a:rPr lang="en-US" sz="2000" b="1" dirty="0">
-                <a:solidFill>
-                  <a:srgbClr val="555555"/>
-                </a:solidFill>
-                <a:latin typeface="Arial" pitchFamily="34" charset="0"/>
-                <a:ea typeface="Arial" pitchFamily="34" charset="-122"/>
-                <a:cs typeface="Arial" pitchFamily="34" charset="-120"/>
-              </a:rPr>
-              <a:t>03</a:t>
-            </a:r>
-            <a:endParaRPr lang="en-US" sz="2000" dirty="0"/>
-          </a:p>
-        </p:txBody>
-      </p:sp>
-      <p:sp>
-        <p:nvSpPr>
-          <p:cNvPr id="11" name="Text 9"/>
-          <p:cNvSpPr/>
-          <p:nvPr/>
-        </p:nvSpPr>
-        <p:spPr>
-          <a:xfrm>
-            <a:off x="1280160" y="2834640"/>
-            <a:ext cx="7132320" cy="320040"/>
-          </a:xfrm>
-          <a:prstGeom prst="rect">
-            <a:avLst/>
-          </a:prstGeom>
-          <a:noFill/>
-          <a:ln/>
-        </p:spPr>
-        <p:txBody>
-          <a:bodyPr wrap="square" lIns="0" tIns="0" rIns="0" bIns="0" rtlCol="0" anchor="ctr"/>
-          <a:lstStyle/>
-          <a:p>
-            <a:pPr indent="0" marL="0">
-              <a:buNone/>
-            </a:pPr>
-            <a:r>
-              <a:rPr lang="en-US" sz="1600" b="1" dirty="0">
-                <a:solidFill>
-                  <a:srgbClr val="1A1A1A"/>
-                </a:solidFill>
-                <a:latin typeface="Arial" pitchFamily="34" charset="0"/>
-                <a:ea typeface="Arial" pitchFamily="34" charset="-122"/>
-                <a:cs typeface="Arial" pitchFamily="34" charset="-120"/>
-              </a:rPr>
-              <a:t>Directed Improvement</a:t>
-            </a:r>
-            <a:endParaRPr lang="en-US" sz="1600" dirty="0"/>
-          </a:p>
-        </p:txBody>
-      </p:sp>
-      <p:sp>
-        <p:nvSpPr>
-          <p:cNvPr id="12" name="Text 10"/>
-          <p:cNvSpPr/>
-          <p:nvPr/>
-        </p:nvSpPr>
-        <p:spPr>
-          <a:xfrm>
-            <a:off x="1280160" y="3154680"/>
-            <a:ext cx="7132320" cy="320040"/>
-          </a:xfrm>
-          <a:prstGeom prst="rect">
-            <a:avLst/>
-          </a:prstGeom>
-          <a:noFill/>
-          <a:ln/>
-        </p:spPr>
-        <p:txBody>
-          <a:bodyPr wrap="square" lIns="0" tIns="0" rIns="0" bIns="0" rtlCol="0" anchor="ctr"/>
-          <a:lstStyle/>
-          <a:p>
-            <a:pPr indent="0" marL="0">
-              <a:buNone/>
-            </a:pPr>
-            <a:r>
-              <a:rPr lang="en-US" sz="1300" dirty="0">
-                <a:solidFill>
-                  <a:srgbClr val="555555"/>
-                </a:solidFill>
-                <a:latin typeface="Arial" pitchFamily="34" charset="0"/>
-                <a:ea typeface="Arial" pitchFamily="34" charset="-122"/>
-                <a:cs typeface="Arial" pitchFamily="34" charset="-120"/>
-              </a:rPr>
-              <a:t>Capital flows toward domestic capacity, not temporary labor extraction</a:t>
-            </a:r>
-            <a:endParaRPr lang="en-US" sz="1300" dirty="0"/>
-          </a:p>
-        </p:txBody>
-      </p:sp>
-      <p:sp>
-        <p:nvSpPr>
-          <p:cNvPr id="13" name="Text 11"/>
-          <p:cNvSpPr/>
-          <p:nvPr/>
-        </p:nvSpPr>
-        <p:spPr>
-          <a:xfrm>
-            <a:off x="457200" y="3657600"/>
-            <a:ext cx="640080" cy="640080"/>
-          </a:xfrm>
-          <a:prstGeom prst="rect">
-            <a:avLst/>
-          </a:prstGeom>
-          <a:noFill/>
-          <a:ln/>
-        </p:spPr>
-        <p:txBody>
-          <a:bodyPr wrap="square" lIns="0" tIns="0" rIns="0" bIns="0" rtlCol="0" anchor="ctr"/>
-          <a:lstStyle/>
-          <a:p>
-            <a:pPr indent="0" marL="0">
-              <a:buNone/>
-            </a:pPr>
-            <a:r>
-              <a:rPr lang="en-US" sz="2000" b="1" dirty="0">
-                <a:solidFill>
-                  <a:srgbClr val="555555"/>
-                </a:solidFill>
-                <a:latin typeface="Arial" pitchFamily="34" charset="0"/>
-                <a:ea typeface="Arial" pitchFamily="34" charset="-122"/>
-                <a:cs typeface="Arial" pitchFamily="34" charset="-120"/>
-              </a:rPr>
-              <a:t>04</a:t>
-            </a:r>
-            <a:endParaRPr lang="en-US" sz="2000" dirty="0"/>
-          </a:p>
-        </p:txBody>
-      </p:sp>
-      <p:sp>
-        <p:nvSpPr>
-          <p:cNvPr id="14" name="Text 12"/>
-          <p:cNvSpPr/>
-          <p:nvPr/>
-        </p:nvSpPr>
-        <p:spPr>
-          <a:xfrm>
-            <a:off x="1280160" y="3657600"/>
-            <a:ext cx="7132320" cy="320040"/>
-          </a:xfrm>
-          <a:prstGeom prst="rect">
-            <a:avLst/>
-          </a:prstGeom>
-          <a:noFill/>
-          <a:ln/>
-        </p:spPr>
-        <p:txBody>
-          <a:bodyPr wrap="square" lIns="0" tIns="0" rIns="0" bIns="0" rtlCol="0" anchor="ctr"/>
-          <a:lstStyle/>
-          <a:p>
-            <a:pPr indent="0" marL="0">
-              <a:buNone/>
-            </a:pPr>
-            <a:r>
-              <a:rPr lang="en-US" sz="1600" b="1" dirty="0">
-                <a:solidFill>
-                  <a:srgbClr val="1A1A1A"/>
-                </a:solidFill>
-                <a:latin typeface="Arial" pitchFamily="34" charset="0"/>
-                <a:ea typeface="Arial" pitchFamily="34" charset="-122"/>
-                <a:cs typeface="Arial" pitchFamily="34" charset="-120"/>
-              </a:rPr>
-              <a:t>People, Process, Place</a:t>
-            </a:r>
-            <a:endParaRPr lang="en-US" sz="1600" dirty="0"/>
-          </a:p>
-        </p:txBody>
-      </p:sp>
-      <p:sp>
-        <p:nvSpPr>
-          <p:cNvPr id="15" name="Text 13"/>
-          <p:cNvSpPr/>
-          <p:nvPr/>
-        </p:nvSpPr>
-        <p:spPr>
-          <a:xfrm>
-            <a:off x="1280160" y="3977640"/>
-            <a:ext cx="7132320" cy="320040"/>
-          </a:xfrm>
-          <a:prstGeom prst="rect">
-            <a:avLst/>
-          </a:prstGeom>
-          <a:noFill/>
-          <a:ln/>
-        </p:spPr>
-        <p:txBody>
-          <a:bodyPr wrap="square" lIns="0" tIns="0" rIns="0" bIns="0" rtlCol="0" anchor="ctr"/>
-          <a:lstStyle/>
-          <a:p>
-            <a:pPr indent="0" marL="0">
-              <a:buNone/>
-            </a:pPr>
-            <a:r>
-              <a:rPr lang="en-US" sz="1300" dirty="0">
-                <a:solidFill>
-                  <a:srgbClr val="555555"/>
-                </a:solidFill>
-                <a:latin typeface="Arial" pitchFamily="34" charset="0"/>
-                <a:ea typeface="Arial" pitchFamily="34" charset="-122"/>
-                <a:cs typeface="Arial" pitchFamily="34" charset="-120"/>
-              </a:rPr>
-              <a:t>High-capability American workers + advanced processes + domestic locations</a:t>
-            </a:r>
-            <a:endParaRPr lang="en-US" sz="1300" dirty="0"/>
-          </a:p>
-        </p:txBody>
-      </p:sp>
-      <p:sp>
-        <p:nvSpPr>
-          <p:cNvPr id="16" name="Text 14"/>
+          <p:cNvPr id="17" name="Text 15"/>
           <p:cNvSpPr/>
           <p:nvPr/>
         </p:nvSpPr>
         <p:spPr>
           <a:xfrm>
             <a:off x="457200" y="4800600"/>
-            <a:ext cx="5943600" cy="228600"/>
-          </a:xfrm>
-          <a:prstGeom prst="rect">
-            <a:avLst/>
-          </a:prstGeom>
-          <a:noFill/>
-          <a:ln/>
-        </p:spPr>
-        <p:txBody>
-          <a:bodyPr wrap="square" lIns="0" tIns="0" rIns="0" bIns="0" rtlCol="0" anchor="ctr"/>
-          <a:lstStyle/>
-          <a:p>
-            <a:pPr indent="0" marL="0">
-              <a:buNone/>
-            </a:pPr>
-            <a:r>
-              <a:rPr lang="en-US" sz="1000" dirty="0">
-                <a:solidFill>
-                  <a:srgbClr val="555555"/>
+            <a:ext cx="5943600" cy="256032"/>
+          </a:xfrm>
+          <a:prstGeom prst="rect">
+            <a:avLst/>
+          </a:prstGeom>
+          <a:noFill/>
+          <a:ln/>
+        </p:spPr>
+        <p:txBody>
+          <a:bodyPr wrap="square" lIns="0" tIns="0" rIns="0" bIns="0" rtlCol="0" anchor="ctr"/>
+          <a:lstStyle/>
+          <a:p>
+            <a:pPr indent="0" marL="0">
+              <a:buNone/>
+            </a:pPr>
+            <a:r>
+              <a:rPr lang="en-US" sz="1100" dirty="0">
+                <a:solidFill>
+                  <a:srgbClr val="6A6A6A"/>
                 </a:solidFill>
                 <a:latin typeface="Arial" pitchFamily="34" charset="0"/>
                 <a:ea typeface="Arial" pitchFamily="34" charset="-122"/>
@@ -4439,20 +4829,20 @@
               </a:rPr>
               <a:t>Joshua Konkle  |  Chief of Staff Strategist</a:t>
             </a:r>
-            <a:endParaRPr lang="en-US" sz="1000" dirty="0"/>
-          </a:p>
-        </p:txBody>
-      </p:sp>
-      <p:sp>
-        <p:nvSpPr>
-          <p:cNvPr id="17" name="Text 15"/>
-          <p:cNvSpPr/>
-          <p:nvPr/>
-        </p:nvSpPr>
-        <p:spPr>
-          <a:xfrm>
-            <a:off x="7772400" y="4800600"/>
-            <a:ext cx="914400" cy="228600"/>
+            <a:endParaRPr lang="en-US" sz="1100" dirty="0"/>
+          </a:p>
+        </p:txBody>
+      </p:sp>
+      <p:sp>
+        <p:nvSpPr>
+          <p:cNvPr id="18" name="Text 16"/>
+          <p:cNvSpPr/>
+          <p:nvPr/>
+        </p:nvSpPr>
+        <p:spPr>
+          <a:xfrm>
+            <a:off x="7498080" y="4800600"/>
+            <a:ext cx="1188720" cy="256032"/>
           </a:xfrm>
           <a:prstGeom prst="rect">
             <a:avLst/>
@@ -4468,9 +4858,9 @@
               <a:buNone/>
             </a:pPr>
             <a:r>
-              <a:rPr lang="en-US" sz="1000" dirty="0">
-                <a:solidFill>
-                  <a:srgbClr val="555555"/>
+              <a:rPr lang="en-US" sz="1100" dirty="0">
+                <a:solidFill>
+                  <a:srgbClr val="6A6A6A"/>
                 </a:solidFill>
                 <a:latin typeface="Arial" pitchFamily="34" charset="0"/>
                 <a:ea typeface="Arial" pitchFamily="34" charset="-122"/>
@@ -4478,7 +4868,7 @@
               </a:rPr>
               <a:t>4 / 11</a:t>
             </a:r>
-            <a:endParaRPr lang="en-US" sz="1000" dirty="0"/>
+            <a:endParaRPr lang="en-US" sz="1100" dirty="0"/>
           </a:p>
         </p:txBody>
       </p:sp>
@@ -4493,13 +4883,6 @@
 <file path=ppt/slides/slide5.xml><?xml version="1.0" encoding="utf-8"?>
 <p:sld xmlns:a="http://schemas.openxmlformats.org/drawingml/2006/main" xmlns:r="http://schemas.openxmlformats.org/officeDocument/2006/relationships" xmlns:p="http://schemas.openxmlformats.org/presentationml/2006/main">
   <p:cSld name="Slide 5">
-    <p:bg>
-      <p:bgPr>
-        <a:solidFill>
-          <a:srgbClr val="FFFFFF"/>
-        </a:solidFill>
-      </p:bgPr>
-    </p:bg>
     <p:spTree>
       <p:nvGrpSpPr>
         <p:cNvPr id="1" name=""/>
@@ -4516,32 +4899,57 @@
       </p:grpSpPr>
       <p:sp>
         <p:nvSpPr>
-          <p:cNvPr id="2" name="Text 0"/>
-          <p:cNvSpPr/>
-          <p:nvPr/>
-        </p:nvSpPr>
-        <p:spPr>
-          <a:xfrm>
-            <a:off x="457200" y="274320"/>
-            <a:ext cx="8229600" cy="411480"/>
-          </a:xfrm>
-          <a:prstGeom prst="rect">
-            <a:avLst/>
-          </a:prstGeom>
-          <a:noFill/>
-          <a:ln/>
-        </p:spPr>
-        <p:txBody>
-          <a:bodyPr wrap="square" lIns="0" tIns="0" rIns="0" bIns="0" rtlCol="0" anchor="ctr"/>
-          <a:lstStyle/>
-          <a:p>
-            <a:pPr indent="0" marL="0">
-              <a:buNone/>
-            </a:pPr>
-            <a:r>
-              <a:rPr lang="en-US" sz="2600" b="1" dirty="0">
-                <a:solidFill>
-                  <a:srgbClr val="1A1A1A"/>
+          <p:cNvPr id="2" name="Shape 0"/>
+          <p:cNvSpPr/>
+          <p:nvPr/>
+        </p:nvSpPr>
+        <p:spPr>
+          <a:xfrm>
+            <a:off x="0" y="0"/>
+            <a:ext cx="9144000" cy="5143500"/>
+          </a:xfrm>
+          <a:prstGeom prst="rect">
+            <a:avLst/>
+          </a:prstGeom>
+          <a:solidFill>
+            <a:srgbClr val="FFFFFF"/>
+          </a:solidFill>
+          <a:ln w="12700">
+            <a:solidFill>
+              <a:srgbClr val="FFFFFF"/>
+            </a:solidFill>
+            <a:prstDash val="solid"/>
+          </a:ln>
+        </p:spPr>
+      </p:sp>
+      <p:sp>
+        <p:nvSpPr>
+          <p:cNvPr id="3" name="Text 1"/>
+          <p:cNvSpPr/>
+          <p:nvPr/>
+        </p:nvSpPr>
+        <p:spPr>
+          <a:xfrm>
+            <a:off x="457200" y="228600"/>
+            <a:ext cx="8229600" cy="365760"/>
+          </a:xfrm>
+          <a:prstGeom prst="rect">
+            <a:avLst/>
+          </a:prstGeom>
+          <a:noFill/>
+          <a:ln/>
+        </p:spPr>
+        <p:txBody>
+          <a:bodyPr wrap="square" lIns="0" tIns="0" rIns="0" bIns="0" rtlCol="0" anchor="ctr"/>
+          <a:lstStyle/>
+          <a:p>
+            <a:pPr indent="0" marL="0">
+              <a:buNone/>
+            </a:pPr>
+            <a:r>
+              <a:rPr lang="en-US" sz="2200" b="1" dirty="0">
+                <a:solidFill>
+                  <a:srgbClr val="1B2A4A"/>
                 </a:solidFill>
                 <a:latin typeface="Arial" pitchFamily="34" charset="0"/>
                 <a:ea typeface="Arial" pitchFamily="34" charset="-122"/>
@@ -4549,20 +4957,47 @@
               </a:rPr>
               <a:t>Workforce Pipelines Under Pressure</a:t>
             </a:r>
-            <a:endParaRPr lang="en-US" sz="2600" dirty="0"/>
-          </a:p>
-        </p:txBody>
-      </p:sp>
-      <p:sp>
-        <p:nvSpPr>
-          <p:cNvPr id="3" name="Text 1"/>
+            <a:endParaRPr lang="en-US" sz="2200" dirty="0"/>
+          </a:p>
+        </p:txBody>
+      </p:sp>
+      <p:sp>
+        <p:nvSpPr>
+          <p:cNvPr id="4" name="Shape 2"/>
           <p:cNvSpPr/>
           <p:nvPr/>
         </p:nvSpPr>
         <p:spPr>
           <a:xfrm>
             <a:off x="457200" y="777240"/>
-            <a:ext cx="8229600" cy="640080"/>
+            <a:ext cx="8229600" cy="960120"/>
+          </a:xfrm>
+          <a:prstGeom prst="roundRect">
+            <a:avLst>
+              <a:gd name="adj" fmla="val 5714"/>
+            </a:avLst>
+          </a:prstGeom>
+          <a:solidFill>
+            <a:srgbClr val="1B2A4A"/>
+          </a:solidFill>
+          <a:ln w="12700">
+            <a:solidFill>
+              <a:srgbClr val="1B2A4A"/>
+            </a:solidFill>
+            <a:prstDash val="solid"/>
+          </a:ln>
+        </p:spPr>
+      </p:sp>
+      <p:sp>
+        <p:nvSpPr>
+          <p:cNvPr id="5" name="Text 3"/>
+          <p:cNvSpPr/>
+          <p:nvPr/>
+        </p:nvSpPr>
+        <p:spPr>
+          <a:xfrm>
+            <a:off x="640080" y="868680"/>
+            <a:ext cx="7863840" cy="777240"/>
           </a:xfrm>
           <a:prstGeom prst="rect">
             <a:avLst/>
@@ -4580,7 +5015,7 @@
             <a:r>
               <a:rPr lang="en-US" sz="1300" dirty="0">
                 <a:solidFill>
-                  <a:srgbClr val="555555"/>
+                  <a:srgbClr val="FFFFFF"/>
                 </a:solidFill>
                 <a:latin typeface="Arial" pitchFamily="34" charset="0"/>
                 <a:ea typeface="Arial" pitchFamily="34" charset="-122"/>
@@ -4594,32 +5029,32 @@
       </p:sp>
       <p:sp>
         <p:nvSpPr>
-          <p:cNvPr id="4" name="Text 2"/>
-          <p:cNvSpPr/>
-          <p:nvPr/>
-        </p:nvSpPr>
-        <p:spPr>
-          <a:xfrm>
-            <a:off x="457200" y="1554480"/>
-            <a:ext cx="8229600" cy="320040"/>
-          </a:xfrm>
-          <a:prstGeom prst="rect">
-            <a:avLst/>
-          </a:prstGeom>
-          <a:noFill/>
-          <a:ln/>
-        </p:spPr>
-        <p:txBody>
-          <a:bodyPr wrap="square" lIns="0" tIns="0" rIns="0" bIns="0" rtlCol="0" anchor="ctr"/>
-          <a:lstStyle/>
-          <a:p>
-            <a:pPr indent="0" marL="0">
-              <a:buNone/>
-            </a:pPr>
-            <a:r>
-              <a:rPr lang="en-US" sz="1600" b="1" dirty="0">
-                <a:solidFill>
-                  <a:srgbClr val="1A1A1A"/>
+          <p:cNvPr id="6" name="Text 4"/>
+          <p:cNvSpPr/>
+          <p:nvPr/>
+        </p:nvSpPr>
+        <p:spPr>
+          <a:xfrm>
+            <a:off x="457200" y="1965960"/>
+            <a:ext cx="8229600" cy="274320"/>
+          </a:xfrm>
+          <a:prstGeom prst="rect">
+            <a:avLst/>
+          </a:prstGeom>
+          <a:noFill/>
+          <a:ln/>
+        </p:spPr>
+        <p:txBody>
+          <a:bodyPr wrap="square" lIns="0" tIns="0" rIns="0" bIns="0" rtlCol="0" anchor="ctr"/>
+          <a:lstStyle/>
+          <a:p>
+            <a:pPr indent="0" marL="0">
+              <a:buNone/>
+            </a:pPr>
+            <a:r>
+              <a:rPr lang="en-US" sz="1400" b="1" dirty="0">
+                <a:solidFill>
+                  <a:srgbClr val="C9A227"/>
                 </a:solidFill>
                 <a:latin typeface="Arial" pitchFamily="34" charset="0"/>
                 <a:ea typeface="Arial" pitchFamily="34" charset="-122"/>
@@ -4627,38 +5062,38 @@
               </a:rPr>
               <a:t>Diagnostic Questions</a:t>
             </a:r>
-            <a:endParaRPr lang="en-US" sz="1600" dirty="0"/>
-          </a:p>
-        </p:txBody>
-      </p:sp>
-      <p:sp>
-        <p:nvSpPr>
-          <p:cNvPr id="5" name="Text 3"/>
-          <p:cNvSpPr/>
-          <p:nvPr/>
-        </p:nvSpPr>
-        <p:spPr>
-          <a:xfrm>
-            <a:off x="457200" y="1965960"/>
-            <a:ext cx="8229600" cy="411480"/>
-          </a:xfrm>
-          <a:prstGeom prst="rect">
-            <a:avLst/>
-          </a:prstGeom>
-          <a:noFill/>
-          <a:ln/>
-        </p:spPr>
-        <p:txBody>
-          <a:bodyPr wrap="square" lIns="0" tIns="0" rIns="0" bIns="0" rtlCol="0" anchor="ctr"/>
-          <a:lstStyle/>
-          <a:p>
-            <a:pPr indent="0" marL="0">
-              <a:buNone/>
-            </a:pPr>
-            <a:r>
-              <a:rPr lang="en-US" sz="1400" dirty="0">
-                <a:solidFill>
-                  <a:srgbClr val="1A1A1A"/>
+            <a:endParaRPr lang="en-US" sz="1400" dirty="0"/>
+          </a:p>
+        </p:txBody>
+      </p:sp>
+      <p:sp>
+        <p:nvSpPr>
+          <p:cNvPr id="7" name="Text 5"/>
+          <p:cNvSpPr/>
+          <p:nvPr/>
+        </p:nvSpPr>
+        <p:spPr>
+          <a:xfrm>
+            <a:off x="457200" y="2286000"/>
+            <a:ext cx="8229600" cy="365760"/>
+          </a:xfrm>
+          <a:prstGeom prst="rect">
+            <a:avLst/>
+          </a:prstGeom>
+          <a:noFill/>
+          <a:ln/>
+        </p:spPr>
+        <p:txBody>
+          <a:bodyPr wrap="square" lIns="0" tIns="0" rIns="0" bIns="0" rtlCol="0" anchor="ctr"/>
+          <a:lstStyle/>
+          <a:p>
+            <a:pPr indent="0" marL="0">
+              <a:buNone/>
+            </a:pPr>
+            <a:r>
+              <a:rPr lang="en-US" sz="1300" dirty="0">
+                <a:solidFill>
+                  <a:srgbClr val="2A2A2A"/>
                 </a:solidFill>
                 <a:latin typeface="Arial" pitchFamily="34" charset="0"/>
                 <a:ea typeface="Arial" pitchFamily="34" charset="-122"/>
@@ -4666,38 +5101,38 @@
               </a:rPr>
               <a:t>1.  Which roles are truly critical to productive capacity over the next 3–5 years?</a:t>
             </a:r>
-            <a:endParaRPr lang="en-US" sz="1400" dirty="0"/>
-          </a:p>
-        </p:txBody>
-      </p:sp>
-      <p:sp>
-        <p:nvSpPr>
-          <p:cNvPr id="6" name="Text 4"/>
-          <p:cNvSpPr/>
-          <p:nvPr/>
-        </p:nvSpPr>
-        <p:spPr>
-          <a:xfrm>
-            <a:off x="457200" y="2423160"/>
-            <a:ext cx="8229600" cy="411480"/>
-          </a:xfrm>
-          <a:prstGeom prst="rect">
-            <a:avLst/>
-          </a:prstGeom>
-          <a:noFill/>
-          <a:ln/>
-        </p:spPr>
-        <p:txBody>
-          <a:bodyPr wrap="square" lIns="0" tIns="0" rIns="0" bIns="0" rtlCol="0" anchor="ctr"/>
-          <a:lstStyle/>
-          <a:p>
-            <a:pPr indent="0" marL="0">
-              <a:buNone/>
-            </a:pPr>
-            <a:r>
-              <a:rPr lang="en-US" sz="1400" dirty="0">
-                <a:solidFill>
-                  <a:srgbClr val="1A1A1A"/>
+            <a:endParaRPr lang="en-US" sz="1300" dirty="0"/>
+          </a:p>
+        </p:txBody>
+      </p:sp>
+      <p:sp>
+        <p:nvSpPr>
+          <p:cNvPr id="8" name="Text 6"/>
+          <p:cNvSpPr/>
+          <p:nvPr/>
+        </p:nvSpPr>
+        <p:spPr>
+          <a:xfrm>
+            <a:off x="457200" y="2670048"/>
+            <a:ext cx="8229600" cy="365760"/>
+          </a:xfrm>
+          <a:prstGeom prst="rect">
+            <a:avLst/>
+          </a:prstGeom>
+          <a:noFill/>
+          <a:ln/>
+        </p:spPr>
+        <p:txBody>
+          <a:bodyPr wrap="square" lIns="0" tIns="0" rIns="0" bIns="0" rtlCol="0" anchor="ctr"/>
+          <a:lstStyle/>
+          <a:p>
+            <a:pPr indent="0" marL="0">
+              <a:buNone/>
+            </a:pPr>
+            <a:r>
+              <a:rPr lang="en-US" sz="1300" dirty="0">
+                <a:solidFill>
+                  <a:srgbClr val="2A2A2A"/>
                 </a:solidFill>
                 <a:latin typeface="Arial" pitchFamily="34" charset="0"/>
                 <a:ea typeface="Arial" pitchFamily="34" charset="-122"/>
@@ -4705,38 +5140,38 @@
               </a:rPr>
               <a:t>2.  Where do we currently lose people, and why?</a:t>
             </a:r>
-            <a:endParaRPr lang="en-US" sz="1400" dirty="0"/>
-          </a:p>
-        </p:txBody>
-      </p:sp>
-      <p:sp>
-        <p:nvSpPr>
-          <p:cNvPr id="7" name="Text 5"/>
-          <p:cNvSpPr/>
-          <p:nvPr/>
-        </p:nvSpPr>
-        <p:spPr>
-          <a:xfrm>
-            <a:off x="457200" y="2880360"/>
-            <a:ext cx="8229600" cy="411480"/>
-          </a:xfrm>
-          <a:prstGeom prst="rect">
-            <a:avLst/>
-          </a:prstGeom>
-          <a:noFill/>
-          <a:ln/>
-        </p:spPr>
-        <p:txBody>
-          <a:bodyPr wrap="square" lIns="0" tIns="0" rIns="0" bIns="0" rtlCol="0" anchor="ctr"/>
-          <a:lstStyle/>
-          <a:p>
-            <a:pPr indent="0" marL="0">
-              <a:buNone/>
-            </a:pPr>
-            <a:r>
-              <a:rPr lang="en-US" sz="1400" dirty="0">
-                <a:solidFill>
-                  <a:srgbClr val="1A1A1A"/>
+            <a:endParaRPr lang="en-US" sz="1300" dirty="0"/>
+          </a:p>
+        </p:txBody>
+      </p:sp>
+      <p:sp>
+        <p:nvSpPr>
+          <p:cNvPr id="9" name="Text 7"/>
+          <p:cNvSpPr/>
+          <p:nvPr/>
+        </p:nvSpPr>
+        <p:spPr>
+          <a:xfrm>
+            <a:off x="457200" y="3054096"/>
+            <a:ext cx="8229600" cy="365760"/>
+          </a:xfrm>
+          <a:prstGeom prst="rect">
+            <a:avLst/>
+          </a:prstGeom>
+          <a:noFill/>
+          <a:ln/>
+        </p:spPr>
+        <p:txBody>
+          <a:bodyPr wrap="square" lIns="0" tIns="0" rIns="0" bIns="0" rtlCol="0" anchor="ctr"/>
+          <a:lstStyle/>
+          <a:p>
+            <a:pPr indent="0" marL="0">
+              <a:buNone/>
+            </a:pPr>
+            <a:r>
+              <a:rPr lang="en-US" sz="1300" dirty="0">
+                <a:solidFill>
+                  <a:srgbClr val="2A2A2A"/>
                 </a:solidFill>
                 <a:latin typeface="Arial" pitchFamily="34" charset="0"/>
                 <a:ea typeface="Arial" pitchFamily="34" charset="-122"/>
@@ -4744,38 +5179,38 @@
               </a:rPr>
               <a:t>3.  What percentage of skilled roles are filled by long-term American workers vs. temporary labor?</a:t>
             </a:r>
-            <a:endParaRPr lang="en-US" sz="1400" dirty="0"/>
-          </a:p>
-        </p:txBody>
-      </p:sp>
-      <p:sp>
-        <p:nvSpPr>
-          <p:cNvPr id="8" name="Text 6"/>
-          <p:cNvSpPr/>
-          <p:nvPr/>
-        </p:nvSpPr>
-        <p:spPr>
-          <a:xfrm>
-            <a:off x="457200" y="3337560"/>
-            <a:ext cx="8229600" cy="411480"/>
-          </a:xfrm>
-          <a:prstGeom prst="rect">
-            <a:avLst/>
-          </a:prstGeom>
-          <a:noFill/>
-          <a:ln/>
-        </p:spPr>
-        <p:txBody>
-          <a:bodyPr wrap="square" lIns="0" tIns="0" rIns="0" bIns="0" rtlCol="0" anchor="ctr"/>
-          <a:lstStyle/>
-          <a:p>
-            <a:pPr indent="0" marL="0">
-              <a:buNone/>
-            </a:pPr>
-            <a:r>
-              <a:rPr lang="en-US" sz="1400" dirty="0">
-                <a:solidFill>
-                  <a:srgbClr val="1A1A1A"/>
+            <a:endParaRPr lang="en-US" sz="1300" dirty="0"/>
+          </a:p>
+        </p:txBody>
+      </p:sp>
+      <p:sp>
+        <p:nvSpPr>
+          <p:cNvPr id="10" name="Text 8"/>
+          <p:cNvSpPr/>
+          <p:nvPr/>
+        </p:nvSpPr>
+        <p:spPr>
+          <a:xfrm>
+            <a:off x="457200" y="3438144"/>
+            <a:ext cx="8229600" cy="365760"/>
+          </a:xfrm>
+          <a:prstGeom prst="rect">
+            <a:avLst/>
+          </a:prstGeom>
+          <a:noFill/>
+          <a:ln/>
+        </p:spPr>
+        <p:txBody>
+          <a:bodyPr wrap="square" lIns="0" tIns="0" rIns="0" bIns="0" rtlCol="0" anchor="ctr"/>
+          <a:lstStyle/>
+          <a:p>
+            <a:pPr indent="0" marL="0">
+              <a:buNone/>
+            </a:pPr>
+            <a:r>
+              <a:rPr lang="en-US" sz="1300" dirty="0">
+                <a:solidFill>
+                  <a:srgbClr val="2A2A2A"/>
                 </a:solidFill>
                 <a:latin typeface="Arial" pitchFamily="34" charset="0"/>
                 <a:ea typeface="Arial" pitchFamily="34" charset="-122"/>
@@ -4783,38 +5218,38 @@
               </a:rPr>
               <a:t>4.  How aligned is our local talent ecosystem with actual needs?</a:t>
             </a:r>
-            <a:endParaRPr lang="en-US" sz="1400" dirty="0"/>
-          </a:p>
-        </p:txBody>
-      </p:sp>
-      <p:sp>
-        <p:nvSpPr>
-          <p:cNvPr id="9" name="Text 7"/>
-          <p:cNvSpPr/>
-          <p:nvPr/>
-        </p:nvSpPr>
-        <p:spPr>
-          <a:xfrm>
-            <a:off x="457200" y="3794760"/>
-            <a:ext cx="8229600" cy="411480"/>
-          </a:xfrm>
-          <a:prstGeom prst="rect">
-            <a:avLst/>
-          </a:prstGeom>
-          <a:noFill/>
-          <a:ln/>
-        </p:spPr>
-        <p:txBody>
-          <a:bodyPr wrap="square" lIns="0" tIns="0" rIns="0" bIns="0" rtlCol="0" anchor="ctr"/>
-          <a:lstStyle/>
-          <a:p>
-            <a:pPr indent="0" marL="0">
-              <a:buNone/>
-            </a:pPr>
-            <a:r>
-              <a:rPr lang="en-US" sz="1400" dirty="0">
-                <a:solidFill>
-                  <a:srgbClr val="1A1A1A"/>
+            <a:endParaRPr lang="en-US" sz="1300" dirty="0"/>
+          </a:p>
+        </p:txBody>
+      </p:sp>
+      <p:sp>
+        <p:nvSpPr>
+          <p:cNvPr id="11" name="Text 9"/>
+          <p:cNvSpPr/>
+          <p:nvPr/>
+        </p:nvSpPr>
+        <p:spPr>
+          <a:xfrm>
+            <a:off x="457200" y="3822192"/>
+            <a:ext cx="8229600" cy="365760"/>
+          </a:xfrm>
+          <a:prstGeom prst="rect">
+            <a:avLst/>
+          </a:prstGeom>
+          <a:noFill/>
+          <a:ln/>
+        </p:spPr>
+        <p:txBody>
+          <a:bodyPr wrap="square" lIns="0" tIns="0" rIns="0" bIns="0" rtlCol="0" anchor="ctr"/>
+          <a:lstStyle/>
+          <a:p>
+            <a:pPr indent="0" marL="0">
+              <a:buNone/>
+            </a:pPr>
+            <a:r>
+              <a:rPr lang="en-US" sz="1300" dirty="0">
+                <a:solidFill>
+                  <a:srgbClr val="2A2A2A"/>
                 </a:solidFill>
                 <a:latin typeface="Arial" pitchFamily="34" charset="0"/>
                 <a:ea typeface="Arial" pitchFamily="34" charset="-122"/>
@@ -4822,38 +5257,38 @@
               </a:rPr>
               <a:t>5.  Are we building a workforce that compounds knowledge, or one that resets every few years?</a:t>
             </a:r>
-            <a:endParaRPr lang="en-US" sz="1400" dirty="0"/>
-          </a:p>
-        </p:txBody>
-      </p:sp>
-      <p:sp>
-        <p:nvSpPr>
-          <p:cNvPr id="10" name="Text 8"/>
+            <a:endParaRPr lang="en-US" sz="1300" dirty="0"/>
+          </a:p>
+        </p:txBody>
+      </p:sp>
+      <p:sp>
+        <p:nvSpPr>
+          <p:cNvPr id="12" name="Text 10"/>
           <p:cNvSpPr/>
           <p:nvPr/>
         </p:nvSpPr>
         <p:spPr>
           <a:xfrm>
             <a:off x="457200" y="4800600"/>
-            <a:ext cx="5943600" cy="228600"/>
-          </a:xfrm>
-          <a:prstGeom prst="rect">
-            <a:avLst/>
-          </a:prstGeom>
-          <a:noFill/>
-          <a:ln/>
-        </p:spPr>
-        <p:txBody>
-          <a:bodyPr wrap="square" lIns="0" tIns="0" rIns="0" bIns="0" rtlCol="0" anchor="ctr"/>
-          <a:lstStyle/>
-          <a:p>
-            <a:pPr indent="0" marL="0">
-              <a:buNone/>
-            </a:pPr>
-            <a:r>
-              <a:rPr lang="en-US" sz="1000" dirty="0">
-                <a:solidFill>
-                  <a:srgbClr val="555555"/>
+            <a:ext cx="5943600" cy="256032"/>
+          </a:xfrm>
+          <a:prstGeom prst="rect">
+            <a:avLst/>
+          </a:prstGeom>
+          <a:noFill/>
+          <a:ln/>
+        </p:spPr>
+        <p:txBody>
+          <a:bodyPr wrap="square" lIns="0" tIns="0" rIns="0" bIns="0" rtlCol="0" anchor="ctr"/>
+          <a:lstStyle/>
+          <a:p>
+            <a:pPr indent="0" marL="0">
+              <a:buNone/>
+            </a:pPr>
+            <a:r>
+              <a:rPr lang="en-US" sz="1100" dirty="0">
+                <a:solidFill>
+                  <a:srgbClr val="6A6A6A"/>
                 </a:solidFill>
                 <a:latin typeface="Arial" pitchFamily="34" charset="0"/>
                 <a:ea typeface="Arial" pitchFamily="34" charset="-122"/>
@@ -4861,20 +5296,20 @@
               </a:rPr>
               <a:t>Joshua Konkle  |  Chief of Staff Strategist</a:t>
             </a:r>
-            <a:endParaRPr lang="en-US" sz="1000" dirty="0"/>
-          </a:p>
-        </p:txBody>
-      </p:sp>
-      <p:sp>
-        <p:nvSpPr>
-          <p:cNvPr id="11" name="Text 9"/>
-          <p:cNvSpPr/>
-          <p:nvPr/>
-        </p:nvSpPr>
-        <p:spPr>
-          <a:xfrm>
-            <a:off x="7772400" y="4800600"/>
-            <a:ext cx="914400" cy="228600"/>
+            <a:endParaRPr lang="en-US" sz="1100" dirty="0"/>
+          </a:p>
+        </p:txBody>
+      </p:sp>
+      <p:sp>
+        <p:nvSpPr>
+          <p:cNvPr id="13" name="Text 11"/>
+          <p:cNvSpPr/>
+          <p:nvPr/>
+        </p:nvSpPr>
+        <p:spPr>
+          <a:xfrm>
+            <a:off x="7498080" y="4800600"/>
+            <a:ext cx="1188720" cy="256032"/>
           </a:xfrm>
           <a:prstGeom prst="rect">
             <a:avLst/>
@@ -4890,9 +5325,9 @@
               <a:buNone/>
             </a:pPr>
             <a:r>
-              <a:rPr lang="en-US" sz="1000" dirty="0">
-                <a:solidFill>
-                  <a:srgbClr val="555555"/>
+              <a:rPr lang="en-US" sz="1100" dirty="0">
+                <a:solidFill>
+                  <a:srgbClr val="6A6A6A"/>
                 </a:solidFill>
                 <a:latin typeface="Arial" pitchFamily="34" charset="0"/>
                 <a:ea typeface="Arial" pitchFamily="34" charset="-122"/>
@@ -4900,7 +5335,7 @@
               </a:rPr>
               <a:t>5 / 11</a:t>
             </a:r>
-            <a:endParaRPr lang="en-US" sz="1000" dirty="0"/>
+            <a:endParaRPr lang="en-US" sz="1100" dirty="0"/>
           </a:p>
         </p:txBody>
       </p:sp>
@@ -4915,13 +5350,6 @@
 <file path=ppt/slides/slide6.xml><?xml version="1.0" encoding="utf-8"?>
 <p:sld xmlns:a="http://schemas.openxmlformats.org/drawingml/2006/main" xmlns:r="http://schemas.openxmlformats.org/officeDocument/2006/relationships" xmlns:p="http://schemas.openxmlformats.org/presentationml/2006/main">
   <p:cSld name="Slide 6">
-    <p:bg>
-      <p:bgPr>
-        <a:solidFill>
-          <a:srgbClr val="FFFFFF"/>
-        </a:solidFill>
-      </p:bgPr>
-    </p:bg>
     <p:spTree>
       <p:nvGrpSpPr>
         <p:cNvPr id="1" name=""/>
@@ -4938,32 +5366,57 @@
       </p:grpSpPr>
       <p:sp>
         <p:nvSpPr>
-          <p:cNvPr id="2" name="Text 0"/>
-          <p:cNvSpPr/>
-          <p:nvPr/>
-        </p:nvSpPr>
-        <p:spPr>
-          <a:xfrm>
-            <a:off x="457200" y="320040"/>
-            <a:ext cx="8229600" cy="457200"/>
-          </a:xfrm>
-          <a:prstGeom prst="rect">
-            <a:avLst/>
-          </a:prstGeom>
-          <a:noFill/>
-          <a:ln/>
-        </p:spPr>
-        <p:txBody>
-          <a:bodyPr wrap="square" lIns="0" tIns="0" rIns="0" bIns="0" rtlCol="0" anchor="ctr"/>
-          <a:lstStyle/>
-          <a:p>
-            <a:pPr indent="0" marL="0">
-              <a:buNone/>
-            </a:pPr>
-            <a:r>
-              <a:rPr lang="en-US" sz="2600" b="1" dirty="0">
-                <a:solidFill>
-                  <a:srgbClr val="1A1A1A"/>
+          <p:cNvPr id="2" name="Shape 0"/>
+          <p:cNvSpPr/>
+          <p:nvPr/>
+        </p:nvSpPr>
+        <p:spPr>
+          <a:xfrm>
+            <a:off x="0" y="0"/>
+            <a:ext cx="9144000" cy="5143500"/>
+          </a:xfrm>
+          <a:prstGeom prst="rect">
+            <a:avLst/>
+          </a:prstGeom>
+          <a:solidFill>
+            <a:srgbClr val="FFFFFF"/>
+          </a:solidFill>
+          <a:ln w="12700">
+            <a:solidFill>
+              <a:srgbClr val="FFFFFF"/>
+            </a:solidFill>
+            <a:prstDash val="solid"/>
+          </a:ln>
+        </p:spPr>
+      </p:sp>
+      <p:sp>
+        <p:nvSpPr>
+          <p:cNvPr id="3" name="Text 1"/>
+          <p:cNvSpPr/>
+          <p:nvPr/>
+        </p:nvSpPr>
+        <p:spPr>
+          <a:xfrm>
+            <a:off x="457200" y="228600"/>
+            <a:ext cx="8229600" cy="365760"/>
+          </a:xfrm>
+          <a:prstGeom prst="rect">
+            <a:avLst/>
+          </a:prstGeom>
+          <a:noFill/>
+          <a:ln/>
+        </p:spPr>
+        <p:txBody>
+          <a:bodyPr wrap="square" lIns="0" tIns="0" rIns="0" bIns="0" rtlCol="0" anchor="ctr"/>
+          <a:lstStyle/>
+          <a:p>
+            <a:pPr indent="0" marL="0">
+              <a:buNone/>
+            </a:pPr>
+            <a:r>
+              <a:rPr lang="en-US" sz="2200" b="1" dirty="0">
+                <a:solidFill>
+                  <a:srgbClr val="1B2A4A"/>
                 </a:solidFill>
                 <a:latin typeface="Arial" pitchFamily="34" charset="0"/>
                 <a:ea typeface="Arial" pitchFamily="34" charset="-122"/>
@@ -4971,79 +5424,189 @@
               </a:rPr>
               <a:t>Innovation as the Real Cost Reducer</a:t>
             </a:r>
-            <a:endParaRPr lang="en-US" sz="2600" dirty="0"/>
-          </a:p>
-        </p:txBody>
-      </p:sp>
-      <p:sp>
-        <p:nvSpPr>
-          <p:cNvPr id="3" name="Shape 1"/>
-          <p:cNvSpPr/>
-          <p:nvPr/>
-        </p:nvSpPr>
-        <p:spPr>
-          <a:xfrm>
-            <a:off x="457200" y="1097280"/>
-            <a:ext cx="8229600" cy="3108960"/>
-          </a:xfrm>
-          <a:prstGeom prst="rect">
-            <a:avLst/>
+            <a:endParaRPr lang="en-US" sz="2200" dirty="0"/>
+          </a:p>
+        </p:txBody>
+      </p:sp>
+      <p:sp>
+        <p:nvSpPr>
+          <p:cNvPr id="4" name="Text 2"/>
+          <p:cNvSpPr/>
+          <p:nvPr/>
+        </p:nvSpPr>
+        <p:spPr>
+          <a:xfrm>
+            <a:off x="457200" y="777240"/>
+            <a:ext cx="8229600" cy="274320"/>
+          </a:xfrm>
+          <a:prstGeom prst="rect">
+            <a:avLst/>
+          </a:prstGeom>
+          <a:noFill/>
+          <a:ln/>
+        </p:spPr>
+        <p:txBody>
+          <a:bodyPr wrap="square" lIns="0" tIns="0" rIns="0" bIns="0" rtlCol="0" anchor="ctr"/>
+          <a:lstStyle/>
+          <a:p>
+            <a:pPr indent="0" marL="0">
+              <a:buNone/>
+            </a:pPr>
+            <a:r>
+              <a:rPr lang="en-US" sz="1600" b="1" dirty="0">
+                <a:solidFill>
+                  <a:srgbClr val="C9A227"/>
+                </a:solidFill>
+                <a:latin typeface="Arial" pitchFamily="34" charset="0"/>
+                <a:ea typeface="Arial" pitchFamily="34" charset="-122"/>
+                <a:cs typeface="Arial" pitchFamily="34" charset="-120"/>
+              </a:rPr>
+              <a:t>The Elevator Analogy</a:t>
+            </a:r>
+            <a:endParaRPr lang="en-US" sz="1600" dirty="0"/>
+          </a:p>
+        </p:txBody>
+      </p:sp>
+      <p:sp>
+        <p:nvSpPr>
+          <p:cNvPr id="5" name="Text 3"/>
+          <p:cNvSpPr/>
+          <p:nvPr/>
+        </p:nvSpPr>
+        <p:spPr>
+          <a:xfrm>
+            <a:off x="457200" y="1143000"/>
+            <a:ext cx="8229600" cy="640080"/>
+          </a:xfrm>
+          <a:prstGeom prst="rect">
+            <a:avLst/>
+          </a:prstGeom>
+          <a:noFill/>
+          <a:ln/>
+        </p:spPr>
+        <p:txBody>
+          <a:bodyPr wrap="square" lIns="0" tIns="0" rIns="0" bIns="0" rtlCol="0" anchor="ctr"/>
+          <a:lstStyle/>
+          <a:p>
+            <a:pPr indent="0" marL="0">
+              <a:buNone/>
+            </a:pPr>
+            <a:r>
+              <a:rPr lang="en-US" sz="1400" dirty="0">
+                <a:solidFill>
+                  <a:srgbClr val="2A2A2A"/>
+                </a:solidFill>
+                <a:latin typeface="Arial" pitchFamily="34" charset="0"/>
+                <a:ea typeface="Arial" pitchFamily="34" charset="-122"/>
+                <a:cs typeface="Arial" pitchFamily="34" charset="-120"/>
+              </a:rPr>
+              <a:t>For decades buildings required full-time elevator operators. The innovation was not to find cheaper operators — it was to redesign the system so passengers could operate it themselves.</a:t>
+            </a:r>
+            <a:endParaRPr lang="en-US" sz="1400" dirty="0"/>
+          </a:p>
+        </p:txBody>
+      </p:sp>
+      <p:sp>
+        <p:nvSpPr>
+          <p:cNvPr id="6" name="Text 4"/>
+          <p:cNvSpPr/>
+          <p:nvPr/>
+        </p:nvSpPr>
+        <p:spPr>
+          <a:xfrm>
+            <a:off x="457200" y="1828800"/>
+            <a:ext cx="8229600" cy="365760"/>
+          </a:xfrm>
+          <a:prstGeom prst="rect">
+            <a:avLst/>
+          </a:prstGeom>
+          <a:noFill/>
+          <a:ln/>
+        </p:spPr>
+        <p:txBody>
+          <a:bodyPr wrap="square" lIns="0" tIns="0" rIns="0" bIns="0" rtlCol="0" anchor="ctr"/>
+          <a:lstStyle/>
+          <a:p>
+            <a:pPr indent="0" marL="0">
+              <a:buNone/>
+            </a:pPr>
+            <a:r>
+              <a:rPr lang="en-US" sz="1400" b="1" dirty="0">
+                <a:solidFill>
+                  <a:srgbClr val="1B2A4A"/>
+                </a:solidFill>
+                <a:latin typeface="Arial" pitchFamily="34" charset="0"/>
+                <a:ea typeface="Arial" pitchFamily="34" charset="-122"/>
+                <a:cs typeface="Arial" pitchFamily="34" charset="-120"/>
+              </a:rPr>
+              <a:t>The operator role disappeared. Costs fell. Human effort shifted to higher-value work.</a:t>
+            </a:r>
+            <a:endParaRPr lang="en-US" sz="1400" dirty="0"/>
+          </a:p>
+        </p:txBody>
+      </p:sp>
+      <p:sp>
+        <p:nvSpPr>
+          <p:cNvPr id="7" name="Shape 5"/>
+          <p:cNvSpPr/>
+          <p:nvPr/>
+        </p:nvSpPr>
+        <p:spPr>
+          <a:xfrm>
+            <a:off x="457200" y="2377440"/>
+            <a:ext cx="8229600" cy="1828800"/>
+          </a:xfrm>
+          <a:prstGeom prst="roundRect">
+            <a:avLst>
+              <a:gd name="adj" fmla="val 3000"/>
+            </a:avLst>
           </a:prstGeom>
           <a:solidFill>
-            <a:srgbClr val="F7F7F7"/>
+            <a:srgbClr val="F7F5F0"/>
           </a:solidFill>
-          <a:ln/>
-        </p:spPr>
-      </p:sp>
-      <p:sp>
-        <p:nvSpPr>
-          <p:cNvPr id="4" name="Text 2"/>
-          <p:cNvSpPr/>
-          <p:nvPr/>
-        </p:nvSpPr>
-        <p:spPr>
-          <a:xfrm>
-            <a:off x="731520" y="1325880"/>
-            <a:ext cx="7680960" cy="365760"/>
-          </a:xfrm>
-          <a:prstGeom prst="rect">
-            <a:avLst/>
-          </a:prstGeom>
-          <a:noFill/>
-          <a:ln/>
-        </p:spPr>
-        <p:txBody>
-          <a:bodyPr wrap="square" lIns="0" tIns="0" rIns="0" bIns="0" rtlCol="0" anchor="ctr"/>
-          <a:lstStyle/>
-          <a:p>
-            <a:pPr indent="0" marL="0">
-              <a:buNone/>
-            </a:pPr>
-            <a:r>
-              <a:rPr lang="en-US" sz="1800" b="1" dirty="0">
-                <a:solidFill>
-                  <a:srgbClr val="1A1A1A"/>
-                </a:solidFill>
-                <a:latin typeface="Arial" pitchFamily="34" charset="0"/>
-                <a:ea typeface="Arial" pitchFamily="34" charset="-122"/>
-                <a:cs typeface="Arial" pitchFamily="34" charset="-120"/>
-              </a:rPr>
-              <a:t>The Elevator Analogy</a:t>
-            </a:r>
-            <a:endParaRPr lang="en-US" sz="1800" dirty="0"/>
-          </a:p>
-        </p:txBody>
-      </p:sp>
-      <p:sp>
-        <p:nvSpPr>
-          <p:cNvPr id="5" name="Text 3"/>
-          <p:cNvSpPr/>
-          <p:nvPr/>
-        </p:nvSpPr>
-        <p:spPr>
-          <a:xfrm>
-            <a:off x="731520" y="1828800"/>
-            <a:ext cx="7680960" cy="2103120"/>
+          <a:ln w="12700">
+            <a:solidFill>
+              <a:srgbClr val="F7F5F0"/>
+            </a:solidFill>
+            <a:prstDash val="solid"/>
+          </a:ln>
+        </p:spPr>
+      </p:sp>
+      <p:sp>
+        <p:nvSpPr>
+          <p:cNvPr id="8" name="Shape 6"/>
+          <p:cNvSpPr/>
+          <p:nvPr/>
+        </p:nvSpPr>
+        <p:spPr>
+          <a:xfrm>
+            <a:off x="457200" y="2377440"/>
+            <a:ext cx="91440" cy="1828800"/>
+          </a:xfrm>
+          <a:prstGeom prst="rect">
+            <a:avLst/>
+          </a:prstGeom>
+          <a:solidFill>
+            <a:srgbClr val="C9A227"/>
+          </a:solidFill>
+          <a:ln w="12700">
+            <a:solidFill>
+              <a:srgbClr val="C9A227"/>
+            </a:solidFill>
+            <a:prstDash val="solid"/>
+          </a:ln>
+        </p:spPr>
+      </p:sp>
+      <p:sp>
+        <p:nvSpPr>
+          <p:cNvPr id="9" name="Text 7"/>
+          <p:cNvSpPr/>
+          <p:nvPr/>
+        </p:nvSpPr>
+        <p:spPr>
+          <a:xfrm>
+            <a:off x="777240" y="2606040"/>
+            <a:ext cx="7680960" cy="1371600"/>
           </a:xfrm>
           <a:prstGeom prst="rect">
             <a:avLst/>
@@ -5061,92 +5624,46 @@
             <a:r>
               <a:rPr lang="en-US" sz="1400" dirty="0">
                 <a:solidFill>
-                  <a:srgbClr val="1A1A1A"/>
-                </a:solidFill>
-                <a:latin typeface="Arial" pitchFamily="34" charset="0"/>
-                <a:ea typeface="Arial" pitchFamily="34" charset="-122"/>
-                <a:cs typeface="Arial" pitchFamily="34" charset="-120"/>
-              </a:rPr>
-              <a:t>For decades buildings required full-time elevator operators. The innovation was not to find cheaper operators — it was to redesign the system so passengers could operate it themselves.</a:t>
+                  <a:srgbClr val="2A2A2A"/>
+                </a:solidFill>
+                <a:latin typeface="Arial" pitchFamily="34" charset="0"/>
+                <a:ea typeface="Arial" pitchFamily="34" charset="-122"/>
+                <a:cs typeface="Arial" pitchFamily="34" charset="-120"/>
+              </a:rPr>
+              <a:t>The same logic applies across manufacturing and operations: the highest-leverage cost reductions come from innovations that eliminate low-value activity and move American workers into more productive roles — not from endlessly arbitraging the price of labor.</a:t>
             </a:r>
             <a:endParaRPr lang="en-US" sz="1400" dirty="0"/>
           </a:p>
-          <a:p>
-            <a:pPr indent="0" marL="0">
-              <a:buNone/>
-            </a:pPr>
-            <a:endParaRPr lang="en-US" sz="1400" dirty="0"/>
-          </a:p>
-          <a:p>
-            <a:pPr indent="0" marL="0">
-              <a:buNone/>
-            </a:pPr>
-            <a:r>
-              <a:rPr lang="en-US" sz="1400" dirty="0">
-                <a:solidFill>
-                  <a:srgbClr val="1A1A1A"/>
-                </a:solidFill>
-                <a:latin typeface="Arial" pitchFamily="34" charset="0"/>
-                <a:ea typeface="Arial" pitchFamily="34" charset="-122"/>
-                <a:cs typeface="Arial" pitchFamily="34" charset="-120"/>
-              </a:rPr>
-              <a:t>The operator role disappeared. Costs fell. Human effort shifted to higher-value work.</a:t>
-            </a:r>
-            <a:endParaRPr lang="en-US" sz="1400" dirty="0"/>
-          </a:p>
-          <a:p>
-            <a:pPr indent="0" marL="0">
-              <a:buNone/>
-            </a:pPr>
-            <a:endParaRPr lang="en-US" sz="1400" dirty="0"/>
-          </a:p>
-          <a:p>
-            <a:pPr indent="0" marL="0">
-              <a:buNone/>
-            </a:pPr>
-            <a:r>
-              <a:rPr lang="en-US" sz="1400" dirty="0">
-                <a:solidFill>
-                  <a:srgbClr val="1A1A1A"/>
-                </a:solidFill>
-                <a:latin typeface="Arial" pitchFamily="34" charset="0"/>
-                <a:ea typeface="Arial" pitchFamily="34" charset="-122"/>
-                <a:cs typeface="Arial" pitchFamily="34" charset="-120"/>
-              </a:rPr>
-              <a:t>The same logic applies across manufacturing and operations: the highest-leverage cost reductions come from innovations that eliminate low-value activity and move American workers into more productive roles — not from endlessly arbitraging the price of labor.</a:t>
-            </a:r>
-            <a:endParaRPr lang="en-US" sz="1400" dirty="0"/>
-          </a:p>
-        </p:txBody>
-      </p:sp>
-      <p:sp>
-        <p:nvSpPr>
-          <p:cNvPr id="6" name="Text 4"/>
+        </p:txBody>
+      </p:sp>
+      <p:sp>
+        <p:nvSpPr>
+          <p:cNvPr id="10" name="Text 8"/>
           <p:cNvSpPr/>
           <p:nvPr/>
         </p:nvSpPr>
         <p:spPr>
           <a:xfrm>
             <a:off x="457200" y="4800600"/>
-            <a:ext cx="5943600" cy="228600"/>
-          </a:xfrm>
-          <a:prstGeom prst="rect">
-            <a:avLst/>
-          </a:prstGeom>
-          <a:noFill/>
-          <a:ln/>
-        </p:spPr>
-        <p:txBody>
-          <a:bodyPr wrap="square" lIns="0" tIns="0" rIns="0" bIns="0" rtlCol="0" anchor="ctr"/>
-          <a:lstStyle/>
-          <a:p>
-            <a:pPr indent="0" marL="0">
-              <a:buNone/>
-            </a:pPr>
-            <a:r>
-              <a:rPr lang="en-US" sz="1000" dirty="0">
-                <a:solidFill>
-                  <a:srgbClr val="555555"/>
+            <a:ext cx="5943600" cy="256032"/>
+          </a:xfrm>
+          <a:prstGeom prst="rect">
+            <a:avLst/>
+          </a:prstGeom>
+          <a:noFill/>
+          <a:ln/>
+        </p:spPr>
+        <p:txBody>
+          <a:bodyPr wrap="square" lIns="0" tIns="0" rIns="0" bIns="0" rtlCol="0" anchor="ctr"/>
+          <a:lstStyle/>
+          <a:p>
+            <a:pPr indent="0" marL="0">
+              <a:buNone/>
+            </a:pPr>
+            <a:r>
+              <a:rPr lang="en-US" sz="1100" dirty="0">
+                <a:solidFill>
+                  <a:srgbClr val="6A6A6A"/>
                 </a:solidFill>
                 <a:latin typeface="Arial" pitchFamily="34" charset="0"/>
                 <a:ea typeface="Arial" pitchFamily="34" charset="-122"/>
@@ -5154,20 +5671,20 @@
               </a:rPr>
               <a:t>Joshua Konkle  |  Chief of Staff Strategist</a:t>
             </a:r>
-            <a:endParaRPr lang="en-US" sz="1000" dirty="0"/>
-          </a:p>
-        </p:txBody>
-      </p:sp>
-      <p:sp>
-        <p:nvSpPr>
-          <p:cNvPr id="7" name="Text 5"/>
-          <p:cNvSpPr/>
-          <p:nvPr/>
-        </p:nvSpPr>
-        <p:spPr>
-          <a:xfrm>
-            <a:off x="7772400" y="4800600"/>
-            <a:ext cx="914400" cy="228600"/>
+            <a:endParaRPr lang="en-US" sz="1100" dirty="0"/>
+          </a:p>
+        </p:txBody>
+      </p:sp>
+      <p:sp>
+        <p:nvSpPr>
+          <p:cNvPr id="11" name="Text 9"/>
+          <p:cNvSpPr/>
+          <p:nvPr/>
+        </p:nvSpPr>
+        <p:spPr>
+          <a:xfrm>
+            <a:off x="7498080" y="4800600"/>
+            <a:ext cx="1188720" cy="256032"/>
           </a:xfrm>
           <a:prstGeom prst="rect">
             <a:avLst/>
@@ -5183,9 +5700,9 @@
               <a:buNone/>
             </a:pPr>
             <a:r>
-              <a:rPr lang="en-US" sz="1000" dirty="0">
-                <a:solidFill>
-                  <a:srgbClr val="555555"/>
+              <a:rPr lang="en-US" sz="1100" dirty="0">
+                <a:solidFill>
+                  <a:srgbClr val="6A6A6A"/>
                 </a:solidFill>
                 <a:latin typeface="Arial" pitchFamily="34" charset="0"/>
                 <a:ea typeface="Arial" pitchFamily="34" charset="-122"/>
@@ -5193,7 +5710,7 @@
               </a:rPr>
               <a:t>6 / 11</a:t>
             </a:r>
-            <a:endParaRPr lang="en-US" sz="1000" dirty="0"/>
+            <a:endParaRPr lang="en-US" sz="1100" dirty="0"/>
           </a:p>
         </p:txBody>
       </p:sp>
@@ -5208,13 +5725,6 @@
 <file path=ppt/slides/slide7.xml><?xml version="1.0" encoding="utf-8"?>
 <p:sld xmlns:a="http://schemas.openxmlformats.org/drawingml/2006/main" xmlns:r="http://schemas.openxmlformats.org/officeDocument/2006/relationships" xmlns:p="http://schemas.openxmlformats.org/presentationml/2006/main">
   <p:cSld name="Slide 7">
-    <p:bg>
-      <p:bgPr>
-        <a:solidFill>
-          <a:srgbClr val="FFFFFF"/>
-        </a:solidFill>
-      </p:bgPr>
-    </p:bg>
     <p:spTree>
       <p:nvGrpSpPr>
         <p:cNvPr id="1" name=""/>
@@ -5231,32 +5741,57 @@
       </p:grpSpPr>
       <p:sp>
         <p:nvSpPr>
-          <p:cNvPr id="2" name="Text 0"/>
-          <p:cNvSpPr/>
-          <p:nvPr/>
-        </p:nvSpPr>
-        <p:spPr>
-          <a:xfrm>
-            <a:off x="457200" y="274320"/>
-            <a:ext cx="8229600" cy="411480"/>
-          </a:xfrm>
-          <a:prstGeom prst="rect">
-            <a:avLst/>
-          </a:prstGeom>
-          <a:noFill/>
-          <a:ln/>
-        </p:spPr>
-        <p:txBody>
-          <a:bodyPr wrap="square" lIns="0" tIns="0" rIns="0" bIns="0" rtlCol="0" anchor="ctr"/>
-          <a:lstStyle/>
-          <a:p>
-            <a:pPr indent="0" marL="0">
-              <a:buNone/>
-            </a:pPr>
-            <a:r>
-              <a:rPr lang="en-US" sz="2400" b="1" dirty="0">
-                <a:solidFill>
-                  <a:srgbClr val="1A1A1A"/>
+          <p:cNvPr id="2" name="Shape 0"/>
+          <p:cNvSpPr/>
+          <p:nvPr/>
+        </p:nvSpPr>
+        <p:spPr>
+          <a:xfrm>
+            <a:off x="0" y="0"/>
+            <a:ext cx="9144000" cy="5143500"/>
+          </a:xfrm>
+          <a:prstGeom prst="rect">
+            <a:avLst/>
+          </a:prstGeom>
+          <a:solidFill>
+            <a:srgbClr val="FFFFFF"/>
+          </a:solidFill>
+          <a:ln w="12700">
+            <a:solidFill>
+              <a:srgbClr val="FFFFFF"/>
+            </a:solidFill>
+            <a:prstDash val="solid"/>
+          </a:ln>
+        </p:spPr>
+      </p:sp>
+      <p:sp>
+        <p:nvSpPr>
+          <p:cNvPr id="3" name="Text 1"/>
+          <p:cNvSpPr/>
+          <p:nvPr/>
+        </p:nvSpPr>
+        <p:spPr>
+          <a:xfrm>
+            <a:off x="457200" y="228600"/>
+            <a:ext cx="8229600" cy="365760"/>
+          </a:xfrm>
+          <a:prstGeom prst="rect">
+            <a:avLst/>
+          </a:prstGeom>
+          <a:noFill/>
+          <a:ln/>
+        </p:spPr>
+        <p:txBody>
+          <a:bodyPr wrap="square" lIns="0" tIns="0" rIns="0" bIns="0" rtlCol="0" anchor="ctr"/>
+          <a:lstStyle/>
+          <a:p>
+            <a:pPr indent="0" marL="0">
+              <a:buNone/>
+            </a:pPr>
+            <a:r>
+              <a:rPr lang="en-US" sz="2200" b="1" dirty="0">
+                <a:solidFill>
+                  <a:srgbClr val="1B2A4A"/>
                 </a:solidFill>
                 <a:latin typeface="Arial" pitchFamily="34" charset="0"/>
                 <a:ea typeface="Arial" pitchFamily="34" charset="-122"/>
@@ -5264,13 +5799,13 @@
               </a:rPr>
               <a:t>Production Location &amp; Domestic Capacity</a:t>
             </a:r>
-            <a:endParaRPr lang="en-US" sz="2400" dirty="0"/>
-          </a:p>
-        </p:txBody>
-      </p:sp>
-      <p:sp>
-        <p:nvSpPr>
-          <p:cNvPr id="3" name="Text 1"/>
+            <a:endParaRPr lang="en-US" sz="2200" dirty="0"/>
+          </a:p>
+        </p:txBody>
+      </p:sp>
+      <p:sp>
+        <p:nvSpPr>
+          <p:cNvPr id="4" name="Text 2"/>
           <p:cNvSpPr/>
           <p:nvPr/>
         </p:nvSpPr>
@@ -5295,7 +5830,7 @@
             <a:r>
               <a:rPr lang="en-US" sz="1400" dirty="0">
                 <a:solidFill>
-                  <a:srgbClr val="555555"/>
+                  <a:srgbClr val="5A5A5A"/>
                 </a:solidFill>
                 <a:latin typeface="Arial" pitchFamily="34" charset="0"/>
                 <a:ea typeface="Arial" pitchFamily="34" charset="-122"/>
@@ -5309,34 +5844,39 @@
       </p:sp>
       <p:sp>
         <p:nvSpPr>
-          <p:cNvPr id="4" name="Shape 2"/>
-          <p:cNvSpPr/>
-          <p:nvPr/>
-        </p:nvSpPr>
-        <p:spPr>
-          <a:xfrm>
-            <a:off x="457200" y="1417320"/>
-            <a:ext cx="320040" cy="320040"/>
+          <p:cNvPr id="5" name="Shape 3"/>
+          <p:cNvSpPr/>
+          <p:nvPr/>
+        </p:nvSpPr>
+        <p:spPr>
+          <a:xfrm>
+            <a:off x="502920" y="1325880"/>
+            <a:ext cx="365760" cy="365760"/>
           </a:xfrm>
           <a:prstGeom prst="ellipse">
             <a:avLst/>
           </a:prstGeom>
           <a:solidFill>
-            <a:srgbClr val="1A1A1A"/>
+            <a:srgbClr val="1B2A4A"/>
           </a:solidFill>
-          <a:ln/>
-        </p:spPr>
-      </p:sp>
-      <p:sp>
-        <p:nvSpPr>
-          <p:cNvPr id="5" name="Text 3"/>
-          <p:cNvSpPr/>
-          <p:nvPr/>
-        </p:nvSpPr>
-        <p:spPr>
-          <a:xfrm>
-            <a:off x="457200" y="1417320"/>
-            <a:ext cx="320040" cy="320040"/>
+          <a:ln w="12700">
+            <a:solidFill>
+              <a:srgbClr val="1B2A4A"/>
+            </a:solidFill>
+            <a:prstDash val="solid"/>
+          </a:ln>
+        </p:spPr>
+      </p:sp>
+      <p:sp>
+        <p:nvSpPr>
+          <p:cNvPr id="6" name="Text 4"/>
+          <p:cNvSpPr/>
+          <p:nvPr/>
+        </p:nvSpPr>
+        <p:spPr>
+          <a:xfrm>
+            <a:off x="502920" y="1371600"/>
+            <a:ext cx="365760" cy="274320"/>
           </a:xfrm>
           <a:prstGeom prst="rect">
             <a:avLst/>
@@ -5352,9 +5892,9 @@
               <a:buNone/>
             </a:pPr>
             <a:r>
-              <a:rPr lang="en-US" sz="1200" b="1" dirty="0">
-                <a:solidFill>
-                  <a:srgbClr val="F5F5F5"/>
+              <a:rPr lang="en-US" sz="1400" b="1" dirty="0">
+                <a:solidFill>
+                  <a:srgbClr val="C9A227"/>
                 </a:solidFill>
                 <a:latin typeface="Arial" pitchFamily="34" charset="0"/>
                 <a:ea typeface="Arial" pitchFamily="34" charset="-122"/>
@@ -5362,20 +5902,20 @@
               </a:rPr>
               <a:t>1</a:t>
             </a:r>
-            <a:endParaRPr lang="en-US" sz="1200" dirty="0"/>
-          </a:p>
-        </p:txBody>
-      </p:sp>
-      <p:sp>
-        <p:nvSpPr>
-          <p:cNvPr id="6" name="Text 4"/>
-          <p:cNvSpPr/>
-          <p:nvPr/>
-        </p:nvSpPr>
-        <p:spPr>
-          <a:xfrm>
-            <a:off x="1005840" y="1325880"/>
-            <a:ext cx="7589520" cy="548640"/>
+            <a:endParaRPr lang="en-US" sz="1400" dirty="0"/>
+          </a:p>
+        </p:txBody>
+      </p:sp>
+      <p:sp>
+        <p:nvSpPr>
+          <p:cNvPr id="7" name="Text 5"/>
+          <p:cNvSpPr/>
+          <p:nvPr/>
+        </p:nvSpPr>
+        <p:spPr>
+          <a:xfrm>
+            <a:off x="1051560" y="1325880"/>
+            <a:ext cx="7498080" cy="502920"/>
           </a:xfrm>
           <a:prstGeom prst="rect">
             <a:avLst/>
@@ -5393,7 +5933,7 @@
             <a:r>
               <a:rPr lang="en-US" sz="1400" dirty="0">
                 <a:solidFill>
-                  <a:srgbClr val="1A1A1A"/>
+                  <a:srgbClr val="2A2A2A"/>
                 </a:solidFill>
                 <a:latin typeface="Arial" pitchFamily="34" charset="0"/>
                 <a:ea typeface="Arial" pitchFamily="34" charset="-122"/>
@@ -5407,34 +5947,39 @@
       </p:sp>
       <p:sp>
         <p:nvSpPr>
-          <p:cNvPr id="7" name="Shape 5"/>
-          <p:cNvSpPr/>
-          <p:nvPr/>
-        </p:nvSpPr>
-        <p:spPr>
-          <a:xfrm>
-            <a:off x="457200" y="2148840"/>
-            <a:ext cx="320040" cy="320040"/>
+          <p:cNvPr id="8" name="Shape 6"/>
+          <p:cNvSpPr/>
+          <p:nvPr/>
+        </p:nvSpPr>
+        <p:spPr>
+          <a:xfrm>
+            <a:off x="502920" y="2057400"/>
+            <a:ext cx="365760" cy="365760"/>
           </a:xfrm>
           <a:prstGeom prst="ellipse">
             <a:avLst/>
           </a:prstGeom>
           <a:solidFill>
-            <a:srgbClr val="1A1A1A"/>
+            <a:srgbClr val="1B2A4A"/>
           </a:solidFill>
-          <a:ln/>
-        </p:spPr>
-      </p:sp>
-      <p:sp>
-        <p:nvSpPr>
-          <p:cNvPr id="8" name="Text 6"/>
-          <p:cNvSpPr/>
-          <p:nvPr/>
-        </p:nvSpPr>
-        <p:spPr>
-          <a:xfrm>
-            <a:off x="457200" y="2148840"/>
-            <a:ext cx="320040" cy="320040"/>
+          <a:ln w="12700">
+            <a:solidFill>
+              <a:srgbClr val="1B2A4A"/>
+            </a:solidFill>
+            <a:prstDash val="solid"/>
+          </a:ln>
+        </p:spPr>
+      </p:sp>
+      <p:sp>
+        <p:nvSpPr>
+          <p:cNvPr id="9" name="Text 7"/>
+          <p:cNvSpPr/>
+          <p:nvPr/>
+        </p:nvSpPr>
+        <p:spPr>
+          <a:xfrm>
+            <a:off x="502920" y="2103120"/>
+            <a:ext cx="365760" cy="274320"/>
           </a:xfrm>
           <a:prstGeom prst="rect">
             <a:avLst/>
@@ -5450,9 +5995,9 @@
               <a:buNone/>
             </a:pPr>
             <a:r>
-              <a:rPr lang="en-US" sz="1200" b="1" dirty="0">
-                <a:solidFill>
-                  <a:srgbClr val="F5F5F5"/>
+              <a:rPr lang="en-US" sz="1400" b="1" dirty="0">
+                <a:solidFill>
+                  <a:srgbClr val="C9A227"/>
                 </a:solidFill>
                 <a:latin typeface="Arial" pitchFamily="34" charset="0"/>
                 <a:ea typeface="Arial" pitchFamily="34" charset="-122"/>
@@ -5460,20 +6005,20 @@
               </a:rPr>
               <a:t>2</a:t>
             </a:r>
-            <a:endParaRPr lang="en-US" sz="1200" dirty="0"/>
-          </a:p>
-        </p:txBody>
-      </p:sp>
-      <p:sp>
-        <p:nvSpPr>
-          <p:cNvPr id="9" name="Text 7"/>
-          <p:cNvSpPr/>
-          <p:nvPr/>
-        </p:nvSpPr>
-        <p:spPr>
-          <a:xfrm>
-            <a:off x="1005840" y="2057400"/>
-            <a:ext cx="7589520" cy="548640"/>
+            <a:endParaRPr lang="en-US" sz="1400" dirty="0"/>
+          </a:p>
+        </p:txBody>
+      </p:sp>
+      <p:sp>
+        <p:nvSpPr>
+          <p:cNvPr id="10" name="Text 8"/>
+          <p:cNvSpPr/>
+          <p:nvPr/>
+        </p:nvSpPr>
+        <p:spPr>
+          <a:xfrm>
+            <a:off x="1051560" y="2057400"/>
+            <a:ext cx="7498080" cy="502920"/>
           </a:xfrm>
           <a:prstGeom prst="rect">
             <a:avLst/>
@@ -5491,7 +6036,7 @@
             <a:r>
               <a:rPr lang="en-US" sz="1400" dirty="0">
                 <a:solidFill>
-                  <a:srgbClr val="1A1A1A"/>
+                  <a:srgbClr val="2A2A2A"/>
                 </a:solidFill>
                 <a:latin typeface="Arial" pitchFamily="34" charset="0"/>
                 <a:ea typeface="Arial" pitchFamily="34" charset="-122"/>
@@ -5505,34 +6050,39 @@
       </p:sp>
       <p:sp>
         <p:nvSpPr>
-          <p:cNvPr id="10" name="Shape 8"/>
-          <p:cNvSpPr/>
-          <p:nvPr/>
-        </p:nvSpPr>
-        <p:spPr>
-          <a:xfrm>
-            <a:off x="457200" y="2880360"/>
-            <a:ext cx="320040" cy="320040"/>
+          <p:cNvPr id="11" name="Shape 9"/>
+          <p:cNvSpPr/>
+          <p:nvPr/>
+        </p:nvSpPr>
+        <p:spPr>
+          <a:xfrm>
+            <a:off x="502920" y="2788920"/>
+            <a:ext cx="365760" cy="365760"/>
           </a:xfrm>
           <a:prstGeom prst="ellipse">
             <a:avLst/>
           </a:prstGeom>
           <a:solidFill>
-            <a:srgbClr val="1A1A1A"/>
+            <a:srgbClr val="1B2A4A"/>
           </a:solidFill>
-          <a:ln/>
-        </p:spPr>
-      </p:sp>
-      <p:sp>
-        <p:nvSpPr>
-          <p:cNvPr id="11" name="Text 9"/>
-          <p:cNvSpPr/>
-          <p:nvPr/>
-        </p:nvSpPr>
-        <p:spPr>
-          <a:xfrm>
-            <a:off x="457200" y="2880360"/>
-            <a:ext cx="320040" cy="320040"/>
+          <a:ln w="12700">
+            <a:solidFill>
+              <a:srgbClr val="1B2A4A"/>
+            </a:solidFill>
+            <a:prstDash val="solid"/>
+          </a:ln>
+        </p:spPr>
+      </p:sp>
+      <p:sp>
+        <p:nvSpPr>
+          <p:cNvPr id="12" name="Text 10"/>
+          <p:cNvSpPr/>
+          <p:nvPr/>
+        </p:nvSpPr>
+        <p:spPr>
+          <a:xfrm>
+            <a:off x="502920" y="2834640"/>
+            <a:ext cx="365760" cy="274320"/>
           </a:xfrm>
           <a:prstGeom prst="rect">
             <a:avLst/>
@@ -5548,9 +6098,9 @@
               <a:buNone/>
             </a:pPr>
             <a:r>
-              <a:rPr lang="en-US" sz="1200" b="1" dirty="0">
-                <a:solidFill>
-                  <a:srgbClr val="F5F5F5"/>
+              <a:rPr lang="en-US" sz="1400" b="1" dirty="0">
+                <a:solidFill>
+                  <a:srgbClr val="C9A227"/>
                 </a:solidFill>
                 <a:latin typeface="Arial" pitchFamily="34" charset="0"/>
                 <a:ea typeface="Arial" pitchFamily="34" charset="-122"/>
@@ -5558,20 +6108,20 @@
               </a:rPr>
               <a:t>3</a:t>
             </a:r>
-            <a:endParaRPr lang="en-US" sz="1200" dirty="0"/>
-          </a:p>
-        </p:txBody>
-      </p:sp>
-      <p:sp>
-        <p:nvSpPr>
-          <p:cNvPr id="12" name="Text 10"/>
-          <p:cNvSpPr/>
-          <p:nvPr/>
-        </p:nvSpPr>
-        <p:spPr>
-          <a:xfrm>
-            <a:off x="1005840" y="2788920"/>
-            <a:ext cx="7589520" cy="548640"/>
+            <a:endParaRPr lang="en-US" sz="1400" dirty="0"/>
+          </a:p>
+        </p:txBody>
+      </p:sp>
+      <p:sp>
+        <p:nvSpPr>
+          <p:cNvPr id="13" name="Text 11"/>
+          <p:cNvSpPr/>
+          <p:nvPr/>
+        </p:nvSpPr>
+        <p:spPr>
+          <a:xfrm>
+            <a:off x="1051560" y="2788920"/>
+            <a:ext cx="7498080" cy="502920"/>
           </a:xfrm>
           <a:prstGeom prst="rect">
             <a:avLst/>
@@ -5589,7 +6139,7 @@
             <a:r>
               <a:rPr lang="en-US" sz="1400" dirty="0">
                 <a:solidFill>
-                  <a:srgbClr val="1A1A1A"/>
+                  <a:srgbClr val="2A2A2A"/>
                 </a:solidFill>
                 <a:latin typeface="Arial" pitchFamily="34" charset="0"/>
                 <a:ea typeface="Arial" pitchFamily="34" charset="-122"/>
@@ -5603,34 +6153,39 @@
       </p:sp>
       <p:sp>
         <p:nvSpPr>
-          <p:cNvPr id="13" name="Shape 11"/>
-          <p:cNvSpPr/>
-          <p:nvPr/>
-        </p:nvSpPr>
-        <p:spPr>
-          <a:xfrm>
-            <a:off x="457200" y="3611880"/>
-            <a:ext cx="320040" cy="320040"/>
+          <p:cNvPr id="14" name="Shape 12"/>
+          <p:cNvSpPr/>
+          <p:nvPr/>
+        </p:nvSpPr>
+        <p:spPr>
+          <a:xfrm>
+            <a:off x="502920" y="3520440"/>
+            <a:ext cx="365760" cy="365760"/>
           </a:xfrm>
           <a:prstGeom prst="ellipse">
             <a:avLst/>
           </a:prstGeom>
           <a:solidFill>
-            <a:srgbClr val="1A1A1A"/>
+            <a:srgbClr val="1B2A4A"/>
           </a:solidFill>
-          <a:ln/>
-        </p:spPr>
-      </p:sp>
-      <p:sp>
-        <p:nvSpPr>
-          <p:cNvPr id="14" name="Text 12"/>
-          <p:cNvSpPr/>
-          <p:nvPr/>
-        </p:nvSpPr>
-        <p:spPr>
-          <a:xfrm>
-            <a:off x="457200" y="3611880"/>
-            <a:ext cx="320040" cy="320040"/>
+          <a:ln w="12700">
+            <a:solidFill>
+              <a:srgbClr val="1B2A4A"/>
+            </a:solidFill>
+            <a:prstDash val="solid"/>
+          </a:ln>
+        </p:spPr>
+      </p:sp>
+      <p:sp>
+        <p:nvSpPr>
+          <p:cNvPr id="15" name="Text 13"/>
+          <p:cNvSpPr/>
+          <p:nvPr/>
+        </p:nvSpPr>
+        <p:spPr>
+          <a:xfrm>
+            <a:off x="502920" y="3566160"/>
+            <a:ext cx="365760" cy="274320"/>
           </a:xfrm>
           <a:prstGeom prst="rect">
             <a:avLst/>
@@ -5646,9 +6201,9 @@
               <a:buNone/>
             </a:pPr>
             <a:r>
-              <a:rPr lang="en-US" sz="1200" b="1" dirty="0">
-                <a:solidFill>
-                  <a:srgbClr val="F5F5F5"/>
+              <a:rPr lang="en-US" sz="1400" b="1" dirty="0">
+                <a:solidFill>
+                  <a:srgbClr val="C9A227"/>
                 </a:solidFill>
                 <a:latin typeface="Arial" pitchFamily="34" charset="0"/>
                 <a:ea typeface="Arial" pitchFamily="34" charset="-122"/>
@@ -5656,20 +6211,20 @@
               </a:rPr>
               <a:t>4</a:t>
             </a:r>
-            <a:endParaRPr lang="en-US" sz="1200" dirty="0"/>
-          </a:p>
-        </p:txBody>
-      </p:sp>
-      <p:sp>
-        <p:nvSpPr>
-          <p:cNvPr id="15" name="Text 13"/>
-          <p:cNvSpPr/>
-          <p:nvPr/>
-        </p:nvSpPr>
-        <p:spPr>
-          <a:xfrm>
-            <a:off x="1005840" y="3520440"/>
-            <a:ext cx="7589520" cy="548640"/>
+            <a:endParaRPr lang="en-US" sz="1400" dirty="0"/>
+          </a:p>
+        </p:txBody>
+      </p:sp>
+      <p:sp>
+        <p:nvSpPr>
+          <p:cNvPr id="16" name="Text 14"/>
+          <p:cNvSpPr/>
+          <p:nvPr/>
+        </p:nvSpPr>
+        <p:spPr>
+          <a:xfrm>
+            <a:off x="1051560" y="3520440"/>
+            <a:ext cx="7498080" cy="502920"/>
           </a:xfrm>
           <a:prstGeom prst="rect">
             <a:avLst/>
@@ -5687,7 +6242,7 @@
             <a:r>
               <a:rPr lang="en-US" sz="1400" dirty="0">
                 <a:solidFill>
-                  <a:srgbClr val="1A1A1A"/>
+                  <a:srgbClr val="2A2A2A"/>
                 </a:solidFill>
                 <a:latin typeface="Arial" pitchFamily="34" charset="0"/>
                 <a:ea typeface="Arial" pitchFamily="34" charset="-122"/>
@@ -5701,32 +6256,32 @@
       </p:sp>
       <p:sp>
         <p:nvSpPr>
-          <p:cNvPr id="16" name="Text 14"/>
+          <p:cNvPr id="17" name="Text 15"/>
           <p:cNvSpPr/>
           <p:nvPr/>
         </p:nvSpPr>
         <p:spPr>
           <a:xfrm>
             <a:off x="457200" y="4800600"/>
-            <a:ext cx="5943600" cy="228600"/>
-          </a:xfrm>
-          <a:prstGeom prst="rect">
-            <a:avLst/>
-          </a:prstGeom>
-          <a:noFill/>
-          <a:ln/>
-        </p:spPr>
-        <p:txBody>
-          <a:bodyPr wrap="square" lIns="0" tIns="0" rIns="0" bIns="0" rtlCol="0" anchor="ctr"/>
-          <a:lstStyle/>
-          <a:p>
-            <a:pPr indent="0" marL="0">
-              <a:buNone/>
-            </a:pPr>
-            <a:r>
-              <a:rPr lang="en-US" sz="1000" dirty="0">
-                <a:solidFill>
-                  <a:srgbClr val="555555"/>
+            <a:ext cx="5943600" cy="256032"/>
+          </a:xfrm>
+          <a:prstGeom prst="rect">
+            <a:avLst/>
+          </a:prstGeom>
+          <a:noFill/>
+          <a:ln/>
+        </p:spPr>
+        <p:txBody>
+          <a:bodyPr wrap="square" lIns="0" tIns="0" rIns="0" bIns="0" rtlCol="0" anchor="ctr"/>
+          <a:lstStyle/>
+          <a:p>
+            <a:pPr indent="0" marL="0">
+              <a:buNone/>
+            </a:pPr>
+            <a:r>
+              <a:rPr lang="en-US" sz="1100" dirty="0">
+                <a:solidFill>
+                  <a:srgbClr val="6A6A6A"/>
                 </a:solidFill>
                 <a:latin typeface="Arial" pitchFamily="34" charset="0"/>
                 <a:ea typeface="Arial" pitchFamily="34" charset="-122"/>
@@ -5734,20 +6289,20 @@
               </a:rPr>
               <a:t>Joshua Konkle  |  Chief of Staff Strategist</a:t>
             </a:r>
-            <a:endParaRPr lang="en-US" sz="1000" dirty="0"/>
-          </a:p>
-        </p:txBody>
-      </p:sp>
-      <p:sp>
-        <p:nvSpPr>
-          <p:cNvPr id="17" name="Text 15"/>
-          <p:cNvSpPr/>
-          <p:nvPr/>
-        </p:nvSpPr>
-        <p:spPr>
-          <a:xfrm>
-            <a:off x="7772400" y="4800600"/>
-            <a:ext cx="914400" cy="228600"/>
+            <a:endParaRPr lang="en-US" sz="1100" dirty="0"/>
+          </a:p>
+        </p:txBody>
+      </p:sp>
+      <p:sp>
+        <p:nvSpPr>
+          <p:cNvPr id="18" name="Text 16"/>
+          <p:cNvSpPr/>
+          <p:nvPr/>
+        </p:nvSpPr>
+        <p:spPr>
+          <a:xfrm>
+            <a:off x="7498080" y="4800600"/>
+            <a:ext cx="1188720" cy="256032"/>
           </a:xfrm>
           <a:prstGeom prst="rect">
             <a:avLst/>
@@ -5763,9 +6318,9 @@
               <a:buNone/>
             </a:pPr>
             <a:r>
-              <a:rPr lang="en-US" sz="1000" dirty="0">
-                <a:solidFill>
-                  <a:srgbClr val="555555"/>
+              <a:rPr lang="en-US" sz="1100" dirty="0">
+                <a:solidFill>
+                  <a:srgbClr val="6A6A6A"/>
                 </a:solidFill>
                 <a:latin typeface="Arial" pitchFamily="34" charset="0"/>
                 <a:ea typeface="Arial" pitchFamily="34" charset="-122"/>
@@ -5773,7 +6328,7 @@
               </a:rPr>
               <a:t>7 / 11</a:t>
             </a:r>
-            <a:endParaRPr lang="en-US" sz="1000" dirty="0"/>
+            <a:endParaRPr lang="en-US" sz="1100" dirty="0"/>
           </a:p>
         </p:txBody>
       </p:sp>
@@ -5788,13 +6343,6 @@
 <file path=ppt/slides/slide8.xml><?xml version="1.0" encoding="utf-8"?>
 <p:sld xmlns:a="http://schemas.openxmlformats.org/drawingml/2006/main" xmlns:r="http://schemas.openxmlformats.org/officeDocument/2006/relationships" xmlns:p="http://schemas.openxmlformats.org/presentationml/2006/main">
   <p:cSld name="Slide 8">
-    <p:bg>
-      <p:bgPr>
-        <a:solidFill>
-          <a:srgbClr val="FFFFFF"/>
-        </a:solidFill>
-      </p:bgPr>
-    </p:bg>
     <p:spTree>
       <p:nvGrpSpPr>
         <p:cNvPr id="1" name=""/>
@@ -5811,63 +6359,24 @@
       </p:grpSpPr>
       <p:sp>
         <p:nvSpPr>
-          <p:cNvPr id="2" name="Text 0"/>
-          <p:cNvSpPr/>
-          <p:nvPr/>
-        </p:nvSpPr>
-        <p:spPr>
-          <a:xfrm>
-            <a:off x="457200" y="228600"/>
-            <a:ext cx="8229600" cy="365760"/>
-          </a:xfrm>
-          <a:prstGeom prst="rect">
-            <a:avLst/>
-          </a:prstGeom>
-          <a:noFill/>
-          <a:ln/>
-        </p:spPr>
-        <p:txBody>
-          <a:bodyPr wrap="square" lIns="0" tIns="0" rIns="0" bIns="0" rtlCol="0" anchor="ctr"/>
-          <a:lstStyle/>
-          <a:p>
-            <a:pPr indent="0" marL="0">
-              <a:buNone/>
-            </a:pPr>
-            <a:r>
-              <a:rPr lang="en-US" sz="2200" b="1" dirty="0">
-                <a:solidFill>
-                  <a:srgbClr val="1A1A1A"/>
-                </a:solidFill>
-                <a:latin typeface="Arial" pitchFamily="34" charset="0"/>
-                <a:ea typeface="Arial" pitchFamily="34" charset="-122"/>
-                <a:cs typeface="Arial" pitchFamily="34" charset="-120"/>
-              </a:rPr>
-              <a:t>Business Model Canvas + Hamiltonian Lens</a:t>
-            </a:r>
-            <a:endParaRPr lang="en-US" sz="2200" dirty="0"/>
-          </a:p>
-        </p:txBody>
-      </p:sp>
-      <p:sp>
-        <p:nvSpPr>
-          <p:cNvPr id="3" name="Shape 1"/>
-          <p:cNvSpPr/>
-          <p:nvPr/>
-        </p:nvSpPr>
-        <p:spPr>
-          <a:xfrm>
-            <a:off x="457200" y="777240"/>
-            <a:ext cx="8229600" cy="777240"/>
+          <p:cNvPr id="2" name="Shape 0"/>
+          <p:cNvSpPr/>
+          <p:nvPr/>
+        </p:nvSpPr>
+        <p:spPr>
+          <a:xfrm>
+            <a:off x="0" y="0"/>
+            <a:ext cx="9144000" cy="5143500"/>
           </a:xfrm>
           <a:prstGeom prst="rect">
             <a:avLst/>
           </a:prstGeom>
           <a:solidFill>
-            <a:srgbClr val="F7F7F7"/>
+            <a:srgbClr val="FFFFFF"/>
           </a:solidFill>
-          <a:ln w="6350">
+          <a:ln w="12700">
             <a:solidFill>
-              <a:srgbClr val="CCCCCC"/>
+              <a:srgbClr val="FFFFFF"/>
             </a:solidFill>
             <a:prstDash val="solid"/>
           </a:ln>
@@ -5875,102 +6384,65 @@
       </p:sp>
       <p:sp>
         <p:nvSpPr>
-          <p:cNvPr id="4" name="Text 2"/>
-          <p:cNvSpPr/>
-          <p:nvPr/>
-        </p:nvSpPr>
-        <p:spPr>
-          <a:xfrm>
-            <a:off x="640080" y="886968"/>
-            <a:ext cx="7863840" cy="274320"/>
-          </a:xfrm>
-          <a:prstGeom prst="rect">
-            <a:avLst/>
-          </a:prstGeom>
-          <a:noFill/>
-          <a:ln/>
-        </p:spPr>
-        <p:txBody>
-          <a:bodyPr wrap="square" lIns="0" tIns="0" rIns="0" bIns="0" rtlCol="0" anchor="ctr"/>
-          <a:lstStyle/>
-          <a:p>
-            <a:pPr indent="0" marL="0">
-              <a:buNone/>
-            </a:pPr>
-            <a:r>
-              <a:rPr lang="en-US" sz="1500" b="1" dirty="0">
-                <a:solidFill>
-                  <a:srgbClr val="1A1A1A"/>
-                </a:solidFill>
-                <a:latin typeface="Arial" pitchFamily="34" charset="0"/>
-                <a:ea typeface="Arial" pitchFamily="34" charset="-122"/>
-                <a:cs typeface="Arial" pitchFamily="34" charset="-120"/>
-              </a:rPr>
-              <a:t>Key Resources</a:t>
-            </a:r>
-            <a:endParaRPr lang="en-US" sz="1500" dirty="0"/>
-          </a:p>
-        </p:txBody>
-      </p:sp>
-      <p:sp>
-        <p:nvSpPr>
-          <p:cNvPr id="5" name="Text 3"/>
-          <p:cNvSpPr/>
-          <p:nvPr/>
-        </p:nvSpPr>
-        <p:spPr>
-          <a:xfrm>
-            <a:off x="640080" y="1161288"/>
-            <a:ext cx="7863840" cy="274320"/>
-          </a:xfrm>
-          <a:prstGeom prst="rect">
-            <a:avLst/>
-          </a:prstGeom>
-          <a:noFill/>
-          <a:ln/>
-        </p:spPr>
-        <p:txBody>
-          <a:bodyPr wrap="square" lIns="0" tIns="0" rIns="0" bIns="0" rtlCol="0" anchor="ctr"/>
-          <a:lstStyle/>
-          <a:p>
-            <a:pPr indent="0" marL="0">
-              <a:buNone/>
-            </a:pPr>
-            <a:r>
-              <a:rPr lang="en-US" sz="1300" dirty="0">
-                <a:solidFill>
-                  <a:srgbClr val="555555"/>
-                </a:solidFill>
-                <a:latin typeface="Arial" pitchFamily="34" charset="0"/>
-                <a:ea typeface="Arial" pitchFamily="34" charset="-122"/>
-                <a:cs typeface="Arial" pitchFamily="34" charset="-120"/>
-              </a:rPr>
-              <a:t>Sovereign American workforce, domestic assets, reliable energy/infrastructure</a:t>
-            </a:r>
-            <a:endParaRPr lang="en-US" sz="1300" dirty="0"/>
-          </a:p>
-        </p:txBody>
-      </p:sp>
-      <p:sp>
-        <p:nvSpPr>
-          <p:cNvPr id="6" name="Shape 4"/>
-          <p:cNvSpPr/>
-          <p:nvPr/>
-        </p:nvSpPr>
-        <p:spPr>
-          <a:xfrm>
-            <a:off x="457200" y="1645920"/>
-            <a:ext cx="8229600" cy="777240"/>
-          </a:xfrm>
-          <a:prstGeom prst="rect">
-            <a:avLst/>
+          <p:cNvPr id="3" name="Text 1"/>
+          <p:cNvSpPr/>
+          <p:nvPr/>
+        </p:nvSpPr>
+        <p:spPr>
+          <a:xfrm>
+            <a:off x="457200" y="228600"/>
+            <a:ext cx="8229600" cy="365760"/>
+          </a:xfrm>
+          <a:prstGeom prst="rect">
+            <a:avLst/>
+          </a:prstGeom>
+          <a:noFill/>
+          <a:ln/>
+        </p:spPr>
+        <p:txBody>
+          <a:bodyPr wrap="square" lIns="0" tIns="0" rIns="0" bIns="0" rtlCol="0" anchor="ctr"/>
+          <a:lstStyle/>
+          <a:p>
+            <a:pPr indent="0" marL="0">
+              <a:buNone/>
+            </a:pPr>
+            <a:r>
+              <a:rPr lang="en-US" sz="2200" b="1" dirty="0">
+                <a:solidFill>
+                  <a:srgbClr val="1B2A4A"/>
+                </a:solidFill>
+                <a:latin typeface="Arial" pitchFamily="34" charset="0"/>
+                <a:ea typeface="Arial" pitchFamily="34" charset="-122"/>
+                <a:cs typeface="Arial" pitchFamily="34" charset="-120"/>
+              </a:rPr>
+              <a:t>Business Model Canvas + Hamiltonian Lens</a:t>
+            </a:r>
+            <a:endParaRPr lang="en-US" sz="2200" dirty="0"/>
+          </a:p>
+        </p:txBody>
+      </p:sp>
+      <p:sp>
+        <p:nvSpPr>
+          <p:cNvPr id="4" name="Shape 2"/>
+          <p:cNvSpPr/>
+          <p:nvPr/>
+        </p:nvSpPr>
+        <p:spPr>
+          <a:xfrm>
+            <a:off x="457200" y="914400"/>
+            <a:ext cx="3977640" cy="1463040"/>
+          </a:xfrm>
+          <a:prstGeom prst="roundRect">
+            <a:avLst>
+              <a:gd name="adj" fmla="val 5000"/>
+            </a:avLst>
           </a:prstGeom>
           <a:solidFill>
-            <a:srgbClr val="FFFFFF"/>
+            <a:srgbClr val="F7F5F0"/>
           </a:solidFill>
-          <a:ln w="6350">
+          <a:ln w="12700">
             <a:solidFill>
-              <a:srgbClr val="CCCCCC"/>
+              <a:srgbClr val="F7F5F0"/>
             </a:solidFill>
             <a:prstDash val="solid"/>
           </a:ln>
@@ -5978,102 +6450,24 @@
       </p:sp>
       <p:sp>
         <p:nvSpPr>
-          <p:cNvPr id="7" name="Text 5"/>
-          <p:cNvSpPr/>
-          <p:nvPr/>
-        </p:nvSpPr>
-        <p:spPr>
-          <a:xfrm>
-            <a:off x="640080" y="1755648"/>
-            <a:ext cx="7863840" cy="274320"/>
-          </a:xfrm>
-          <a:prstGeom prst="rect">
-            <a:avLst/>
-          </a:prstGeom>
-          <a:noFill/>
-          <a:ln/>
-        </p:spPr>
-        <p:txBody>
-          <a:bodyPr wrap="square" lIns="0" tIns="0" rIns="0" bIns="0" rtlCol="0" anchor="ctr"/>
-          <a:lstStyle/>
-          <a:p>
-            <a:pPr indent="0" marL="0">
-              <a:buNone/>
-            </a:pPr>
-            <a:r>
-              <a:rPr lang="en-US" sz="1500" b="1" dirty="0">
-                <a:solidFill>
-                  <a:srgbClr val="1A1A1A"/>
-                </a:solidFill>
-                <a:latin typeface="Arial" pitchFamily="34" charset="0"/>
-                <a:ea typeface="Arial" pitchFamily="34" charset="-122"/>
-                <a:cs typeface="Arial" pitchFamily="34" charset="-120"/>
-              </a:rPr>
-              <a:t>Key Activities</a:t>
-            </a:r>
-            <a:endParaRPr lang="en-US" sz="1500" dirty="0"/>
-          </a:p>
-        </p:txBody>
-      </p:sp>
-      <p:sp>
-        <p:nvSpPr>
-          <p:cNvPr id="8" name="Text 6"/>
-          <p:cNvSpPr/>
-          <p:nvPr/>
-        </p:nvSpPr>
-        <p:spPr>
-          <a:xfrm>
-            <a:off x="640080" y="2029968"/>
-            <a:ext cx="7863840" cy="274320"/>
-          </a:xfrm>
-          <a:prstGeom prst="rect">
-            <a:avLst/>
-          </a:prstGeom>
-          <a:noFill/>
-          <a:ln/>
-        </p:spPr>
-        <p:txBody>
-          <a:bodyPr wrap="square" lIns="0" tIns="0" rIns="0" bIns="0" rtlCol="0" anchor="ctr"/>
-          <a:lstStyle/>
-          <a:p>
-            <a:pPr indent="0" marL="0">
-              <a:buNone/>
-            </a:pPr>
-            <a:r>
-              <a:rPr lang="en-US" sz="1300" dirty="0">
-                <a:solidFill>
-                  <a:srgbClr val="555555"/>
-                </a:solidFill>
-                <a:latin typeface="Arial" pitchFamily="34" charset="0"/>
-                <a:ea typeface="Arial" pitchFamily="34" charset="-122"/>
-                <a:cs typeface="Arial" pitchFamily="34" charset="-120"/>
-              </a:rPr>
-              <a:t>Build lasting domestic capability, quality, innovation, and resilience</a:t>
-            </a:r>
-            <a:endParaRPr lang="en-US" sz="1300" dirty="0"/>
-          </a:p>
-        </p:txBody>
-      </p:sp>
-      <p:sp>
-        <p:nvSpPr>
-          <p:cNvPr id="9" name="Shape 7"/>
-          <p:cNvSpPr/>
-          <p:nvPr/>
-        </p:nvSpPr>
-        <p:spPr>
-          <a:xfrm>
-            <a:off x="457200" y="2514600"/>
-            <a:ext cx="8229600" cy="777240"/>
+          <p:cNvPr id="5" name="Shape 3"/>
+          <p:cNvSpPr/>
+          <p:nvPr/>
+        </p:nvSpPr>
+        <p:spPr>
+          <a:xfrm>
+            <a:off x="457200" y="914400"/>
+            <a:ext cx="3977640" cy="73152"/>
           </a:xfrm>
           <a:prstGeom prst="rect">
             <a:avLst/>
           </a:prstGeom>
           <a:solidFill>
-            <a:srgbClr val="F7F7F7"/>
+            <a:srgbClr val="C9A227"/>
           </a:solidFill>
-          <a:ln w="6350">
+          <a:ln w="12700">
             <a:solidFill>
-              <a:srgbClr val="CCCCCC"/>
+              <a:srgbClr val="C9A227"/>
             </a:solidFill>
             <a:prstDash val="solid"/>
           </a:ln>
@@ -6081,14 +6475,14 @@
       </p:sp>
       <p:sp>
         <p:nvSpPr>
-          <p:cNvPr id="10" name="Text 8"/>
-          <p:cNvSpPr/>
-          <p:nvPr/>
-        </p:nvSpPr>
-        <p:spPr>
-          <a:xfrm>
-            <a:off x="640080" y="2624328"/>
-            <a:ext cx="7863840" cy="274320"/>
+          <p:cNvPr id="6" name="Text 4"/>
+          <p:cNvSpPr/>
+          <p:nvPr/>
+        </p:nvSpPr>
+        <p:spPr>
+          <a:xfrm>
+            <a:off x="685800" y="1188720"/>
+            <a:ext cx="3520440" cy="320040"/>
           </a:xfrm>
           <a:prstGeom prst="rect">
             <a:avLst/>
@@ -6106,13 +6500,13 @@
             <a:r>
               <a:rPr lang="en-US" sz="1500" b="1" dirty="0">
                 <a:solidFill>
-                  <a:srgbClr val="1A1A1A"/>
-                </a:solidFill>
-                <a:latin typeface="Arial" pitchFamily="34" charset="0"/>
-                <a:ea typeface="Arial" pitchFamily="34" charset="-122"/>
-                <a:cs typeface="Arial" pitchFamily="34" charset="-120"/>
-              </a:rPr>
-              <a:t>Value Propositions</a:t>
+                  <a:srgbClr val="1B2A4A"/>
+                </a:solidFill>
+                <a:latin typeface="Arial" pitchFamily="34" charset="0"/>
+                <a:ea typeface="Arial" pitchFamily="34" charset="-122"/>
+                <a:cs typeface="Arial" pitchFamily="34" charset="-120"/>
+              </a:rPr>
+              <a:t>Key Resources</a:t>
             </a:r>
             <a:endParaRPr lang="en-US" sz="1500" dirty="0"/>
           </a:p>
@@ -6120,14 +6514,14 @@
       </p:sp>
       <p:sp>
         <p:nvSpPr>
-          <p:cNvPr id="11" name="Text 9"/>
-          <p:cNvSpPr/>
-          <p:nvPr/>
-        </p:nvSpPr>
-        <p:spPr>
-          <a:xfrm>
-            <a:off x="640080" y="2898648"/>
-            <a:ext cx="7863840" cy="274320"/>
+          <p:cNvPr id="7" name="Text 5"/>
+          <p:cNvSpPr/>
+          <p:nvPr/>
+        </p:nvSpPr>
+        <p:spPr>
+          <a:xfrm>
+            <a:off x="685800" y="1554480"/>
+            <a:ext cx="3520440" cy="594360"/>
           </a:xfrm>
           <a:prstGeom prst="rect">
             <a:avLst/>
@@ -6145,13 +6539,13 @@
             <a:r>
               <a:rPr lang="en-US" sz="1300" dirty="0">
                 <a:solidFill>
-                  <a:srgbClr val="555555"/>
-                </a:solidFill>
-                <a:latin typeface="Arial" pitchFamily="34" charset="0"/>
-                <a:ea typeface="Arial" pitchFamily="34" charset="-122"/>
-                <a:cs typeface="Arial" pitchFamily="34" charset="-120"/>
-              </a:rPr>
-              <a:t>Reliability, quality, speed, innovation, reduced risk</a:t>
+                  <a:srgbClr val="2A2A2A"/>
+                </a:solidFill>
+                <a:latin typeface="Arial" pitchFamily="34" charset="0"/>
+                <a:ea typeface="Arial" pitchFamily="34" charset="-122"/>
+                <a:cs typeface="Arial" pitchFamily="34" charset="-120"/>
+              </a:rPr>
+              <a:t>Sovereign American workforce, domestic assets, reliable energy/infrastructure</a:t>
             </a:r>
             <a:endParaRPr lang="en-US" sz="1300" dirty="0"/>
           </a:p>
@@ -6159,24 +6553,26 @@
       </p:sp>
       <p:sp>
         <p:nvSpPr>
-          <p:cNvPr id="12" name="Shape 10"/>
-          <p:cNvSpPr/>
-          <p:nvPr/>
-        </p:nvSpPr>
-        <p:spPr>
-          <a:xfrm>
-            <a:off x="457200" y="3383280"/>
-            <a:ext cx="8229600" cy="777240"/>
-          </a:xfrm>
-          <a:prstGeom prst="rect">
-            <a:avLst/>
+          <p:cNvPr id="8" name="Shape 6"/>
+          <p:cNvSpPr/>
+          <p:nvPr/>
+        </p:nvSpPr>
+        <p:spPr>
+          <a:xfrm>
+            <a:off x="4663440" y="914400"/>
+            <a:ext cx="3977640" cy="1463040"/>
+          </a:xfrm>
+          <a:prstGeom prst="roundRect">
+            <a:avLst>
+              <a:gd name="adj" fmla="val 5000"/>
+            </a:avLst>
           </a:prstGeom>
           <a:solidFill>
-            <a:srgbClr val="FFFFFF"/>
+            <a:srgbClr val="F7F5F0"/>
           </a:solidFill>
-          <a:ln w="6350">
+          <a:ln w="12700">
             <a:solidFill>
-              <a:srgbClr val="CCCCCC"/>
+              <a:srgbClr val="F7F5F0"/>
             </a:solidFill>
             <a:prstDash val="solid"/>
           </a:ln>
@@ -6184,14 +6580,39 @@
       </p:sp>
       <p:sp>
         <p:nvSpPr>
-          <p:cNvPr id="13" name="Text 11"/>
-          <p:cNvSpPr/>
-          <p:nvPr/>
-        </p:nvSpPr>
-        <p:spPr>
-          <a:xfrm>
-            <a:off x="640080" y="3493008"/>
-            <a:ext cx="7863840" cy="274320"/>
+          <p:cNvPr id="9" name="Shape 7"/>
+          <p:cNvSpPr/>
+          <p:nvPr/>
+        </p:nvSpPr>
+        <p:spPr>
+          <a:xfrm>
+            <a:off x="4663440" y="914400"/>
+            <a:ext cx="3977640" cy="73152"/>
+          </a:xfrm>
+          <a:prstGeom prst="rect">
+            <a:avLst/>
+          </a:prstGeom>
+          <a:solidFill>
+            <a:srgbClr val="C9A227"/>
+          </a:solidFill>
+          <a:ln w="12700">
+            <a:solidFill>
+              <a:srgbClr val="C9A227"/>
+            </a:solidFill>
+            <a:prstDash val="solid"/>
+          </a:ln>
+        </p:spPr>
+      </p:sp>
+      <p:sp>
+        <p:nvSpPr>
+          <p:cNvPr id="10" name="Text 8"/>
+          <p:cNvSpPr/>
+          <p:nvPr/>
+        </p:nvSpPr>
+        <p:spPr>
+          <a:xfrm>
+            <a:off x="4892040" y="1188720"/>
+            <a:ext cx="3520440" cy="320040"/>
           </a:xfrm>
           <a:prstGeom prst="rect">
             <a:avLst/>
@@ -6209,7 +6630,267 @@
             <a:r>
               <a:rPr lang="en-US" sz="1500" b="1" dirty="0">
                 <a:solidFill>
-                  <a:srgbClr val="1A1A1A"/>
+                  <a:srgbClr val="1B2A4A"/>
+                </a:solidFill>
+                <a:latin typeface="Arial" pitchFamily="34" charset="0"/>
+                <a:ea typeface="Arial" pitchFamily="34" charset="-122"/>
+                <a:cs typeface="Arial" pitchFamily="34" charset="-120"/>
+              </a:rPr>
+              <a:t>Key Activities</a:t>
+            </a:r>
+            <a:endParaRPr lang="en-US" sz="1500" dirty="0"/>
+          </a:p>
+        </p:txBody>
+      </p:sp>
+      <p:sp>
+        <p:nvSpPr>
+          <p:cNvPr id="11" name="Text 9"/>
+          <p:cNvSpPr/>
+          <p:nvPr/>
+        </p:nvSpPr>
+        <p:spPr>
+          <a:xfrm>
+            <a:off x="4892040" y="1554480"/>
+            <a:ext cx="3520440" cy="594360"/>
+          </a:xfrm>
+          <a:prstGeom prst="rect">
+            <a:avLst/>
+          </a:prstGeom>
+          <a:noFill/>
+          <a:ln/>
+        </p:spPr>
+        <p:txBody>
+          <a:bodyPr wrap="square" lIns="0" tIns="0" rIns="0" bIns="0" rtlCol="0" anchor="ctr"/>
+          <a:lstStyle/>
+          <a:p>
+            <a:pPr indent="0" marL="0">
+              <a:buNone/>
+            </a:pPr>
+            <a:r>
+              <a:rPr lang="en-US" sz="1300" dirty="0">
+                <a:solidFill>
+                  <a:srgbClr val="2A2A2A"/>
+                </a:solidFill>
+                <a:latin typeface="Arial" pitchFamily="34" charset="0"/>
+                <a:ea typeface="Arial" pitchFamily="34" charset="-122"/>
+                <a:cs typeface="Arial" pitchFamily="34" charset="-120"/>
+              </a:rPr>
+              <a:t>Build lasting domestic capability, quality, innovation, and resilience</a:t>
+            </a:r>
+            <a:endParaRPr lang="en-US" sz="1300" dirty="0"/>
+          </a:p>
+        </p:txBody>
+      </p:sp>
+      <p:sp>
+        <p:nvSpPr>
+          <p:cNvPr id="12" name="Shape 10"/>
+          <p:cNvSpPr/>
+          <p:nvPr/>
+        </p:nvSpPr>
+        <p:spPr>
+          <a:xfrm>
+            <a:off x="457200" y="2560320"/>
+            <a:ext cx="3977640" cy="1463040"/>
+          </a:xfrm>
+          <a:prstGeom prst="roundRect">
+            <a:avLst>
+              <a:gd name="adj" fmla="val 5000"/>
+            </a:avLst>
+          </a:prstGeom>
+          <a:solidFill>
+            <a:srgbClr val="F7F5F0"/>
+          </a:solidFill>
+          <a:ln w="12700">
+            <a:solidFill>
+              <a:srgbClr val="F7F5F0"/>
+            </a:solidFill>
+            <a:prstDash val="solid"/>
+          </a:ln>
+        </p:spPr>
+      </p:sp>
+      <p:sp>
+        <p:nvSpPr>
+          <p:cNvPr id="13" name="Shape 11"/>
+          <p:cNvSpPr/>
+          <p:nvPr/>
+        </p:nvSpPr>
+        <p:spPr>
+          <a:xfrm>
+            <a:off x="457200" y="2560320"/>
+            <a:ext cx="3977640" cy="73152"/>
+          </a:xfrm>
+          <a:prstGeom prst="rect">
+            <a:avLst/>
+          </a:prstGeom>
+          <a:solidFill>
+            <a:srgbClr val="C9A227"/>
+          </a:solidFill>
+          <a:ln w="12700">
+            <a:solidFill>
+              <a:srgbClr val="C9A227"/>
+            </a:solidFill>
+            <a:prstDash val="solid"/>
+          </a:ln>
+        </p:spPr>
+      </p:sp>
+      <p:sp>
+        <p:nvSpPr>
+          <p:cNvPr id="14" name="Text 12"/>
+          <p:cNvSpPr/>
+          <p:nvPr/>
+        </p:nvSpPr>
+        <p:spPr>
+          <a:xfrm>
+            <a:off x="685800" y="2834640"/>
+            <a:ext cx="3520440" cy="320040"/>
+          </a:xfrm>
+          <a:prstGeom prst="rect">
+            <a:avLst/>
+          </a:prstGeom>
+          <a:noFill/>
+          <a:ln/>
+        </p:spPr>
+        <p:txBody>
+          <a:bodyPr wrap="square" lIns="0" tIns="0" rIns="0" bIns="0" rtlCol="0" anchor="ctr"/>
+          <a:lstStyle/>
+          <a:p>
+            <a:pPr indent="0" marL="0">
+              <a:buNone/>
+            </a:pPr>
+            <a:r>
+              <a:rPr lang="en-US" sz="1500" b="1" dirty="0">
+                <a:solidFill>
+                  <a:srgbClr val="1B2A4A"/>
+                </a:solidFill>
+                <a:latin typeface="Arial" pitchFamily="34" charset="0"/>
+                <a:ea typeface="Arial" pitchFamily="34" charset="-122"/>
+                <a:cs typeface="Arial" pitchFamily="34" charset="-120"/>
+              </a:rPr>
+              <a:t>Value Propositions</a:t>
+            </a:r>
+            <a:endParaRPr lang="en-US" sz="1500" dirty="0"/>
+          </a:p>
+        </p:txBody>
+      </p:sp>
+      <p:sp>
+        <p:nvSpPr>
+          <p:cNvPr id="15" name="Text 13"/>
+          <p:cNvSpPr/>
+          <p:nvPr/>
+        </p:nvSpPr>
+        <p:spPr>
+          <a:xfrm>
+            <a:off x="685800" y="3200400"/>
+            <a:ext cx="3520440" cy="594360"/>
+          </a:xfrm>
+          <a:prstGeom prst="rect">
+            <a:avLst/>
+          </a:prstGeom>
+          <a:noFill/>
+          <a:ln/>
+        </p:spPr>
+        <p:txBody>
+          <a:bodyPr wrap="square" lIns="0" tIns="0" rIns="0" bIns="0" rtlCol="0" anchor="ctr"/>
+          <a:lstStyle/>
+          <a:p>
+            <a:pPr indent="0" marL="0">
+              <a:buNone/>
+            </a:pPr>
+            <a:r>
+              <a:rPr lang="en-US" sz="1300" dirty="0">
+                <a:solidFill>
+                  <a:srgbClr val="2A2A2A"/>
+                </a:solidFill>
+                <a:latin typeface="Arial" pitchFamily="34" charset="0"/>
+                <a:ea typeface="Arial" pitchFamily="34" charset="-122"/>
+                <a:cs typeface="Arial" pitchFamily="34" charset="-120"/>
+              </a:rPr>
+              <a:t>Reliability, quality, speed, innovation, reduced risk</a:t>
+            </a:r>
+            <a:endParaRPr lang="en-US" sz="1300" dirty="0"/>
+          </a:p>
+        </p:txBody>
+      </p:sp>
+      <p:sp>
+        <p:nvSpPr>
+          <p:cNvPr id="16" name="Shape 14"/>
+          <p:cNvSpPr/>
+          <p:nvPr/>
+        </p:nvSpPr>
+        <p:spPr>
+          <a:xfrm>
+            <a:off x="4663440" y="2560320"/>
+            <a:ext cx="3977640" cy="1463040"/>
+          </a:xfrm>
+          <a:prstGeom prst="roundRect">
+            <a:avLst>
+              <a:gd name="adj" fmla="val 5000"/>
+            </a:avLst>
+          </a:prstGeom>
+          <a:solidFill>
+            <a:srgbClr val="F7F5F0"/>
+          </a:solidFill>
+          <a:ln w="12700">
+            <a:solidFill>
+              <a:srgbClr val="F7F5F0"/>
+            </a:solidFill>
+            <a:prstDash val="solid"/>
+          </a:ln>
+        </p:spPr>
+      </p:sp>
+      <p:sp>
+        <p:nvSpPr>
+          <p:cNvPr id="17" name="Shape 15"/>
+          <p:cNvSpPr/>
+          <p:nvPr/>
+        </p:nvSpPr>
+        <p:spPr>
+          <a:xfrm>
+            <a:off x="4663440" y="2560320"/>
+            <a:ext cx="3977640" cy="73152"/>
+          </a:xfrm>
+          <a:prstGeom prst="rect">
+            <a:avLst/>
+          </a:prstGeom>
+          <a:solidFill>
+            <a:srgbClr val="C9A227"/>
+          </a:solidFill>
+          <a:ln w="12700">
+            <a:solidFill>
+              <a:srgbClr val="C9A227"/>
+            </a:solidFill>
+            <a:prstDash val="solid"/>
+          </a:ln>
+        </p:spPr>
+      </p:sp>
+      <p:sp>
+        <p:nvSpPr>
+          <p:cNvPr id="18" name="Text 16"/>
+          <p:cNvSpPr/>
+          <p:nvPr/>
+        </p:nvSpPr>
+        <p:spPr>
+          <a:xfrm>
+            <a:off x="4892040" y="2834640"/>
+            <a:ext cx="3520440" cy="320040"/>
+          </a:xfrm>
+          <a:prstGeom prst="rect">
+            <a:avLst/>
+          </a:prstGeom>
+          <a:noFill/>
+          <a:ln/>
+        </p:spPr>
+        <p:txBody>
+          <a:bodyPr wrap="square" lIns="0" tIns="0" rIns="0" bIns="0" rtlCol="0" anchor="ctr"/>
+          <a:lstStyle/>
+          <a:p>
+            <a:pPr indent="0" marL="0">
+              <a:buNone/>
+            </a:pPr>
+            <a:r>
+              <a:rPr lang="en-US" sz="1500" b="1" dirty="0">
+                <a:solidFill>
+                  <a:srgbClr val="1B2A4A"/>
                 </a:solidFill>
                 <a:latin typeface="Arial" pitchFamily="34" charset="0"/>
                 <a:ea typeface="Arial" pitchFamily="34" charset="-122"/>
@@ -6223,14 +6904,14 @@
       </p:sp>
       <p:sp>
         <p:nvSpPr>
-          <p:cNvPr id="14" name="Text 12"/>
-          <p:cNvSpPr/>
-          <p:nvPr/>
-        </p:nvSpPr>
-        <p:spPr>
-          <a:xfrm>
-            <a:off x="640080" y="3767328"/>
-            <a:ext cx="7863840" cy="274320"/>
+          <p:cNvPr id="19" name="Text 17"/>
+          <p:cNvSpPr/>
+          <p:nvPr/>
+        </p:nvSpPr>
+        <p:spPr>
+          <a:xfrm>
+            <a:off x="4892040" y="3200400"/>
+            <a:ext cx="3520440" cy="594360"/>
           </a:xfrm>
           <a:prstGeom prst="rect">
             <a:avLst/>
@@ -6248,7 +6929,7 @@
             <a:r>
               <a:rPr lang="en-US" sz="1300" dirty="0">
                 <a:solidFill>
-                  <a:srgbClr val="555555"/>
+                  <a:srgbClr val="2A2A2A"/>
                 </a:solidFill>
                 <a:latin typeface="Arial" pitchFamily="34" charset="0"/>
                 <a:ea typeface="Arial" pitchFamily="34" charset="-122"/>
@@ -6262,32 +6943,32 @@
       </p:sp>
       <p:sp>
         <p:nvSpPr>
-          <p:cNvPr id="15" name="Text 13"/>
+          <p:cNvPr id="20" name="Text 18"/>
           <p:cNvSpPr/>
           <p:nvPr/>
         </p:nvSpPr>
         <p:spPr>
           <a:xfrm>
             <a:off x="457200" y="4800600"/>
-            <a:ext cx="5943600" cy="228600"/>
-          </a:xfrm>
-          <a:prstGeom prst="rect">
-            <a:avLst/>
-          </a:prstGeom>
-          <a:noFill/>
-          <a:ln/>
-        </p:spPr>
-        <p:txBody>
-          <a:bodyPr wrap="square" lIns="0" tIns="0" rIns="0" bIns="0" rtlCol="0" anchor="ctr"/>
-          <a:lstStyle/>
-          <a:p>
-            <a:pPr indent="0" marL="0">
-              <a:buNone/>
-            </a:pPr>
-            <a:r>
-              <a:rPr lang="en-US" sz="1000" dirty="0">
-                <a:solidFill>
-                  <a:srgbClr val="555555"/>
+            <a:ext cx="5943600" cy="256032"/>
+          </a:xfrm>
+          <a:prstGeom prst="rect">
+            <a:avLst/>
+          </a:prstGeom>
+          <a:noFill/>
+          <a:ln/>
+        </p:spPr>
+        <p:txBody>
+          <a:bodyPr wrap="square" lIns="0" tIns="0" rIns="0" bIns="0" rtlCol="0" anchor="ctr"/>
+          <a:lstStyle/>
+          <a:p>
+            <a:pPr indent="0" marL="0">
+              <a:buNone/>
+            </a:pPr>
+            <a:r>
+              <a:rPr lang="en-US" sz="1100" dirty="0">
+                <a:solidFill>
+                  <a:srgbClr val="6A6A6A"/>
                 </a:solidFill>
                 <a:latin typeface="Arial" pitchFamily="34" charset="0"/>
                 <a:ea typeface="Arial" pitchFamily="34" charset="-122"/>
@@ -6295,20 +6976,20 @@
               </a:rPr>
               <a:t>Joshua Konkle  |  Chief of Staff Strategist</a:t>
             </a:r>
-            <a:endParaRPr lang="en-US" sz="1000" dirty="0"/>
-          </a:p>
-        </p:txBody>
-      </p:sp>
-      <p:sp>
-        <p:nvSpPr>
-          <p:cNvPr id="16" name="Text 14"/>
-          <p:cNvSpPr/>
-          <p:nvPr/>
-        </p:nvSpPr>
-        <p:spPr>
-          <a:xfrm>
-            <a:off x="7772400" y="4800600"/>
-            <a:ext cx="914400" cy="228600"/>
+            <a:endParaRPr lang="en-US" sz="1100" dirty="0"/>
+          </a:p>
+        </p:txBody>
+      </p:sp>
+      <p:sp>
+        <p:nvSpPr>
+          <p:cNvPr id="21" name="Text 19"/>
+          <p:cNvSpPr/>
+          <p:nvPr/>
+        </p:nvSpPr>
+        <p:spPr>
+          <a:xfrm>
+            <a:off x="7498080" y="4800600"/>
+            <a:ext cx="1188720" cy="256032"/>
           </a:xfrm>
           <a:prstGeom prst="rect">
             <a:avLst/>
@@ -6324,9 +7005,9 @@
               <a:buNone/>
             </a:pPr>
             <a:r>
-              <a:rPr lang="en-US" sz="1000" dirty="0">
-                <a:solidFill>
-                  <a:srgbClr val="555555"/>
+              <a:rPr lang="en-US" sz="1100" dirty="0">
+                <a:solidFill>
+                  <a:srgbClr val="6A6A6A"/>
                 </a:solidFill>
                 <a:latin typeface="Arial" pitchFamily="34" charset="0"/>
                 <a:ea typeface="Arial" pitchFamily="34" charset="-122"/>
@@ -6334,7 +7015,7 @@
               </a:rPr>
               <a:t>8 / 11</a:t>
             </a:r>
-            <a:endParaRPr lang="en-US" sz="1000" dirty="0"/>
+            <a:endParaRPr lang="en-US" sz="1100" dirty="0"/>
           </a:p>
         </p:txBody>
       </p:sp>
@@ -6349,13 +7030,6 @@
 <file path=ppt/slides/slide9.xml><?xml version="1.0" encoding="utf-8"?>
 <p:sld xmlns:a="http://schemas.openxmlformats.org/drawingml/2006/main" xmlns:r="http://schemas.openxmlformats.org/officeDocument/2006/relationships" xmlns:p="http://schemas.openxmlformats.org/presentationml/2006/main">
   <p:cSld name="Slide 9">
-    <p:bg>
-      <p:bgPr>
-        <a:solidFill>
-          <a:srgbClr val="FFFFFF"/>
-        </a:solidFill>
-      </p:bgPr>
-    </p:bg>
     <p:spTree>
       <p:nvGrpSpPr>
         <p:cNvPr id="1" name=""/>
@@ -6372,32 +7046,57 @@
       </p:grpSpPr>
       <p:sp>
         <p:nvSpPr>
-          <p:cNvPr id="2" name="Text 0"/>
-          <p:cNvSpPr/>
-          <p:nvPr/>
-        </p:nvSpPr>
-        <p:spPr>
-          <a:xfrm>
-            <a:off x="457200" y="320040"/>
-            <a:ext cx="8229600" cy="457200"/>
-          </a:xfrm>
-          <a:prstGeom prst="rect">
-            <a:avLst/>
-          </a:prstGeom>
-          <a:noFill/>
-          <a:ln/>
-        </p:spPr>
-        <p:txBody>
-          <a:bodyPr wrap="square" lIns="0" tIns="0" rIns="0" bIns="0" rtlCol="0" anchor="ctr"/>
-          <a:lstStyle/>
-          <a:p>
-            <a:pPr indent="0" marL="0">
-              <a:buNone/>
-            </a:pPr>
-            <a:r>
-              <a:rPr lang="en-US" sz="2600" b="1" dirty="0">
-                <a:solidFill>
-                  <a:srgbClr val="1A1A1A"/>
+          <p:cNvPr id="2" name="Shape 0"/>
+          <p:cNvSpPr/>
+          <p:nvPr/>
+        </p:nvSpPr>
+        <p:spPr>
+          <a:xfrm>
+            <a:off x="0" y="0"/>
+            <a:ext cx="9144000" cy="5143500"/>
+          </a:xfrm>
+          <a:prstGeom prst="rect">
+            <a:avLst/>
+          </a:prstGeom>
+          <a:solidFill>
+            <a:srgbClr val="FFFFFF"/>
+          </a:solidFill>
+          <a:ln w="12700">
+            <a:solidFill>
+              <a:srgbClr val="FFFFFF"/>
+            </a:solidFill>
+            <a:prstDash val="solid"/>
+          </a:ln>
+        </p:spPr>
+      </p:sp>
+      <p:sp>
+        <p:nvSpPr>
+          <p:cNvPr id="3" name="Text 1"/>
+          <p:cNvSpPr/>
+          <p:nvPr/>
+        </p:nvSpPr>
+        <p:spPr>
+          <a:xfrm>
+            <a:off x="457200" y="274320"/>
+            <a:ext cx="8229600" cy="411480"/>
+          </a:xfrm>
+          <a:prstGeom prst="rect">
+            <a:avLst/>
+          </a:prstGeom>
+          <a:noFill/>
+          <a:ln/>
+        </p:spPr>
+        <p:txBody>
+          <a:bodyPr wrap="square" lIns="0" tIns="0" rIns="0" bIns="0" rtlCol="0" anchor="ctr"/>
+          <a:lstStyle/>
+          <a:p>
+            <a:pPr indent="0" marL="0">
+              <a:buNone/>
+            </a:pPr>
+            <a:r>
+              <a:rPr lang="en-US" sz="2400" b="1" dirty="0">
+                <a:solidFill>
+                  <a:srgbClr val="1B2A4A"/>
                 </a:solidFill>
                 <a:latin typeface="Arial" pitchFamily="34" charset="0"/>
                 <a:ea typeface="Arial" pitchFamily="34" charset="-122"/>
@@ -6405,58 +7104,65 @@
               </a:rPr>
               <a:t>Three Highest-Leverage Moves</a:t>
             </a:r>
-            <a:endParaRPr lang="en-US" sz="2600" dirty="0"/>
-          </a:p>
-        </p:txBody>
-      </p:sp>
-      <p:sp>
-        <p:nvSpPr>
-          <p:cNvPr id="3" name="Shape 1"/>
-          <p:cNvSpPr/>
-          <p:nvPr/>
-        </p:nvSpPr>
-        <p:spPr>
-          <a:xfrm>
-            <a:off x="457200" y="1051560"/>
-            <a:ext cx="640080" cy="640080"/>
-          </a:xfrm>
-          <a:prstGeom prst="ellipse">
-            <a:avLst/>
+            <a:endParaRPr lang="en-US" sz="2400" dirty="0"/>
+          </a:p>
+        </p:txBody>
+      </p:sp>
+      <p:sp>
+        <p:nvSpPr>
+          <p:cNvPr id="4" name="Shape 2"/>
+          <p:cNvSpPr/>
+          <p:nvPr/>
+        </p:nvSpPr>
+        <p:spPr>
+          <a:xfrm>
+            <a:off x="457200" y="960120"/>
+            <a:ext cx="8229600" cy="960120"/>
+          </a:xfrm>
+          <a:prstGeom prst="roundRect">
+            <a:avLst>
+              <a:gd name="adj" fmla="val 7619"/>
+            </a:avLst>
           </a:prstGeom>
           <a:solidFill>
-            <a:srgbClr val="1A1A1A"/>
+            <a:srgbClr val="1B2A4A"/>
           </a:solidFill>
-          <a:ln/>
-        </p:spPr>
-      </p:sp>
-      <p:sp>
-        <p:nvSpPr>
-          <p:cNvPr id="4" name="Text 2"/>
-          <p:cNvSpPr/>
-          <p:nvPr/>
-        </p:nvSpPr>
-        <p:spPr>
-          <a:xfrm>
-            <a:off x="457200" y="1051560"/>
-            <a:ext cx="640080" cy="640080"/>
-          </a:xfrm>
-          <a:prstGeom prst="rect">
-            <a:avLst/>
-          </a:prstGeom>
-          <a:noFill/>
-          <a:ln/>
-        </p:spPr>
-        <p:txBody>
-          <a:bodyPr wrap="square" lIns="0" tIns="0" rIns="0" bIns="0" rtlCol="0" anchor="ctr"/>
-          <a:lstStyle/>
-          <a:p>
-            <a:pPr algn="ctr" indent="0" marL="0">
+          <a:ln w="12700">
+            <a:solidFill>
+              <a:srgbClr val="1B2A4A"/>
+            </a:solidFill>
+            <a:prstDash val="solid"/>
+          </a:ln>
+        </p:spPr>
+      </p:sp>
+      <p:sp>
+        <p:nvSpPr>
+          <p:cNvPr id="5" name="Text 3"/>
+          <p:cNvSpPr/>
+          <p:nvPr/>
+        </p:nvSpPr>
+        <p:spPr>
+          <a:xfrm>
+            <a:off x="640080" y="1234440"/>
+            <a:ext cx="457200" cy="411480"/>
+          </a:xfrm>
+          <a:prstGeom prst="rect">
+            <a:avLst/>
+          </a:prstGeom>
+          <a:noFill/>
+          <a:ln/>
+        </p:spPr>
+        <p:txBody>
+          <a:bodyPr wrap="square" lIns="0" tIns="0" rIns="0" bIns="0" rtlCol="0" anchor="ctr"/>
+          <a:lstStyle/>
+          <a:p>
+            <a:pPr indent="0" marL="0">
               <a:buNone/>
             </a:pPr>
             <a:r>
               <a:rPr lang="en-US" sz="2200" b="1" dirty="0">
                 <a:solidFill>
-                  <a:srgbClr val="F5F5F5"/>
+                  <a:srgbClr val="C9A227"/>
                 </a:solidFill>
                 <a:latin typeface="Arial" pitchFamily="34" charset="0"/>
                 <a:ea typeface="Arial" pitchFamily="34" charset="-122"/>
@@ -6470,32 +7176,32 @@
       </p:sp>
       <p:sp>
         <p:nvSpPr>
-          <p:cNvPr id="5" name="Text 3"/>
-          <p:cNvSpPr/>
-          <p:nvPr/>
-        </p:nvSpPr>
-        <p:spPr>
-          <a:xfrm>
-            <a:off x="1371600" y="1051560"/>
-            <a:ext cx="7132320" cy="822960"/>
-          </a:xfrm>
-          <a:prstGeom prst="rect">
-            <a:avLst/>
-          </a:prstGeom>
-          <a:noFill/>
-          <a:ln/>
-        </p:spPr>
-        <p:txBody>
-          <a:bodyPr wrap="square" lIns="0" tIns="0" rIns="0" bIns="0" rtlCol="0" anchor="ctr"/>
-          <a:lstStyle/>
-          <a:p>
-            <a:pPr indent="0" marL="0">
-              <a:buNone/>
-            </a:pPr>
-            <a:r>
-              <a:rPr lang="en-US" sz="1500" dirty="0">
-                <a:solidFill>
-                  <a:srgbClr val="1A1A1A"/>
+          <p:cNvPr id="6" name="Text 4"/>
+          <p:cNvSpPr/>
+          <p:nvPr/>
+        </p:nvSpPr>
+        <p:spPr>
+          <a:xfrm>
+            <a:off x="1280160" y="1161288"/>
+            <a:ext cx="7132320" cy="594360"/>
+          </a:xfrm>
+          <a:prstGeom prst="rect">
+            <a:avLst/>
+          </a:prstGeom>
+          <a:noFill/>
+          <a:ln/>
+        </p:spPr>
+        <p:txBody>
+          <a:bodyPr wrap="square" lIns="0" tIns="0" rIns="0" bIns="0" rtlCol="0" anchor="ctr"/>
+          <a:lstStyle/>
+          <a:p>
+            <a:pPr indent="0" marL="0">
+              <a:buNone/>
+            </a:pPr>
+            <a:r>
+              <a:rPr lang="en-US" sz="1400" dirty="0">
+                <a:solidFill>
+                  <a:srgbClr val="FFFFFF"/>
                 </a:solidFill>
                 <a:latin typeface="Arial" pitchFamily="34" charset="0"/>
                 <a:ea typeface="Arial" pitchFamily="34" charset="-122"/>
@@ -6503,58 +7209,65 @@
               </a:rPr>
               <a:t>Run the diagnostic questions on your critical workforce segments — with explicit attention to temporary vs. long-term American capability.</a:t>
             </a:r>
-            <a:endParaRPr lang="en-US" sz="1500" dirty="0"/>
-          </a:p>
-        </p:txBody>
-      </p:sp>
-      <p:sp>
-        <p:nvSpPr>
-          <p:cNvPr id="6" name="Shape 4"/>
-          <p:cNvSpPr/>
-          <p:nvPr/>
-        </p:nvSpPr>
-        <p:spPr>
-          <a:xfrm>
-            <a:off x="457200" y="2148840"/>
-            <a:ext cx="640080" cy="640080"/>
-          </a:xfrm>
-          <a:prstGeom prst="ellipse">
-            <a:avLst/>
+            <a:endParaRPr lang="en-US" sz="1400" dirty="0"/>
+          </a:p>
+        </p:txBody>
+      </p:sp>
+      <p:sp>
+        <p:nvSpPr>
+          <p:cNvPr id="7" name="Shape 5"/>
+          <p:cNvSpPr/>
+          <p:nvPr/>
+        </p:nvSpPr>
+        <p:spPr>
+          <a:xfrm>
+            <a:off x="457200" y="2057400"/>
+            <a:ext cx="8229600" cy="960120"/>
+          </a:xfrm>
+          <a:prstGeom prst="roundRect">
+            <a:avLst>
+              <a:gd name="adj" fmla="val 7619"/>
+            </a:avLst>
           </a:prstGeom>
           <a:solidFill>
-            <a:srgbClr val="1A1A1A"/>
+            <a:srgbClr val="1B2A4A"/>
           </a:solidFill>
-          <a:ln/>
-        </p:spPr>
-      </p:sp>
-      <p:sp>
-        <p:nvSpPr>
-          <p:cNvPr id="7" name="Text 5"/>
-          <p:cNvSpPr/>
-          <p:nvPr/>
-        </p:nvSpPr>
-        <p:spPr>
-          <a:xfrm>
-            <a:off x="457200" y="2148840"/>
-            <a:ext cx="640080" cy="640080"/>
-          </a:xfrm>
-          <a:prstGeom prst="rect">
-            <a:avLst/>
-          </a:prstGeom>
-          <a:noFill/>
-          <a:ln/>
-        </p:spPr>
-        <p:txBody>
-          <a:bodyPr wrap="square" lIns="0" tIns="0" rIns="0" bIns="0" rtlCol="0" anchor="ctr"/>
-          <a:lstStyle/>
-          <a:p>
-            <a:pPr algn="ctr" indent="0" marL="0">
+          <a:ln w="12700">
+            <a:solidFill>
+              <a:srgbClr val="1B2A4A"/>
+            </a:solidFill>
+            <a:prstDash val="solid"/>
+          </a:ln>
+        </p:spPr>
+      </p:sp>
+      <p:sp>
+        <p:nvSpPr>
+          <p:cNvPr id="8" name="Text 6"/>
+          <p:cNvSpPr/>
+          <p:nvPr/>
+        </p:nvSpPr>
+        <p:spPr>
+          <a:xfrm>
+            <a:off x="640080" y="2331720"/>
+            <a:ext cx="457200" cy="411480"/>
+          </a:xfrm>
+          <a:prstGeom prst="rect">
+            <a:avLst/>
+          </a:prstGeom>
+          <a:noFill/>
+          <a:ln/>
+        </p:spPr>
+        <p:txBody>
+          <a:bodyPr wrap="square" lIns="0" tIns="0" rIns="0" bIns="0" rtlCol="0" anchor="ctr"/>
+          <a:lstStyle/>
+          <a:p>
+            <a:pPr indent="0" marL="0">
               <a:buNone/>
             </a:pPr>
             <a:r>
               <a:rPr lang="en-US" sz="2200" b="1" dirty="0">
                 <a:solidFill>
-                  <a:srgbClr val="F5F5F5"/>
+                  <a:srgbClr val="C9A227"/>
                 </a:solidFill>
                 <a:latin typeface="Arial" pitchFamily="34" charset="0"/>
                 <a:ea typeface="Arial" pitchFamily="34" charset="-122"/>
@@ -6568,32 +7281,32 @@
       </p:sp>
       <p:sp>
         <p:nvSpPr>
-          <p:cNvPr id="8" name="Text 6"/>
-          <p:cNvSpPr/>
-          <p:nvPr/>
-        </p:nvSpPr>
-        <p:spPr>
-          <a:xfrm>
-            <a:off x="1371600" y="2148840"/>
-            <a:ext cx="7132320" cy="822960"/>
-          </a:xfrm>
-          <a:prstGeom prst="rect">
-            <a:avLst/>
-          </a:prstGeom>
-          <a:noFill/>
-          <a:ln/>
-        </p:spPr>
-        <p:txBody>
-          <a:bodyPr wrap="square" lIns="0" tIns="0" rIns="0" bIns="0" rtlCol="0" anchor="ctr"/>
-          <a:lstStyle/>
-          <a:p>
-            <a:pPr indent="0" marL="0">
-              <a:buNone/>
-            </a:pPr>
-            <a:r>
-              <a:rPr lang="en-US" sz="1500" dirty="0">
-                <a:solidFill>
-                  <a:srgbClr val="1A1A1A"/>
+          <p:cNvPr id="9" name="Text 7"/>
+          <p:cNvSpPr/>
+          <p:nvPr/>
+        </p:nvSpPr>
+        <p:spPr>
+          <a:xfrm>
+            <a:off x="1280160" y="2258568"/>
+            <a:ext cx="7132320" cy="594360"/>
+          </a:xfrm>
+          <a:prstGeom prst="rect">
+            <a:avLst/>
+          </a:prstGeom>
+          <a:noFill/>
+          <a:ln/>
+        </p:spPr>
+        <p:txBody>
+          <a:bodyPr wrap="square" lIns="0" tIns="0" rIns="0" bIns="0" rtlCol="0" anchor="ctr"/>
+          <a:lstStyle/>
+          <a:p>
+            <a:pPr indent="0" marL="0">
+              <a:buNone/>
+            </a:pPr>
+            <a:r>
+              <a:rPr lang="en-US" sz="1400" dirty="0">
+                <a:solidFill>
+                  <a:srgbClr val="FFFFFF"/>
                 </a:solidFill>
                 <a:latin typeface="Arial" pitchFamily="34" charset="0"/>
                 <a:ea typeface="Arial" pitchFamily="34" charset="-122"/>
@@ -6601,58 +7314,65 @@
               </a:rPr>
               <a:t>Re-evaluate one major production or supplier decision against the goal of strengthening domestic productive capacity.</a:t>
             </a:r>
-            <a:endParaRPr lang="en-US" sz="1500" dirty="0"/>
-          </a:p>
-        </p:txBody>
-      </p:sp>
-      <p:sp>
-        <p:nvSpPr>
-          <p:cNvPr id="9" name="Shape 7"/>
-          <p:cNvSpPr/>
-          <p:nvPr/>
-        </p:nvSpPr>
-        <p:spPr>
-          <a:xfrm>
-            <a:off x="457200" y="3246120"/>
-            <a:ext cx="640080" cy="640080"/>
-          </a:xfrm>
-          <a:prstGeom prst="ellipse">
-            <a:avLst/>
+            <a:endParaRPr lang="en-US" sz="1400" dirty="0"/>
+          </a:p>
+        </p:txBody>
+      </p:sp>
+      <p:sp>
+        <p:nvSpPr>
+          <p:cNvPr id="10" name="Shape 8"/>
+          <p:cNvSpPr/>
+          <p:nvPr/>
+        </p:nvSpPr>
+        <p:spPr>
+          <a:xfrm>
+            <a:off x="457200" y="3154680"/>
+            <a:ext cx="8229600" cy="960120"/>
+          </a:xfrm>
+          <a:prstGeom prst="roundRect">
+            <a:avLst>
+              <a:gd name="adj" fmla="val 7619"/>
+            </a:avLst>
           </a:prstGeom>
           <a:solidFill>
-            <a:srgbClr val="1A1A1A"/>
+            <a:srgbClr val="1B2A4A"/>
           </a:solidFill>
-          <a:ln/>
-        </p:spPr>
-      </p:sp>
-      <p:sp>
-        <p:nvSpPr>
-          <p:cNvPr id="10" name="Text 8"/>
-          <p:cNvSpPr/>
-          <p:nvPr/>
-        </p:nvSpPr>
-        <p:spPr>
-          <a:xfrm>
-            <a:off x="457200" y="3246120"/>
-            <a:ext cx="640080" cy="640080"/>
-          </a:xfrm>
-          <a:prstGeom prst="rect">
-            <a:avLst/>
-          </a:prstGeom>
-          <a:noFill/>
-          <a:ln/>
-        </p:spPr>
-        <p:txBody>
-          <a:bodyPr wrap="square" lIns="0" tIns="0" rIns="0" bIns="0" rtlCol="0" anchor="ctr"/>
-          <a:lstStyle/>
-          <a:p>
-            <a:pPr algn="ctr" indent="0" marL="0">
+          <a:ln w="12700">
+            <a:solidFill>
+              <a:srgbClr val="1B2A4A"/>
+            </a:solidFill>
+            <a:prstDash val="solid"/>
+          </a:ln>
+        </p:spPr>
+      </p:sp>
+      <p:sp>
+        <p:nvSpPr>
+          <p:cNvPr id="11" name="Text 9"/>
+          <p:cNvSpPr/>
+          <p:nvPr/>
+        </p:nvSpPr>
+        <p:spPr>
+          <a:xfrm>
+            <a:off x="640080" y="3429000"/>
+            <a:ext cx="457200" cy="411480"/>
+          </a:xfrm>
+          <a:prstGeom prst="rect">
+            <a:avLst/>
+          </a:prstGeom>
+          <a:noFill/>
+          <a:ln/>
+        </p:spPr>
+        <p:txBody>
+          <a:bodyPr wrap="square" lIns="0" tIns="0" rIns="0" bIns="0" rtlCol="0" anchor="ctr"/>
+          <a:lstStyle/>
+          <a:p>
+            <a:pPr indent="0" marL="0">
               <a:buNone/>
             </a:pPr>
             <a:r>
               <a:rPr lang="en-US" sz="2200" b="1" dirty="0">
                 <a:solidFill>
-                  <a:srgbClr val="F5F5F5"/>
+                  <a:srgbClr val="C9A227"/>
                 </a:solidFill>
                 <a:latin typeface="Arial" pitchFamily="34" charset="0"/>
                 <a:ea typeface="Arial" pitchFamily="34" charset="-122"/>
@@ -6666,32 +7386,32 @@
       </p:sp>
       <p:sp>
         <p:nvSpPr>
-          <p:cNvPr id="11" name="Text 9"/>
-          <p:cNvSpPr/>
-          <p:nvPr/>
-        </p:nvSpPr>
-        <p:spPr>
-          <a:xfrm>
-            <a:off x="1371600" y="3246120"/>
-            <a:ext cx="7132320" cy="822960"/>
-          </a:xfrm>
-          <a:prstGeom prst="rect">
-            <a:avLst/>
-          </a:prstGeom>
-          <a:noFill/>
-          <a:ln/>
-        </p:spPr>
-        <p:txBody>
-          <a:bodyPr wrap="square" lIns="0" tIns="0" rIns="0" bIns="0" rtlCol="0" anchor="ctr"/>
-          <a:lstStyle/>
-          <a:p>
-            <a:pPr indent="0" marL="0">
-              <a:buNone/>
-            </a:pPr>
-            <a:r>
-              <a:rPr lang="en-US" sz="1500" dirty="0">
-                <a:solidFill>
-                  <a:srgbClr val="1A1A1A"/>
+          <p:cNvPr id="12" name="Text 10"/>
+          <p:cNvSpPr/>
+          <p:nvPr/>
+        </p:nvSpPr>
+        <p:spPr>
+          <a:xfrm>
+            <a:off x="1280160" y="3355848"/>
+            <a:ext cx="7132320" cy="594360"/>
+          </a:xfrm>
+          <a:prstGeom prst="rect">
+            <a:avLst/>
+          </a:prstGeom>
+          <a:noFill/>
+          <a:ln/>
+        </p:spPr>
+        <p:txBody>
+          <a:bodyPr wrap="square" lIns="0" tIns="0" rIns="0" bIns="0" rtlCol="0" anchor="ctr"/>
+          <a:lstStyle/>
+          <a:p>
+            <a:pPr indent="0" marL="0">
+              <a:buNone/>
+            </a:pPr>
+            <a:r>
+              <a:rPr lang="en-US" sz="1400" dirty="0">
+                <a:solidFill>
+                  <a:srgbClr val="FFFFFF"/>
                 </a:solidFill>
                 <a:latin typeface="Arial" pitchFamily="34" charset="0"/>
                 <a:ea typeface="Arial" pitchFamily="34" charset="-122"/>
@@ -6699,38 +7419,38 @@
               </a:rPr>
               <a:t>Update the Key Resources and Key Activities sections of your Business Model Canvas with a productive-sovereignty filter.</a:t>
             </a:r>
-            <a:endParaRPr lang="en-US" sz="1500" dirty="0"/>
-          </a:p>
-        </p:txBody>
-      </p:sp>
-      <p:sp>
-        <p:nvSpPr>
-          <p:cNvPr id="12" name="Text 10"/>
+            <a:endParaRPr lang="en-US" sz="1400" dirty="0"/>
+          </a:p>
+        </p:txBody>
+      </p:sp>
+      <p:sp>
+        <p:nvSpPr>
+          <p:cNvPr id="13" name="Text 11"/>
           <p:cNvSpPr/>
           <p:nvPr/>
         </p:nvSpPr>
         <p:spPr>
           <a:xfrm>
             <a:off x="457200" y="4800600"/>
-            <a:ext cx="5943600" cy="228600"/>
-          </a:xfrm>
-          <a:prstGeom prst="rect">
-            <a:avLst/>
-          </a:prstGeom>
-          <a:noFill/>
-          <a:ln/>
-        </p:spPr>
-        <p:txBody>
-          <a:bodyPr wrap="square" lIns="0" tIns="0" rIns="0" bIns="0" rtlCol="0" anchor="ctr"/>
-          <a:lstStyle/>
-          <a:p>
-            <a:pPr indent="0" marL="0">
-              <a:buNone/>
-            </a:pPr>
-            <a:r>
-              <a:rPr lang="en-US" sz="1000" dirty="0">
-                <a:solidFill>
-                  <a:srgbClr val="555555"/>
+            <a:ext cx="5943600" cy="256032"/>
+          </a:xfrm>
+          <a:prstGeom prst="rect">
+            <a:avLst/>
+          </a:prstGeom>
+          <a:noFill/>
+          <a:ln/>
+        </p:spPr>
+        <p:txBody>
+          <a:bodyPr wrap="square" lIns="0" tIns="0" rIns="0" bIns="0" rtlCol="0" anchor="ctr"/>
+          <a:lstStyle/>
+          <a:p>
+            <a:pPr indent="0" marL="0">
+              <a:buNone/>
+            </a:pPr>
+            <a:r>
+              <a:rPr lang="en-US" sz="1100" dirty="0">
+                <a:solidFill>
+                  <a:srgbClr val="6A6A6A"/>
                 </a:solidFill>
                 <a:latin typeface="Arial" pitchFamily="34" charset="0"/>
                 <a:ea typeface="Arial" pitchFamily="34" charset="-122"/>
@@ -6738,20 +7458,20 @@
               </a:rPr>
               <a:t>Joshua Konkle  |  Chief of Staff Strategist</a:t>
             </a:r>
-            <a:endParaRPr lang="en-US" sz="1000" dirty="0"/>
-          </a:p>
-        </p:txBody>
-      </p:sp>
-      <p:sp>
-        <p:nvSpPr>
-          <p:cNvPr id="13" name="Text 11"/>
-          <p:cNvSpPr/>
-          <p:nvPr/>
-        </p:nvSpPr>
-        <p:spPr>
-          <a:xfrm>
-            <a:off x="7772400" y="4800600"/>
-            <a:ext cx="914400" cy="228600"/>
+            <a:endParaRPr lang="en-US" sz="1100" dirty="0"/>
+          </a:p>
+        </p:txBody>
+      </p:sp>
+      <p:sp>
+        <p:nvSpPr>
+          <p:cNvPr id="14" name="Text 12"/>
+          <p:cNvSpPr/>
+          <p:nvPr/>
+        </p:nvSpPr>
+        <p:spPr>
+          <a:xfrm>
+            <a:off x="7498080" y="4800600"/>
+            <a:ext cx="1188720" cy="256032"/>
           </a:xfrm>
           <a:prstGeom prst="rect">
             <a:avLst/>
@@ -6767,9 +7487,9 @@
               <a:buNone/>
             </a:pPr>
             <a:r>
-              <a:rPr lang="en-US" sz="1000" dirty="0">
-                <a:solidFill>
-                  <a:srgbClr val="555555"/>
+              <a:rPr lang="en-US" sz="1100" dirty="0">
+                <a:solidFill>
+                  <a:srgbClr val="6A6A6A"/>
                 </a:solidFill>
                 <a:latin typeface="Arial" pitchFamily="34" charset="0"/>
                 <a:ea typeface="Arial" pitchFamily="34" charset="-122"/>
@@ -6777,7 +7497,7 @@
               </a:rPr>
               <a:t>9 / 11</a:t>
             </a:r>
-            <a:endParaRPr lang="en-US" sz="1000" dirty="0"/>
+            <a:endParaRPr lang="en-US" sz="1100" dirty="0"/>
           </a:p>
         </p:txBody>
       </p:sp>
